--- a/ppt/06InfEstat_IntConf_Extra.pptx
+++ b/ppt/06InfEstat_IntConf_Extra.pptx
@@ -164,6 +164,67 @@
 </p:presentation>
 </file>
 
+<file path=ppt/changesInfos/changesInfo1.xml><?xml version="1.0" encoding="utf-8"?>
+<pc:chgInfo xmlns:a="http://schemas.openxmlformats.org/drawingml/2006/main" xmlns:r="http://schemas.openxmlformats.org/officeDocument/2006/relationships" xmlns:ac="http://schemas.microsoft.com/office/drawing/2013/main/command" xmlns:pc="http://schemas.microsoft.com/office/powerpoint/2013/main/command">
+  <pc:docChgLst>
+    <pc:chgData name="Camilo Daleles Rennó" userId="eac9aab033b2f962" providerId="LiveId" clId="{66F2CC40-D4C3-4CFA-ABD7-5BED1CC1AA32}"/>
+    <pc:docChg chg="custSel modSld">
+      <pc:chgData name="Camilo Daleles Rennó" userId="eac9aab033b2f962" providerId="LiveId" clId="{66F2CC40-D4C3-4CFA-ABD7-5BED1CC1AA32}" dt="2025-05-19T15:48:09.206" v="3"/>
+      <pc:docMkLst>
+        <pc:docMk/>
+      </pc:docMkLst>
+      <pc:sldChg chg="addSp delSp modSp mod">
+        <pc:chgData name="Camilo Daleles Rennó" userId="eac9aab033b2f962" providerId="LiveId" clId="{66F2CC40-D4C3-4CFA-ABD7-5BED1CC1AA32}" dt="2025-05-19T15:48:09.206" v="3"/>
+        <pc:sldMkLst>
+          <pc:docMk/>
+          <pc:sldMk cId="0" sldId="380"/>
+        </pc:sldMkLst>
+        <pc:spChg chg="add mod">
+          <ac:chgData name="Camilo Daleles Rennó" userId="eac9aab033b2f962" providerId="LiveId" clId="{66F2CC40-D4C3-4CFA-ABD7-5BED1CC1AA32}" dt="2025-05-19T15:48:09.206" v="3"/>
+          <ac:spMkLst>
+            <pc:docMk/>
+            <pc:sldMk cId="0" sldId="380"/>
+            <ac:spMk id="2" creationId="{FD6F7D79-BD36-9214-30C1-166AAE5C5A52}"/>
+          </ac:spMkLst>
+        </pc:spChg>
+        <pc:spChg chg="mod">
+          <ac:chgData name="Camilo Daleles Rennó" userId="eac9aab033b2f962" providerId="LiveId" clId="{66F2CC40-D4C3-4CFA-ABD7-5BED1CC1AA32}" dt="2025-05-07T16:19:53.924" v="1" actId="20577"/>
+          <ac:spMkLst>
+            <pc:docMk/>
+            <pc:sldMk cId="0" sldId="380"/>
+            <ac:spMk id="3074" creationId="{00000000-0000-0000-0000-000000000000}"/>
+          </ac:spMkLst>
+        </pc:spChg>
+      </pc:sldChg>
+    </pc:docChg>
+  </pc:docChgLst>
+  <pc:docChgLst>
+    <pc:chgData name="Camilo Daleles Rennó" userId="eac9aab033b2f962" providerId="LiveId" clId="{23BF80B5-7ECC-4E74-BDF7-B3ADE7D62386}"/>
+    <pc:docChg chg="modSld">
+      <pc:chgData name="Camilo Daleles Rennó" userId="eac9aab033b2f962" providerId="LiveId" clId="{23BF80B5-7ECC-4E74-BDF7-B3ADE7D62386}" dt="2025-06-09T13:11:27.122" v="11" actId="20577"/>
+      <pc:docMkLst>
+        <pc:docMk/>
+      </pc:docMkLst>
+      <pc:sldChg chg="modSp mod">
+        <pc:chgData name="Camilo Daleles Rennó" userId="eac9aab033b2f962" providerId="LiveId" clId="{23BF80B5-7ECC-4E74-BDF7-B3ADE7D62386}" dt="2025-06-09T13:11:27.122" v="11" actId="20577"/>
+        <pc:sldMkLst>
+          <pc:docMk/>
+          <pc:sldMk cId="0" sldId="380"/>
+        </pc:sldMkLst>
+        <pc:spChg chg="mod">
+          <ac:chgData name="Camilo Daleles Rennó" userId="eac9aab033b2f962" providerId="LiveId" clId="{23BF80B5-7ECC-4E74-BDF7-B3ADE7D62386}" dt="2025-06-09T13:11:27.122" v="11" actId="20577"/>
+          <ac:spMkLst>
+            <pc:docMk/>
+            <pc:sldMk cId="0" sldId="380"/>
+            <ac:spMk id="3074" creationId="{00000000-0000-0000-0000-000000000000}"/>
+          </ac:spMkLst>
+        </pc:spChg>
+      </pc:sldChg>
+    </pc:docChg>
+  </pc:docChgLst>
+</pc:chgInfo>
+</file>
+
 <file path=ppt/notesMasters/notesMaster1.xml><?xml version="1.0" encoding="utf-8"?>
 <p:notesMaster xmlns:a="http://schemas.openxmlformats.org/drawingml/2006/main" xmlns:r="http://schemas.openxmlformats.org/officeDocument/2006/relationships" xmlns:p="http://schemas.openxmlformats.org/presentationml/2006/main">
   <p:cSld>
@@ -212,14 +273,16 @@
           <a:bodyPr vert="horz" lIns="91440" tIns="45720" rIns="91440" bIns="45720" rtlCol="0"/>
           <a:lstStyle>
             <a:lvl1pPr algn="l">
-              <a:defRPr sz="1200"/>
+              <a:defRPr sz="1200">
+                <a:latin typeface="Tahoma" panose="020B0604030504040204" pitchFamily="34" charset="0"/>
+              </a:defRPr>
             </a:lvl1pPr>
           </a:lstStyle>
           <a:p>
             <a:pPr>
               <a:defRPr/>
             </a:pPr>
-            <a:endParaRPr lang="pt-BR"/>
+            <a:endParaRPr lang="pt-BR" dirty="0"/>
           </a:p>
         </p:txBody>
       </p:sp>
@@ -246,7 +309,9 @@
           <a:bodyPr vert="horz" lIns="91440" tIns="45720" rIns="91440" bIns="45720" rtlCol="0"/>
           <a:lstStyle>
             <a:lvl1pPr algn="r">
-              <a:defRPr sz="1200"/>
+              <a:defRPr sz="1200">
+                <a:latin typeface="Tahoma" panose="020B0604030504040204" pitchFamily="34" charset="0"/>
+              </a:defRPr>
             </a:lvl1pPr>
           </a:lstStyle>
           <a:p>
@@ -254,13 +319,13 @@
               <a:defRPr/>
             </a:pPr>
             <a:fld id="{369C507B-ED65-475A-A227-99EB1A629AA0}" type="datetimeFigureOut">
-              <a:rPr lang="pt-BR"/>
+              <a:rPr lang="pt-BR" smtClean="0"/>
               <a:pPr>
                 <a:defRPr/>
               </a:pPr>
-              <a:t>22/05/2024</a:t>
+              <a:t>09/06/2025</a:t>
             </a:fld>
-            <a:endParaRPr lang="pt-BR"/>
+            <a:endParaRPr lang="pt-BR" dirty="0"/>
           </a:p>
         </p:txBody>
       </p:sp>
@@ -294,7 +359,7 @@
           <a:lstStyle/>
           <a:p>
             <a:pPr lvl="0"/>
-            <a:endParaRPr lang="pt-BR" noProof="0" smtClean="0"/>
+            <a:endParaRPr lang="pt-BR" noProof="0"/>
           </a:p>
         </p:txBody>
       </p:sp>
@@ -323,35 +388,35 @@
           <a:p>
             <a:pPr lvl="0"/>
             <a:r>
-              <a:rPr lang="pt-BR" noProof="0" smtClean="0"/>
+              <a:rPr lang="pt-BR" noProof="0"/>
               <a:t>Clique para editar o texto mestre</a:t>
             </a:r>
           </a:p>
           <a:p>
             <a:pPr lvl="1"/>
             <a:r>
-              <a:rPr lang="pt-BR" noProof="0" smtClean="0"/>
+              <a:rPr lang="pt-BR" noProof="0"/>
               <a:t>Segundo nível</a:t>
             </a:r>
           </a:p>
           <a:p>
             <a:pPr lvl="2"/>
             <a:r>
-              <a:rPr lang="pt-BR" noProof="0" smtClean="0"/>
+              <a:rPr lang="pt-BR" noProof="0"/>
               <a:t>Terceiro nível</a:t>
             </a:r>
           </a:p>
           <a:p>
             <a:pPr lvl="3"/>
             <a:r>
-              <a:rPr lang="pt-BR" noProof="0" smtClean="0"/>
+              <a:rPr lang="pt-BR" noProof="0"/>
               <a:t>Quarto nível</a:t>
             </a:r>
           </a:p>
           <a:p>
             <a:pPr lvl="4"/>
             <a:r>
-              <a:rPr lang="pt-BR" noProof="0" smtClean="0"/>
+              <a:rPr lang="pt-BR" noProof="0"/>
               <a:t>Quinto nível</a:t>
             </a:r>
           </a:p>
@@ -380,14 +445,16 @@
           <a:bodyPr vert="horz" lIns="91440" tIns="45720" rIns="91440" bIns="45720" rtlCol="0" anchor="b"/>
           <a:lstStyle>
             <a:lvl1pPr algn="l">
-              <a:defRPr sz="1200"/>
+              <a:defRPr sz="1200">
+                <a:latin typeface="Tahoma" panose="020B0604030504040204" pitchFamily="34" charset="0"/>
+              </a:defRPr>
             </a:lvl1pPr>
           </a:lstStyle>
           <a:p>
             <a:pPr>
               <a:defRPr/>
             </a:pPr>
-            <a:endParaRPr lang="pt-BR"/>
+            <a:endParaRPr lang="pt-BR" dirty="0"/>
           </a:p>
         </p:txBody>
       </p:sp>
@@ -414,7 +481,9 @@
           <a:bodyPr vert="horz" lIns="91440" tIns="45720" rIns="91440" bIns="45720" rtlCol="0" anchor="b"/>
           <a:lstStyle>
             <a:lvl1pPr algn="r">
-              <a:defRPr sz="1200"/>
+              <a:defRPr sz="1200">
+                <a:latin typeface="Tahoma" panose="020B0604030504040204" pitchFamily="34" charset="0"/>
+              </a:defRPr>
             </a:lvl1pPr>
           </a:lstStyle>
           <a:p>
@@ -422,13 +491,13 @@
               <a:defRPr/>
             </a:pPr>
             <a:fld id="{130E5C5D-BF94-48CE-971C-6BB414E25ED0}" type="slidenum">
-              <a:rPr lang="pt-BR"/>
+              <a:rPr lang="pt-BR" smtClean="0"/>
               <a:pPr>
                 <a:defRPr/>
               </a:pPr>
               <a:t>‹nº›</a:t>
             </a:fld>
-            <a:endParaRPr lang="pt-BR"/>
+            <a:endParaRPr lang="pt-BR" dirty="0"/>
           </a:p>
         </p:txBody>
       </p:sp>
@@ -603,10 +672,9 @@
           <a:lstStyle/>
           <a:p>
             <a:r>
-              <a:rPr lang="pt-BR" smtClean="0"/>
+              <a:rPr lang="pt-BR"/>
               <a:t>Clique para editar o estilo do título mestre</a:t>
             </a:r>
-            <a:endParaRPr lang="pt-BR"/>
           </a:p>
         </p:txBody>
       </p:sp>
@@ -668,10 +736,9 @@
           </a:lstStyle>
           <a:p>
             <a:r>
-              <a:rPr lang="pt-BR" smtClean="0"/>
+              <a:rPr lang="pt-BR"/>
               <a:t>Clique para editar o estilo do subtítulo mestre</a:t>
             </a:r>
-            <a:endParaRPr lang="pt-BR"/>
           </a:p>
         </p:txBody>
       </p:sp>
@@ -812,10 +879,9 @@
           <a:lstStyle/>
           <a:p>
             <a:r>
-              <a:rPr lang="pt-BR" smtClean="0"/>
+              <a:rPr lang="pt-BR"/>
               <a:t>Clique para editar o estilo do título mestre</a:t>
             </a:r>
-            <a:endParaRPr lang="pt-BR"/>
           </a:p>
         </p:txBody>
       </p:sp>
@@ -836,38 +902,37 @@
           <a:p>
             <a:pPr lvl="0"/>
             <a:r>
-              <a:rPr lang="pt-BR" smtClean="0"/>
+              <a:rPr lang="pt-BR"/>
               <a:t>Clique para editar os estilos do texto mestre</a:t>
             </a:r>
           </a:p>
           <a:p>
             <a:pPr lvl="1"/>
             <a:r>
-              <a:rPr lang="pt-BR" smtClean="0"/>
+              <a:rPr lang="pt-BR"/>
               <a:t>Segundo nível</a:t>
             </a:r>
           </a:p>
           <a:p>
             <a:pPr lvl="2"/>
             <a:r>
-              <a:rPr lang="pt-BR" smtClean="0"/>
+              <a:rPr lang="pt-BR"/>
               <a:t>Terceiro nível</a:t>
             </a:r>
           </a:p>
           <a:p>
             <a:pPr lvl="3"/>
             <a:r>
-              <a:rPr lang="pt-BR" smtClean="0"/>
+              <a:rPr lang="pt-BR"/>
               <a:t>Quarto nível</a:t>
             </a:r>
           </a:p>
           <a:p>
             <a:pPr lvl="4"/>
             <a:r>
-              <a:rPr lang="pt-BR" smtClean="0"/>
+              <a:rPr lang="pt-BR"/>
               <a:t>Quinto nível</a:t>
             </a:r>
-            <a:endParaRPr lang="pt-BR"/>
           </a:p>
         </p:txBody>
       </p:sp>
@@ -1013,10 +1078,9 @@
           <a:lstStyle/>
           <a:p>
             <a:r>
-              <a:rPr lang="pt-BR" smtClean="0"/>
+              <a:rPr lang="pt-BR"/>
               <a:t>Clique para editar o estilo do título mestre</a:t>
             </a:r>
-            <a:endParaRPr lang="pt-BR"/>
           </a:p>
         </p:txBody>
       </p:sp>
@@ -1042,38 +1106,37 @@
           <a:p>
             <a:pPr lvl="0"/>
             <a:r>
-              <a:rPr lang="pt-BR" smtClean="0"/>
+              <a:rPr lang="pt-BR"/>
               <a:t>Clique para editar os estilos do texto mestre</a:t>
             </a:r>
           </a:p>
           <a:p>
             <a:pPr lvl="1"/>
             <a:r>
-              <a:rPr lang="pt-BR" smtClean="0"/>
+              <a:rPr lang="pt-BR"/>
               <a:t>Segundo nível</a:t>
             </a:r>
           </a:p>
           <a:p>
             <a:pPr lvl="2"/>
             <a:r>
-              <a:rPr lang="pt-BR" smtClean="0"/>
+              <a:rPr lang="pt-BR"/>
               <a:t>Terceiro nível</a:t>
             </a:r>
           </a:p>
           <a:p>
             <a:pPr lvl="3"/>
             <a:r>
-              <a:rPr lang="pt-BR" smtClean="0"/>
+              <a:rPr lang="pt-BR"/>
               <a:t>Quarto nível</a:t>
             </a:r>
           </a:p>
           <a:p>
             <a:pPr lvl="4"/>
             <a:r>
-              <a:rPr lang="pt-BR" smtClean="0"/>
+              <a:rPr lang="pt-BR"/>
               <a:t>Quinto nível</a:t>
             </a:r>
-            <a:endParaRPr lang="pt-BR"/>
           </a:p>
         </p:txBody>
       </p:sp>
@@ -1214,10 +1277,9 @@
           <a:lstStyle/>
           <a:p>
             <a:r>
-              <a:rPr lang="pt-BR" smtClean="0"/>
+              <a:rPr lang="pt-BR"/>
               <a:t>Clique para editar o estilo do título mestre</a:t>
             </a:r>
-            <a:endParaRPr lang="pt-BR"/>
           </a:p>
         </p:txBody>
       </p:sp>
@@ -1238,38 +1300,37 @@
           <a:p>
             <a:pPr lvl="0"/>
             <a:r>
-              <a:rPr lang="pt-BR" smtClean="0"/>
+              <a:rPr lang="pt-BR"/>
               <a:t>Clique para editar os estilos do texto mestre</a:t>
             </a:r>
           </a:p>
           <a:p>
             <a:pPr lvl="1"/>
             <a:r>
-              <a:rPr lang="pt-BR" smtClean="0"/>
+              <a:rPr lang="pt-BR"/>
               <a:t>Segundo nível</a:t>
             </a:r>
           </a:p>
           <a:p>
             <a:pPr lvl="2"/>
             <a:r>
-              <a:rPr lang="pt-BR" smtClean="0"/>
+              <a:rPr lang="pt-BR"/>
               <a:t>Terceiro nível</a:t>
             </a:r>
           </a:p>
           <a:p>
             <a:pPr lvl="3"/>
             <a:r>
-              <a:rPr lang="pt-BR" smtClean="0"/>
+              <a:rPr lang="pt-BR"/>
               <a:t>Quarto nível</a:t>
             </a:r>
           </a:p>
           <a:p>
             <a:pPr lvl="4"/>
             <a:r>
-              <a:rPr lang="pt-BR" smtClean="0"/>
+              <a:rPr lang="pt-BR"/>
               <a:t>Quinto nível</a:t>
             </a:r>
-            <a:endParaRPr lang="pt-BR"/>
           </a:p>
         </p:txBody>
       </p:sp>
@@ -1346,7 +1407,7 @@
           <a:lstStyle>
             <a:lvl1pPr>
               <a:defRPr>
-                <a:latin typeface="+mn-lt"/>
+                <a:latin typeface="Tahoma" panose="020B0604030504040204" pitchFamily="34" charset="0"/>
               </a:defRPr>
             </a:lvl1pPr>
           </a:lstStyle>
@@ -1355,13 +1416,13 @@
               <a:defRPr/>
             </a:pPr>
             <a:fld id="{84131966-BAAE-4651-93F8-4C63D847CB6A}" type="slidenum">
-              <a:rPr lang="pt-BR"/>
+              <a:rPr lang="pt-BR" smtClean="0"/>
               <a:pPr>
                 <a:defRPr/>
               </a:pPr>
               <a:t>‹nº›</a:t>
             </a:fld>
-            <a:endParaRPr lang="pt-BR"/>
+            <a:endParaRPr lang="pt-BR" dirty="0"/>
           </a:p>
         </p:txBody>
       </p:sp>
@@ -1420,10 +1481,9 @@
           </a:lstStyle>
           <a:p>
             <a:r>
-              <a:rPr lang="pt-BR" smtClean="0"/>
+              <a:rPr lang="pt-BR"/>
               <a:t>Clique para editar o estilo do título mestre</a:t>
             </a:r>
-            <a:endParaRPr lang="pt-BR"/>
           </a:p>
         </p:txBody>
       </p:sp>
@@ -1486,7 +1546,7 @@
           <a:p>
             <a:pPr lvl="0"/>
             <a:r>
-              <a:rPr lang="pt-BR" smtClean="0"/>
+              <a:rPr lang="pt-BR"/>
               <a:t>Clique para editar os estilos do texto mestre</a:t>
             </a:r>
           </a:p>
@@ -1629,10 +1689,9 @@
           <a:lstStyle/>
           <a:p>
             <a:r>
-              <a:rPr lang="pt-BR" smtClean="0"/>
+              <a:rPr lang="pt-BR"/>
               <a:t>Clique para editar o estilo do título mestre</a:t>
             </a:r>
-            <a:endParaRPr lang="pt-BR"/>
           </a:p>
         </p:txBody>
       </p:sp>
@@ -1686,38 +1745,37 @@
           <a:p>
             <a:pPr lvl="0"/>
             <a:r>
-              <a:rPr lang="pt-BR" smtClean="0"/>
+              <a:rPr lang="pt-BR"/>
               <a:t>Clique para editar os estilos do texto mestre</a:t>
             </a:r>
           </a:p>
           <a:p>
             <a:pPr lvl="1"/>
             <a:r>
-              <a:rPr lang="pt-BR" smtClean="0"/>
+              <a:rPr lang="pt-BR"/>
               <a:t>Segundo nível</a:t>
             </a:r>
           </a:p>
           <a:p>
             <a:pPr lvl="2"/>
             <a:r>
-              <a:rPr lang="pt-BR" smtClean="0"/>
+              <a:rPr lang="pt-BR"/>
               <a:t>Terceiro nível</a:t>
             </a:r>
           </a:p>
           <a:p>
             <a:pPr lvl="3"/>
             <a:r>
-              <a:rPr lang="pt-BR" smtClean="0"/>
+              <a:rPr lang="pt-BR"/>
               <a:t>Quarto nível</a:t>
             </a:r>
           </a:p>
           <a:p>
             <a:pPr lvl="4"/>
             <a:r>
-              <a:rPr lang="pt-BR" smtClean="0"/>
+              <a:rPr lang="pt-BR"/>
               <a:t>Quinto nível</a:t>
             </a:r>
-            <a:endParaRPr lang="pt-BR"/>
           </a:p>
         </p:txBody>
       </p:sp>
@@ -1771,38 +1829,37 @@
           <a:p>
             <a:pPr lvl="0"/>
             <a:r>
-              <a:rPr lang="pt-BR" smtClean="0"/>
+              <a:rPr lang="pt-BR"/>
               <a:t>Clique para editar os estilos do texto mestre</a:t>
             </a:r>
           </a:p>
           <a:p>
             <a:pPr lvl="1"/>
             <a:r>
-              <a:rPr lang="pt-BR" smtClean="0"/>
+              <a:rPr lang="pt-BR"/>
               <a:t>Segundo nível</a:t>
             </a:r>
           </a:p>
           <a:p>
             <a:pPr lvl="2"/>
             <a:r>
-              <a:rPr lang="pt-BR" smtClean="0"/>
+              <a:rPr lang="pt-BR"/>
               <a:t>Terceiro nível</a:t>
             </a:r>
           </a:p>
           <a:p>
             <a:pPr lvl="3"/>
             <a:r>
-              <a:rPr lang="pt-BR" smtClean="0"/>
+              <a:rPr lang="pt-BR"/>
               <a:t>Quarto nível</a:t>
             </a:r>
           </a:p>
           <a:p>
             <a:pPr lvl="4"/>
             <a:r>
-              <a:rPr lang="pt-BR" smtClean="0"/>
+              <a:rPr lang="pt-BR"/>
               <a:t>Quinto nível</a:t>
             </a:r>
-            <a:endParaRPr lang="pt-BR"/>
           </a:p>
         </p:txBody>
       </p:sp>
@@ -1952,10 +2009,9 @@
           </a:lstStyle>
           <a:p>
             <a:r>
-              <a:rPr lang="pt-BR" smtClean="0"/>
+              <a:rPr lang="pt-BR"/>
               <a:t>Clique para editar o estilo do título mestre</a:t>
             </a:r>
-            <a:endParaRPr lang="pt-BR"/>
           </a:p>
         </p:txBody>
       </p:sp>
@@ -2018,7 +2074,7 @@
           <a:p>
             <a:pPr lvl="0"/>
             <a:r>
-              <a:rPr lang="pt-BR" smtClean="0"/>
+              <a:rPr lang="pt-BR"/>
               <a:t>Clique para editar os estilos do texto mestre</a:t>
             </a:r>
           </a:p>
@@ -2074,38 +2130,37 @@
           <a:p>
             <a:pPr lvl="0"/>
             <a:r>
-              <a:rPr lang="pt-BR" smtClean="0"/>
+              <a:rPr lang="pt-BR"/>
               <a:t>Clique para editar os estilos do texto mestre</a:t>
             </a:r>
           </a:p>
           <a:p>
             <a:pPr lvl="1"/>
             <a:r>
-              <a:rPr lang="pt-BR" smtClean="0"/>
+              <a:rPr lang="pt-BR"/>
               <a:t>Segundo nível</a:t>
             </a:r>
           </a:p>
           <a:p>
             <a:pPr lvl="2"/>
             <a:r>
-              <a:rPr lang="pt-BR" smtClean="0"/>
+              <a:rPr lang="pt-BR"/>
               <a:t>Terceiro nível</a:t>
             </a:r>
           </a:p>
           <a:p>
             <a:pPr lvl="3"/>
             <a:r>
-              <a:rPr lang="pt-BR" smtClean="0"/>
+              <a:rPr lang="pt-BR"/>
               <a:t>Quarto nível</a:t>
             </a:r>
           </a:p>
           <a:p>
             <a:pPr lvl="4"/>
             <a:r>
-              <a:rPr lang="pt-BR" smtClean="0"/>
+              <a:rPr lang="pt-BR"/>
               <a:t>Quinto nível</a:t>
             </a:r>
-            <a:endParaRPr lang="pt-BR"/>
           </a:p>
         </p:txBody>
       </p:sp>
@@ -2168,7 +2223,7 @@
           <a:p>
             <a:pPr lvl="0"/>
             <a:r>
-              <a:rPr lang="pt-BR" smtClean="0"/>
+              <a:rPr lang="pt-BR"/>
               <a:t>Clique para editar os estilos do texto mestre</a:t>
             </a:r>
           </a:p>
@@ -2224,38 +2279,37 @@
           <a:p>
             <a:pPr lvl="0"/>
             <a:r>
-              <a:rPr lang="pt-BR" smtClean="0"/>
+              <a:rPr lang="pt-BR"/>
               <a:t>Clique para editar os estilos do texto mestre</a:t>
             </a:r>
           </a:p>
           <a:p>
             <a:pPr lvl="1"/>
             <a:r>
-              <a:rPr lang="pt-BR" smtClean="0"/>
+              <a:rPr lang="pt-BR"/>
               <a:t>Segundo nível</a:t>
             </a:r>
           </a:p>
           <a:p>
             <a:pPr lvl="2"/>
             <a:r>
-              <a:rPr lang="pt-BR" smtClean="0"/>
+              <a:rPr lang="pt-BR"/>
               <a:t>Terceiro nível</a:t>
             </a:r>
           </a:p>
           <a:p>
             <a:pPr lvl="3"/>
             <a:r>
-              <a:rPr lang="pt-BR" smtClean="0"/>
+              <a:rPr lang="pt-BR"/>
               <a:t>Quarto nível</a:t>
             </a:r>
           </a:p>
           <a:p>
             <a:pPr lvl="4"/>
             <a:r>
-              <a:rPr lang="pt-BR" smtClean="0"/>
+              <a:rPr lang="pt-BR"/>
               <a:t>Quinto nível</a:t>
             </a:r>
-            <a:endParaRPr lang="pt-BR"/>
           </a:p>
         </p:txBody>
       </p:sp>
@@ -2396,10 +2450,9 @@
           <a:lstStyle/>
           <a:p>
             <a:r>
-              <a:rPr lang="pt-BR" smtClean="0"/>
+              <a:rPr lang="pt-BR"/>
               <a:t>Clique para editar o estilo do título mestre</a:t>
             </a:r>
-            <a:endParaRPr lang="pt-BR"/>
           </a:p>
         </p:txBody>
       </p:sp>
@@ -2670,10 +2723,9 @@
           </a:lstStyle>
           <a:p>
             <a:r>
-              <a:rPr lang="pt-BR" smtClean="0"/>
+              <a:rPr lang="pt-BR"/>
               <a:t>Clique para editar o estilo do título mestre</a:t>
             </a:r>
-            <a:endParaRPr lang="pt-BR"/>
           </a:p>
         </p:txBody>
       </p:sp>
@@ -2727,38 +2779,37 @@
           <a:p>
             <a:pPr lvl="0"/>
             <a:r>
-              <a:rPr lang="pt-BR" smtClean="0"/>
+              <a:rPr lang="pt-BR"/>
               <a:t>Clique para editar os estilos do texto mestre</a:t>
             </a:r>
           </a:p>
           <a:p>
             <a:pPr lvl="1"/>
             <a:r>
-              <a:rPr lang="pt-BR" smtClean="0"/>
+              <a:rPr lang="pt-BR"/>
               <a:t>Segundo nível</a:t>
             </a:r>
           </a:p>
           <a:p>
             <a:pPr lvl="2"/>
             <a:r>
-              <a:rPr lang="pt-BR" smtClean="0"/>
+              <a:rPr lang="pt-BR"/>
               <a:t>Terceiro nível</a:t>
             </a:r>
           </a:p>
           <a:p>
             <a:pPr lvl="3"/>
             <a:r>
-              <a:rPr lang="pt-BR" smtClean="0"/>
+              <a:rPr lang="pt-BR"/>
               <a:t>Quarto nível</a:t>
             </a:r>
           </a:p>
           <a:p>
             <a:pPr lvl="4"/>
             <a:r>
-              <a:rPr lang="pt-BR" smtClean="0"/>
+              <a:rPr lang="pt-BR"/>
               <a:t>Quinto nível</a:t>
             </a:r>
-            <a:endParaRPr lang="pt-BR"/>
           </a:p>
         </p:txBody>
       </p:sp>
@@ -2821,7 +2872,7 @@
           <a:p>
             <a:pPr lvl="0"/>
             <a:r>
-              <a:rPr lang="pt-BR" smtClean="0"/>
+              <a:rPr lang="pt-BR"/>
               <a:t>Clique para editar os estilos do texto mestre</a:t>
             </a:r>
           </a:p>
@@ -2973,10 +3024,9 @@
           </a:lstStyle>
           <a:p>
             <a:r>
-              <a:rPr lang="pt-BR" smtClean="0"/>
+              <a:rPr lang="pt-BR"/>
               <a:t>Clique para editar o estilo do título mestre</a:t>
             </a:r>
-            <a:endParaRPr lang="pt-BR"/>
           </a:p>
         </p:txBody>
       </p:sp>
@@ -3101,7 +3151,7 @@
           <a:p>
             <a:pPr lvl="0"/>
             <a:r>
-              <a:rPr lang="pt-BR" smtClean="0"/>
+              <a:rPr lang="pt-BR"/>
               <a:t>Clique para editar os estilos do texto mestre</a:t>
             </a:r>
           </a:p>
@@ -3273,7 +3323,7 @@
           <a:p>
             <a:pPr lvl="0"/>
             <a:r>
-              <a:rPr lang="pt-BR" smtClean="0"/>
+              <a:rPr lang="pt-BR" dirty="0"/>
               <a:t>Clique para editar o estilo do título mestre</a:t>
             </a:r>
           </a:p>
@@ -3331,35 +3381,35 @@
           <a:p>
             <a:pPr lvl="0"/>
             <a:r>
-              <a:rPr lang="pt-BR" altLang="pt-BR" smtClean="0"/>
+              <a:rPr lang="pt-BR" altLang="pt-BR" dirty="0"/>
               <a:t>Clique para editar os estilos do texto mestre</a:t>
             </a:r>
           </a:p>
           <a:p>
             <a:pPr lvl="1"/>
             <a:r>
-              <a:rPr lang="pt-BR" altLang="pt-BR" smtClean="0"/>
+              <a:rPr lang="pt-BR" altLang="pt-BR" dirty="0"/>
               <a:t>Segundo nível</a:t>
             </a:r>
           </a:p>
           <a:p>
             <a:pPr lvl="2"/>
             <a:r>
-              <a:rPr lang="pt-BR" altLang="pt-BR" smtClean="0"/>
+              <a:rPr lang="pt-BR" altLang="pt-BR" dirty="0"/>
               <a:t>Terceiro nível</a:t>
             </a:r>
           </a:p>
           <a:p>
             <a:pPr lvl="3"/>
             <a:r>
-              <a:rPr lang="pt-BR" altLang="pt-BR" smtClean="0"/>
+              <a:rPr lang="pt-BR" altLang="pt-BR" dirty="0"/>
               <a:t>Quarto nível</a:t>
             </a:r>
           </a:p>
           <a:p>
             <a:pPr lvl="4"/>
             <a:r>
-              <a:rPr lang="pt-BR" altLang="pt-BR" smtClean="0"/>
+              <a:rPr lang="pt-BR" altLang="pt-BR" dirty="0"/>
               <a:t>Quinto nível</a:t>
             </a:r>
           </a:p>
@@ -3572,7 +3622,8 @@
             <a:pPr>
               <a:defRPr/>
             </a:pPr>
-            <a:endParaRPr lang="pt-BR">
+            <a:endParaRPr lang="pt-BR" dirty="0">
+              <a:latin typeface="Tahoma" panose="020B0604030504040204" pitchFamily="34" charset="0"/>
               <a:cs typeface="+mn-cs"/>
             </a:endParaRPr>
           </a:p>
@@ -3613,7 +3664,7 @@
               <a:srgbClr val="C0C0C0"/>
             </a:outerShdw>
           </a:effectLst>
-          <a:latin typeface="+mj-lt"/>
+          <a:latin typeface="Tahoma" panose="020B0604030504040204" pitchFamily="34" charset="0"/>
           <a:ea typeface="+mj-ea"/>
           <a:cs typeface="+mj-cs"/>
         </a:defRPr>
@@ -3784,7 +3835,7 @@
           <a:solidFill>
             <a:schemeClr val="tx1"/>
           </a:solidFill>
-          <a:latin typeface="+mn-lt"/>
+          <a:latin typeface="Tahoma" panose="020B0604030504040204" pitchFamily="34" charset="0"/>
           <a:ea typeface="+mn-ea"/>
           <a:cs typeface="+mn-cs"/>
         </a:defRPr>
@@ -3801,7 +3852,7 @@
           <a:solidFill>
             <a:schemeClr val="tx1"/>
           </a:solidFill>
-          <a:latin typeface="+mn-lt"/>
+          <a:latin typeface="Tahoma" panose="020B0604030504040204" pitchFamily="34" charset="0"/>
         </a:defRPr>
       </a:lvl2pPr>
       <a:lvl3pPr marL="1143000" indent="-228600" algn="l" rtl="0" eaLnBrk="0" fontAlgn="base" hangingPunct="0">
@@ -3816,7 +3867,7 @@
           <a:solidFill>
             <a:schemeClr val="tx1"/>
           </a:solidFill>
-          <a:latin typeface="+mn-lt"/>
+          <a:latin typeface="Tahoma" panose="020B0604030504040204" pitchFamily="34" charset="0"/>
         </a:defRPr>
       </a:lvl3pPr>
       <a:lvl4pPr marL="1600200" indent="-228600" algn="l" rtl="0" eaLnBrk="0" fontAlgn="base" hangingPunct="0">
@@ -3831,7 +3882,7 @@
           <a:solidFill>
             <a:schemeClr val="tx1"/>
           </a:solidFill>
-          <a:latin typeface="+mn-lt"/>
+          <a:latin typeface="Tahoma" panose="020B0604030504040204" pitchFamily="34" charset="0"/>
         </a:defRPr>
       </a:lvl4pPr>
       <a:lvl5pPr marL="2057400" indent="-228600" algn="l" rtl="0" eaLnBrk="0" fontAlgn="base" hangingPunct="0">
@@ -3846,7 +3897,7 @@
           <a:solidFill>
             <a:schemeClr val="tx1"/>
           </a:solidFill>
-          <a:latin typeface="+mn-lt"/>
+          <a:latin typeface="Tahoma" panose="020B0604030504040204" pitchFamily="34" charset="0"/>
         </a:defRPr>
       </a:lvl5pPr>
       <a:lvl6pPr marL="2514600" indent="-228600" algn="l" rtl="0" fontAlgn="base">
@@ -4050,67 +4101,48 @@
               <a:defRPr/>
             </a:pPr>
             <a:r>
-              <a:rPr lang="pt-BR" sz="2400" dirty="0" smtClean="0"/>
+              <a:rPr lang="pt-BR" sz="2400" dirty="0"/>
               <a:t>Estatística: Aplicação ao Sensoriamento Remoto</a:t>
             </a:r>
             <a:br>
-              <a:rPr lang="pt-BR" sz="2400" dirty="0" smtClean="0"/>
+              <a:rPr lang="pt-BR" sz="2400" dirty="0"/>
+            </a:br>
+            <a:br>
+              <a:rPr lang="pt-BR" sz="2400" dirty="0"/>
             </a:br>
             <a:r>
-              <a:rPr lang="pt-BR" sz="2400" dirty="0" smtClean="0"/>
-              <a:t/>
+              <a:rPr lang="pt-BR" sz="2400"/>
+              <a:t>SER 204</a:t>
             </a:r>
             <a:br>
-              <a:rPr lang="pt-BR" sz="2400" dirty="0" smtClean="0"/>
+              <a:rPr lang="pt-BR" sz="2400" dirty="0"/>
+            </a:br>
+            <a:br>
+              <a:rPr lang="pt-BR" sz="2400" dirty="0"/>
             </a:br>
             <a:r>
-              <a:rPr lang="pt-BR" sz="2400" dirty="0" smtClean="0"/>
-              <a:t>SER 204 </a:t>
-            </a:r>
-            <a:r>
               <a:rPr lang="pt-BR" sz="2400" dirty="0"/>
-              <a:t>- </a:t>
-            </a:r>
-            <a:r>
-              <a:rPr lang="pt-BR" sz="2400"/>
-              <a:t>ANO  </a:t>
-            </a:r>
-            <a:r>
-              <a:rPr lang="pt-BR" sz="2400" smtClean="0"/>
-              <a:t>2024</a:t>
-            </a:r>
-            <a:r>
-              <a:rPr lang="pt-BR" sz="2400" dirty="0" smtClean="0"/>
-              <a:t/>
-            </a:r>
-            <a:br>
-              <a:rPr lang="pt-BR" sz="2400" dirty="0" smtClean="0"/>
-            </a:br>
-            <a:r>
-              <a:rPr lang="pt-BR" sz="2400" dirty="0" smtClean="0"/>
-              <a:t/>
-            </a:r>
-            <a:br>
-              <a:rPr lang="pt-BR" sz="2400" dirty="0" smtClean="0"/>
-            </a:br>
-            <a:r>
-              <a:rPr lang="pt-BR" sz="2400" dirty="0" smtClean="0"/>
               <a:t>Intervalo de Confiança</a:t>
             </a:r>
             <a:br>
-              <a:rPr lang="pt-BR" sz="2400" dirty="0" smtClean="0"/>
+              <a:rPr lang="pt-BR" sz="2400" dirty="0"/>
             </a:br>
             <a:r>
               <a:rPr lang="pt-BR" sz="2400" dirty="0"/>
               <a:t>(Extra)</a:t>
             </a:r>
-            <a:endParaRPr lang="pt-BR" sz="2400" dirty="0" smtClean="0"/>
           </a:p>
         </p:txBody>
       </p:sp>
       <p:sp>
         <p:nvSpPr>
-          <p:cNvPr id="3" name="Rectangle 3"/>
+          <p:cNvPr id="2" name="Rectangle 3">
+            <a:extLst>
+              <a:ext uri="{FF2B5EF4-FFF2-40B4-BE49-F238E27FC236}">
+                <a16:creationId xmlns:a16="http://schemas.microsoft.com/office/drawing/2014/main" id="{FD6F7D79-BD36-9214-30C1-166AAE5C5A52}"/>
+              </a:ext>
+            </a:extLst>
+          </p:cNvPr>
           <p:cNvSpPr txBox="1">
             <a:spLocks noChangeArrowheads="1"/>
           </p:cNvSpPr>
@@ -4118,8 +4150,8 @@
         </p:nvSpPr>
         <p:spPr bwMode="auto">
           <a:xfrm>
-            <a:off x="5500688" y="5903913"/>
-            <a:ext cx="3414712" cy="838200"/>
+            <a:off x="4427984" y="5903913"/>
+            <a:ext cx="4487416" cy="838200"/>
           </a:xfrm>
           <a:prstGeom prst="rect">
             <a:avLst/>
@@ -4147,34 +4179,34 @@
             </a:pPr>
             <a:r>
               <a:rPr lang="pt-BR" sz="1800" kern="0" dirty="0">
-                <a:latin typeface="+mn-lt"/>
+                <a:latin typeface="Tahoma" panose="020B0604030504040204" pitchFamily="34" charset="0"/>
                 <a:cs typeface="+mn-cs"/>
               </a:rPr>
               <a:t>Camilo </a:t>
             </a:r>
             <a:r>
               <a:rPr lang="pt-BR" sz="1800" kern="0" dirty="0" err="1">
-                <a:latin typeface="+mn-lt"/>
+                <a:latin typeface="Tahoma" panose="020B0604030504040204" pitchFamily="34" charset="0"/>
                 <a:cs typeface="+mn-cs"/>
               </a:rPr>
               <a:t>Daleles</a:t>
             </a:r>
             <a:r>
               <a:rPr lang="pt-BR" sz="1800" kern="0" dirty="0">
-                <a:latin typeface="+mn-lt"/>
+                <a:latin typeface="Tahoma" panose="020B0604030504040204" pitchFamily="34" charset="0"/>
                 <a:cs typeface="+mn-cs"/>
               </a:rPr>
               <a:t> </a:t>
             </a:r>
             <a:r>
               <a:rPr lang="pt-BR" sz="1800" kern="0" dirty="0" err="1">
-                <a:latin typeface="+mn-lt"/>
+                <a:latin typeface="Tahoma" panose="020B0604030504040204" pitchFamily="34" charset="0"/>
                 <a:cs typeface="+mn-cs"/>
               </a:rPr>
               <a:t>Rennó</a:t>
             </a:r>
             <a:endParaRPr lang="pt-BR" sz="1800" kern="0" dirty="0">
-              <a:latin typeface="+mn-lt"/>
+              <a:latin typeface="Tahoma" panose="020B0604030504040204" pitchFamily="34" charset="0"/>
               <a:cs typeface="+mn-cs"/>
             </a:endParaRPr>
           </a:p>
@@ -4189,7 +4221,7 @@
               <a:defRPr/>
             </a:pPr>
             <a:r>
-              <a:rPr lang="pt-BR" sz="1200" kern="0">
+              <a:rPr lang="pt-BR" sz="1200" kern="0" dirty="0">
                 <a:latin typeface="Arial Unicode MS" pitchFamily="34" charset="-128"/>
               </a:rPr>
               <a:t>camilo.renno@inpe.br</a:t>
@@ -4206,19 +4238,71 @@
               <a:defRPr/>
             </a:pPr>
             <a:r>
-              <a:rPr lang="pt-BR" sz="1200" kern="0" smtClean="0">
+              <a:rPr lang="pt-BR" sz="1200" kern="0" dirty="0">
                 <a:latin typeface="Arial Unicode MS" pitchFamily="34" charset="-128"/>
-                <a:cs typeface="+mn-cs"/>
               </a:rPr>
-              <a:t>http</a:t>
+              <a:t>acesso do conteúdo do curso em </a:t>
+            </a:r>
+            <a:r>
+              <a:rPr lang="pt-BR" sz="1200" kern="0" dirty="0" err="1">
+                <a:solidFill>
+                  <a:schemeClr val="accent2"/>
+                </a:solidFill>
+                <a:latin typeface="Arial Unicode MS" pitchFamily="34" charset="-128"/>
+                <a:hlinkClick r:id="rId2">
+                  <a:extLst>
+                    <a:ext uri="{A12FA001-AC4F-418D-AE19-62706E023703}">
+                      <ahyp:hlinkClr xmlns:ahyp="http://schemas.microsoft.com/office/drawing/2018/hyperlinkcolor" val="tx"/>
+                    </a:ext>
+                  </a:extLst>
+                </a:hlinkClick>
+              </a:rPr>
+              <a:t>Bibdigital</a:t>
+            </a:r>
+            <a:r>
+              <a:rPr lang="pt-BR" sz="1200" kern="0" dirty="0">
+                <a:solidFill>
+                  <a:schemeClr val="accent2"/>
+                </a:solidFill>
+                <a:latin typeface="Arial Unicode MS" pitchFamily="34" charset="-128"/>
+                <a:hlinkClick r:id="rId2">
+                  <a:extLst>
+                    <a:ext uri="{A12FA001-AC4F-418D-AE19-62706E023703}">
+                      <ahyp:hlinkClr xmlns:ahyp="http://schemas.microsoft.com/office/drawing/2018/hyperlinkcolor" val="tx"/>
+                    </a:ext>
+                  </a:extLst>
+                </a:hlinkClick>
+              </a:rPr>
+              <a:t> do INPE</a:t>
             </a:r>
             <a:r>
               <a:rPr lang="pt-BR" sz="1200" kern="0" dirty="0">
                 <a:latin typeface="Arial Unicode MS" pitchFamily="34" charset="-128"/>
-                <a:cs typeface="+mn-cs"/>
               </a:rPr>
-              <a:t>://www.dpi.inpe.br/~camilo/estatistica/</a:t>
+              <a:t> ou </a:t>
             </a:r>
+            <a:r>
+              <a:rPr lang="pt-BR" sz="1200" kern="0" dirty="0">
+                <a:solidFill>
+                  <a:schemeClr val="accent2"/>
+                </a:solidFill>
+                <a:latin typeface="Arial Unicode MS" pitchFamily="34" charset="-128"/>
+                <a:hlinkClick r:id="rId3">
+                  <a:extLst>
+                    <a:ext uri="{A12FA001-AC4F-418D-AE19-62706E023703}">
+                      <ahyp:hlinkClr xmlns:ahyp="http://schemas.microsoft.com/office/drawing/2018/hyperlinkcolor" val="tx"/>
+                    </a:ext>
+                  </a:extLst>
+                </a:hlinkClick>
+              </a:rPr>
+              <a:t>GitHub</a:t>
+            </a:r>
+            <a:endParaRPr lang="pt-BR" sz="1200" kern="0" dirty="0">
+              <a:solidFill>
+                <a:schemeClr val="accent2"/>
+              </a:solidFill>
+              <a:latin typeface="Arial Unicode MS" pitchFamily="34" charset="-128"/>
+            </a:endParaRPr>
           </a:p>
         </p:txBody>
       </p:sp>
@@ -4227,13 +4311,6 @@
   <p:clrMapOvr>
     <a:masterClrMapping/>
   </p:clrMapOvr>
-  <p:timing>
-    <p:tnLst>
-      <p:par>
-        <p:cTn id="1" dur="indefinite" restart="never" nodeType="tmRoot"/>
-      </p:par>
-    </p:tnLst>
-  </p:timing>
 </p:sld>
 </file>
 
@@ -4273,37 +4350,37 @@
               <a:defRPr/>
             </a:pPr>
             <a:r>
-              <a:rPr lang="pt-BR" smtClean="0"/>
+              <a:rPr lang="pt-BR"/>
               <a:t>Intervalo de Confiança para </a:t>
             </a:r>
             <a:r>
-              <a:rPr lang="pt-BR" i="1" smtClean="0">
+              <a:rPr lang="pt-BR" i="1">
                 <a:sym typeface="Symbol" pitchFamily="18" charset="2"/>
               </a:rPr>
               <a:t></a:t>
             </a:r>
             <a:r>
-              <a:rPr lang="pt-BR" baseline="-25000" smtClean="0">
+              <a:rPr lang="pt-BR" baseline="-25000">
                 <a:latin typeface="Times New Roman" pitchFamily="18" charset="0"/>
                 <a:sym typeface="Symbol" pitchFamily="18" charset="2"/>
               </a:rPr>
               <a:t>1</a:t>
             </a:r>
             <a:r>
-              <a:rPr lang="pt-BR" smtClean="0">
+              <a:rPr lang="pt-BR">
                 <a:latin typeface="Times New Roman" pitchFamily="18" charset="0"/>
                 <a:sym typeface="Symbol" pitchFamily="18" charset="2"/>
               </a:rPr>
               <a:t> -</a:t>
             </a:r>
             <a:r>
-              <a:rPr lang="pt-BR" i="1" smtClean="0">
+              <a:rPr lang="pt-BR" i="1">
                 <a:sym typeface="Symbol" pitchFamily="18" charset="2"/>
               </a:rPr>
               <a:t> </a:t>
             </a:r>
             <a:r>
-              <a:rPr lang="pt-BR" baseline="-25000" smtClean="0">
+              <a:rPr lang="pt-BR" baseline="-25000">
                 <a:latin typeface="Times New Roman" pitchFamily="18" charset="0"/>
                 <a:sym typeface="Symbol" pitchFamily="18" charset="2"/>
               </a:rPr>
@@ -4328,23 +4405,23 @@
           <a:graphicData uri="http://schemas.openxmlformats.org/presentationml/2006/ole">
             <mc:AlternateContent xmlns:mc="http://schemas.openxmlformats.org/markup-compatibility/2006">
               <mc:Choice xmlns:v="urn:schemas-microsoft-com:vml" Requires="v">
-                <p:oleObj spid="_x0000_s4285" name="Equation" r:id="rId3" imgW="431613" imgH="241195" progId="Equation.DSMT4">
+                <p:oleObj name="Equation" r:id="rId2" imgW="431613" imgH="241195" progId="Equation.DSMT4">
                   <p:embed/>
                 </p:oleObj>
               </mc:Choice>
               <mc:Fallback>
-                <p:oleObj name="Equation" r:id="rId3" imgW="431613" imgH="241195" progId="Equation.DSMT4">
+                <p:oleObj name="Equation" r:id="rId2" imgW="431613" imgH="241195" progId="Equation.DSMT4">
                   <p:embed/>
                   <p:pic>
                     <p:nvPicPr>
-                      <p:cNvPr id="0" name="Object 12"/>
+                      <p:cNvPr id="149516" name="Object 12"/>
                       <p:cNvPicPr>
                         <a:picLocks noChangeAspect="1" noChangeArrowheads="1"/>
                       </p:cNvPicPr>
                       <p:nvPr/>
                     </p:nvPicPr>
                     <p:blipFill>
-                      <a:blip r:embed="rId4">
+                      <a:blip r:embed="rId3">
                         <a:extLst>
                           <a:ext uri="{28A0092B-C50C-407E-A947-70E740481C1C}">
                             <a14:useLocalDpi xmlns:a14="http://schemas.microsoft.com/office/drawing/2010/main" val="0"/>
@@ -4411,23 +4488,23 @@
           <a:graphicData uri="http://schemas.openxmlformats.org/presentationml/2006/ole">
             <mc:AlternateContent xmlns:mc="http://schemas.openxmlformats.org/markup-compatibility/2006">
               <mc:Choice xmlns:v="urn:schemas-microsoft-com:vml" Requires="v">
-                <p:oleObj spid="_x0000_s4286" name="Equation" r:id="rId5" imgW="1574800" imgH="698500" progId="Equation.DSMT4">
+                <p:oleObj name="Equation" r:id="rId4" imgW="1574800" imgH="698500" progId="Equation.DSMT4">
                   <p:embed/>
                 </p:oleObj>
               </mc:Choice>
               <mc:Fallback>
-                <p:oleObj name="Equation" r:id="rId5" imgW="1574800" imgH="698500" progId="Equation.DSMT4">
+                <p:oleObj name="Equation" r:id="rId4" imgW="1574800" imgH="698500" progId="Equation.DSMT4">
                   <p:embed/>
                   <p:pic>
                     <p:nvPicPr>
-                      <p:cNvPr id="0" name="Object 13"/>
+                      <p:cNvPr id="149517" name="Object 13"/>
                       <p:cNvPicPr>
                         <a:picLocks noChangeAspect="1" noChangeArrowheads="1"/>
                       </p:cNvPicPr>
                       <p:nvPr/>
                     </p:nvPicPr>
                     <p:blipFill>
-                      <a:blip r:embed="rId6">
+                      <a:blip r:embed="rId5">
                         <a:extLst>
                           <a:ext uri="{28A0092B-C50C-407E-A947-70E740481C1C}">
                             <a14:useLocalDpi xmlns:a14="http://schemas.microsoft.com/office/drawing/2010/main" val="0"/>
@@ -4494,23 +4571,23 @@
           <a:graphicData uri="http://schemas.openxmlformats.org/presentationml/2006/ole">
             <mc:AlternateContent xmlns:mc="http://schemas.openxmlformats.org/markup-compatibility/2006">
               <mc:Choice xmlns:v="urn:schemas-microsoft-com:vml" Requires="v">
-                <p:oleObj spid="_x0000_s4287" name="Equation" r:id="rId7" imgW="457002" imgH="203112" progId="Equation.DSMT4">
+                <p:oleObj name="Equation" r:id="rId6" imgW="457002" imgH="203112" progId="Equation.DSMT4">
                   <p:embed/>
                 </p:oleObj>
               </mc:Choice>
               <mc:Fallback>
-                <p:oleObj name="Equation" r:id="rId7" imgW="457002" imgH="203112" progId="Equation.DSMT4">
+                <p:oleObj name="Equation" r:id="rId6" imgW="457002" imgH="203112" progId="Equation.DSMT4">
                   <p:embed/>
                   <p:pic>
                     <p:nvPicPr>
-                      <p:cNvPr id="0" name="Object 15"/>
+                      <p:cNvPr id="149519" name="Object 15"/>
                       <p:cNvPicPr>
                         <a:picLocks noChangeAspect="1" noChangeArrowheads="1"/>
                       </p:cNvPicPr>
                       <p:nvPr/>
                     </p:nvPicPr>
                     <p:blipFill>
-                      <a:blip r:embed="rId8">
+                      <a:blip r:embed="rId7">
                         <a:extLst>
                           <a:ext uri="{28A0092B-C50C-407E-A947-70E740481C1C}">
                             <a14:useLocalDpi xmlns:a14="http://schemas.microsoft.com/office/drawing/2010/main" val="0"/>
@@ -4613,7 +4690,7 @@
                 <p:nvPr/>
               </p:nvPicPr>
               <p:blipFill>
-                <a:blip r:embed="rId9">
+                <a:blip r:embed="rId8">
                   <a:extLst>
                     <a:ext uri="{28A0092B-C50C-407E-A947-70E740481C1C}">
                       <a14:useLocalDpi xmlns:a14="http://schemas.microsoft.com/office/drawing/2010/main" val="0"/>
@@ -5264,7 +5341,9 @@
                 <a:bodyPr/>
                 <a:lstStyle/>
                 <a:p>
-                  <a:endParaRPr lang="pt-BR"/>
+                  <a:endParaRPr lang="pt-BR" dirty="0">
+                    <a:latin typeface="Tahoma" panose="020B0604030504040204" pitchFamily="34" charset="0"/>
+                  </a:endParaRPr>
                 </a:p>
               </p:txBody>
             </p:sp>
@@ -5306,7 +5385,9 @@
               <a:bodyPr/>
               <a:lstStyle/>
               <a:p>
-                <a:endParaRPr lang="pt-BR"/>
+                <a:endParaRPr lang="pt-BR" dirty="0">
+                  <a:latin typeface="Tahoma" panose="020B0604030504040204" pitchFamily="34" charset="0"/>
+                </a:endParaRPr>
               </a:p>
             </p:txBody>
           </p:sp>
@@ -5326,23 +5407,23 @@
               <a:graphicData uri="http://schemas.openxmlformats.org/presentationml/2006/ole">
                 <mc:AlternateContent xmlns:mc="http://schemas.openxmlformats.org/markup-compatibility/2006">
                   <mc:Choice xmlns:v="urn:schemas-microsoft-com:vml" Requires="v">
-                    <p:oleObj spid="_x0000_s4288" name="Equation" r:id="rId10" imgW="457002" imgH="203112" progId="Equation.DSMT4">
+                    <p:oleObj name="Equation" r:id="rId9" imgW="457002" imgH="203112" progId="Equation.DSMT4">
                       <p:embed/>
                     </p:oleObj>
                   </mc:Choice>
                   <mc:Fallback>
-                    <p:oleObj name="Equation" r:id="rId10" imgW="457002" imgH="203112" progId="Equation.DSMT4">
+                    <p:oleObj name="Equation" r:id="rId9" imgW="457002" imgH="203112" progId="Equation.DSMT4">
                       <p:embed/>
                       <p:pic>
                         <p:nvPicPr>
-                          <p:cNvPr id="0" name="Object 10"/>
+                          <p:cNvPr id="4135" name="Object 10"/>
                           <p:cNvPicPr>
                             <a:picLocks noChangeAspect="1" noChangeArrowheads="1"/>
                           </p:cNvPicPr>
                           <p:nvPr/>
                         </p:nvPicPr>
                         <p:blipFill>
-                          <a:blip r:embed="rId8">
+                          <a:blip r:embed="rId7">
                             <a:extLst>
                               <a:ext uri="{28A0092B-C50C-407E-A947-70E740481C1C}">
                                 <a14:useLocalDpi xmlns:a14="http://schemas.microsoft.com/office/drawing/2010/main" val="0"/>
@@ -5661,7 +5742,9 @@
             <a:bodyPr/>
             <a:lstStyle/>
             <a:p>
-              <a:endParaRPr lang="pt-BR"/>
+              <a:endParaRPr lang="pt-BR" dirty="0">
+                <a:latin typeface="Tahoma" panose="020B0604030504040204" pitchFamily="34" charset="0"/>
+              </a:endParaRPr>
             </a:p>
           </p:txBody>
         </p:sp>
@@ -6084,7 +6167,9 @@
               <a:bodyPr/>
               <a:lstStyle/>
               <a:p>
-                <a:endParaRPr lang="pt-BR"/>
+                <a:endParaRPr lang="pt-BR" dirty="0">
+                  <a:latin typeface="Tahoma" panose="020B0604030504040204" pitchFamily="34" charset="0"/>
+                </a:endParaRPr>
               </a:p>
             </p:txBody>
           </p:sp>
@@ -6104,23 +6189,23 @@
               <a:graphicData uri="http://schemas.openxmlformats.org/presentationml/2006/ole">
                 <mc:AlternateContent xmlns:mc="http://schemas.openxmlformats.org/markup-compatibility/2006">
                   <mc:Choice xmlns:v="urn:schemas-microsoft-com:vml" Requires="v">
-                    <p:oleObj spid="_x0000_s4289" name="Equation" r:id="rId11" imgW="177646" imgH="393359" progId="Equation.DSMT4">
+                    <p:oleObj name="Equation" r:id="rId10" imgW="177646" imgH="393359" progId="Equation.DSMT4">
                       <p:embed/>
                     </p:oleObj>
                   </mc:Choice>
                   <mc:Fallback>
-                    <p:oleObj name="Equation" r:id="rId11" imgW="177646" imgH="393359" progId="Equation.DSMT4">
+                    <p:oleObj name="Equation" r:id="rId10" imgW="177646" imgH="393359" progId="Equation.DSMT4">
                       <p:embed/>
                       <p:pic>
                         <p:nvPicPr>
-                          <p:cNvPr id="0" name="Object 23"/>
+                          <p:cNvPr id="4132" name="Object 23"/>
                           <p:cNvPicPr>
                             <a:picLocks noChangeAspect="1" noChangeArrowheads="1"/>
                           </p:cNvPicPr>
                           <p:nvPr/>
                         </p:nvPicPr>
                         <p:blipFill>
-                          <a:blip r:embed="rId12">
+                          <a:blip r:embed="rId11">
                             <a:extLst>
                               <a:ext uri="{28A0092B-C50C-407E-A947-70E740481C1C}">
                                 <a14:useLocalDpi xmlns:a14="http://schemas.microsoft.com/office/drawing/2010/main" val="0"/>
@@ -6225,7 +6310,9 @@
               <a:bodyPr/>
               <a:lstStyle/>
               <a:p>
-                <a:endParaRPr lang="pt-BR"/>
+                <a:endParaRPr lang="pt-BR" dirty="0">
+                  <a:latin typeface="Tahoma" panose="020B0604030504040204" pitchFamily="34" charset="0"/>
+                </a:endParaRPr>
               </a:p>
             </p:txBody>
           </p:sp>
@@ -6245,23 +6332,23 @@
               <a:graphicData uri="http://schemas.openxmlformats.org/presentationml/2006/ole">
                 <mc:AlternateContent xmlns:mc="http://schemas.openxmlformats.org/markup-compatibility/2006">
                   <mc:Choice xmlns:v="urn:schemas-microsoft-com:vml" Requires="v">
-                    <p:oleObj spid="_x0000_s4290" name="Equation" r:id="rId13" imgW="177646" imgH="393359" progId="Equation.DSMT4">
+                    <p:oleObj name="Equation" r:id="rId12" imgW="177646" imgH="393359" progId="Equation.DSMT4">
                       <p:embed/>
                     </p:oleObj>
                   </mc:Choice>
                   <mc:Fallback>
-                    <p:oleObj name="Equation" r:id="rId13" imgW="177646" imgH="393359" progId="Equation.DSMT4">
+                    <p:oleObj name="Equation" r:id="rId12" imgW="177646" imgH="393359" progId="Equation.DSMT4">
                       <p:embed/>
                       <p:pic>
                         <p:nvPicPr>
-                          <p:cNvPr id="0" name="Object 26"/>
+                          <p:cNvPr id="4130" name="Object 26"/>
                           <p:cNvPicPr>
                             <a:picLocks noChangeAspect="1" noChangeArrowheads="1"/>
                           </p:cNvPicPr>
                           <p:nvPr/>
                         </p:nvPicPr>
                         <p:blipFill>
-                          <a:blip r:embed="rId14">
+                          <a:blip r:embed="rId13">
                             <a:extLst>
                               <a:ext uri="{28A0092B-C50C-407E-A947-70E740481C1C}">
                                 <a14:useLocalDpi xmlns:a14="http://schemas.microsoft.com/office/drawing/2010/main" val="0"/>
@@ -6329,23 +6416,23 @@
             <a:graphicData uri="http://schemas.openxmlformats.org/presentationml/2006/ole">
               <mc:AlternateContent xmlns:mc="http://schemas.openxmlformats.org/markup-compatibility/2006">
                 <mc:Choice xmlns:v="urn:schemas-microsoft-com:vml" Requires="v">
-                  <p:oleObj spid="_x0000_s4291" name="Equation" r:id="rId15" imgW="342603" imgH="177646" progId="Equation.DSMT4">
+                  <p:oleObj name="Equation" r:id="rId14" imgW="342603" imgH="177646" progId="Equation.DSMT4">
                     <p:embed/>
                   </p:oleObj>
                 </mc:Choice>
                 <mc:Fallback>
-                  <p:oleObj name="Equation" r:id="rId15" imgW="342603" imgH="177646" progId="Equation.DSMT4">
+                  <p:oleObj name="Equation" r:id="rId14" imgW="342603" imgH="177646" progId="Equation.DSMT4">
                     <p:embed/>
                     <p:pic>
                       <p:nvPicPr>
-                        <p:cNvPr id="0" name="Object 27"/>
+                        <p:cNvPr id="4127" name="Object 27"/>
                         <p:cNvPicPr>
                           <a:picLocks noChangeAspect="1" noChangeArrowheads="1"/>
                         </p:cNvPicPr>
                         <p:nvPr/>
                       </p:nvPicPr>
                       <p:blipFill>
-                        <a:blip r:embed="rId16">
+                        <a:blip r:embed="rId15">
                           <a:extLst>
                             <a:ext uri="{28A0092B-C50C-407E-A947-70E740481C1C}">
                               <a14:useLocalDpi xmlns:a14="http://schemas.microsoft.com/office/drawing/2010/main" val="0"/>
@@ -6412,23 +6499,23 @@
             <a:graphicData uri="http://schemas.openxmlformats.org/presentationml/2006/ole">
               <mc:AlternateContent xmlns:mc="http://schemas.openxmlformats.org/markup-compatibility/2006">
                 <mc:Choice xmlns:v="urn:schemas-microsoft-com:vml" Requires="v">
-                  <p:oleObj spid="_x0000_s4292" name="Equation" r:id="rId17" imgW="1346200" imgH="203200" progId="Equation.DSMT4">
+                  <p:oleObj name="Equation" r:id="rId16" imgW="1346200" imgH="203200" progId="Equation.DSMT4">
                     <p:embed/>
                   </p:oleObj>
                 </mc:Choice>
                 <mc:Fallback>
-                  <p:oleObj name="Equation" r:id="rId17" imgW="1346200" imgH="203200" progId="Equation.DSMT4">
+                  <p:oleObj name="Equation" r:id="rId16" imgW="1346200" imgH="203200" progId="Equation.DSMT4">
                     <p:embed/>
                     <p:pic>
                       <p:nvPicPr>
-                        <p:cNvPr id="0" name="Object 28"/>
+                        <p:cNvPr id="4128" name="Object 28"/>
                         <p:cNvPicPr>
                           <a:picLocks noChangeAspect="1" noChangeArrowheads="1"/>
                         </p:cNvPicPr>
                         <p:nvPr/>
                       </p:nvPicPr>
                       <p:blipFill>
-                        <a:blip r:embed="rId18">
+                        <a:blip r:embed="rId17">
                           <a:extLst>
                             <a:ext uri="{28A0092B-C50C-407E-A947-70E740481C1C}">
                               <a14:useLocalDpi xmlns:a14="http://schemas.microsoft.com/office/drawing/2010/main" val="0"/>
@@ -6496,23 +6583,23 @@
           <a:graphicData uri="http://schemas.openxmlformats.org/presentationml/2006/ole">
             <mc:AlternateContent xmlns:mc="http://schemas.openxmlformats.org/markup-compatibility/2006">
               <mc:Choice xmlns:v="urn:schemas-microsoft-com:vml" Requires="v">
-                <p:oleObj spid="_x0000_s4293" name="Equation" r:id="rId19" imgW="2552700" imgH="698500" progId="Equation.DSMT4">
+                <p:oleObj name="Equation" r:id="rId18" imgW="2552700" imgH="698500" progId="Equation.DSMT4">
                   <p:embed/>
                 </p:oleObj>
               </mc:Choice>
               <mc:Fallback>
-                <p:oleObj name="Equation" r:id="rId19" imgW="2552700" imgH="698500" progId="Equation.DSMT4">
+                <p:oleObj name="Equation" r:id="rId18" imgW="2552700" imgH="698500" progId="Equation.DSMT4">
                   <p:embed/>
                   <p:pic>
                     <p:nvPicPr>
-                      <p:cNvPr id="0" name="Object 29"/>
+                      <p:cNvPr id="149533" name="Object 29"/>
                       <p:cNvPicPr>
                         <a:picLocks noChangeAspect="1" noChangeArrowheads="1"/>
                       </p:cNvPicPr>
                       <p:nvPr/>
                     </p:nvPicPr>
                     <p:blipFill>
-                      <a:blip r:embed="rId20">
+                      <a:blip r:embed="rId19">
                         <a:extLst>
                           <a:ext uri="{28A0092B-C50C-407E-A947-70E740481C1C}">
                             <a14:useLocalDpi xmlns:a14="http://schemas.microsoft.com/office/drawing/2010/main" val="0"/>
@@ -6579,23 +6666,23 @@
           <a:graphicData uri="http://schemas.openxmlformats.org/presentationml/2006/ole">
             <mc:AlternateContent xmlns:mc="http://schemas.openxmlformats.org/markup-compatibility/2006">
               <mc:Choice xmlns:v="urn:schemas-microsoft-com:vml" Requires="v">
-                <p:oleObj spid="_x0000_s4294" name="Equation" r:id="rId21" imgW="4152900" imgH="495300" progId="Equation.DSMT4">
+                <p:oleObj name="Equation" r:id="rId20" imgW="4152900" imgH="495300" progId="Equation.DSMT4">
                   <p:embed/>
                 </p:oleObj>
               </mc:Choice>
               <mc:Fallback>
-                <p:oleObj name="Equation" r:id="rId21" imgW="4152900" imgH="495300" progId="Equation.DSMT4">
+                <p:oleObj name="Equation" r:id="rId20" imgW="4152900" imgH="495300" progId="Equation.DSMT4">
                   <p:embed/>
                   <p:pic>
                     <p:nvPicPr>
-                      <p:cNvPr id="0" name="Object 31"/>
+                      <p:cNvPr id="149535" name="Object 31"/>
                       <p:cNvPicPr>
                         <a:picLocks noChangeAspect="1" noChangeArrowheads="1"/>
                       </p:cNvPicPr>
                       <p:nvPr/>
                     </p:nvPicPr>
                     <p:blipFill>
-                      <a:blip r:embed="rId22">
+                      <a:blip r:embed="rId21">
                         <a:extLst>
                           <a:ext uri="{28A0092B-C50C-407E-A947-70E740481C1C}">
                             <a14:useLocalDpi xmlns:a14="http://schemas.microsoft.com/office/drawing/2010/main" val="0"/>
@@ -6813,7 +6900,9 @@
               <a:buFontTx/>
               <a:buNone/>
             </a:pPr>
-            <a:endParaRPr lang="pt-BR" altLang="pt-BR" sz="1600"/>
+            <a:endParaRPr lang="pt-BR" altLang="pt-BR" sz="1600" dirty="0">
+              <a:latin typeface="Tahoma" panose="020B0604030504040204" pitchFamily="34" charset="0"/>
+            </a:endParaRPr>
           </a:p>
         </p:txBody>
       </p:sp>
@@ -6992,15 +7081,16 @@
               <a:buNone/>
             </a:pPr>
             <a:r>
-              <a:rPr lang="pt-BR" altLang="pt-BR" sz="1800">
+              <a:rPr lang="pt-BR" altLang="pt-BR" sz="1800" dirty="0">
                 <a:solidFill>
                   <a:srgbClr val="FF3300"/>
                 </a:solidFill>
+                <a:latin typeface="Tahoma" panose="020B0604030504040204" pitchFamily="34" charset="0"/>
               </a:rPr>
               <a:t>IC para </a:t>
             </a:r>
             <a:r>
-              <a:rPr lang="pt-BR" altLang="pt-BR" sz="1800" i="1">
+              <a:rPr lang="pt-BR" altLang="pt-BR" sz="1800" i="1" dirty="0">
                 <a:solidFill>
                   <a:srgbClr val="FF3300"/>
                 </a:solidFill>
@@ -7009,7 +7099,7 @@
               <a:t>m</a:t>
             </a:r>
             <a:r>
-              <a:rPr lang="pt-BR" altLang="pt-BR" sz="1800" baseline="-25000">
+              <a:rPr lang="pt-BR" altLang="pt-BR" sz="1800" baseline="-25000" dirty="0">
                 <a:solidFill>
                   <a:srgbClr val="FF3300"/>
                 </a:solidFill>
@@ -7018,7 +7108,7 @@
               <a:t>1</a:t>
             </a:r>
             <a:r>
-              <a:rPr lang="pt-BR" altLang="pt-BR" sz="1800" i="1">
+              <a:rPr lang="pt-BR" altLang="pt-BR" sz="1800" i="1" dirty="0">
                 <a:solidFill>
                   <a:srgbClr val="FF3300"/>
                 </a:solidFill>
@@ -7027,7 +7117,7 @@
               <a:t> - </a:t>
             </a:r>
             <a:r>
-              <a:rPr lang="pt-BR" altLang="pt-BR" sz="1800" i="1">
+              <a:rPr lang="pt-BR" altLang="pt-BR" sz="1800" i="1" dirty="0">
                 <a:solidFill>
                   <a:srgbClr val="FF3300"/>
                 </a:solidFill>
@@ -7036,7 +7126,7 @@
               <a:t>m</a:t>
             </a:r>
             <a:r>
-              <a:rPr lang="pt-BR" altLang="pt-BR" sz="1800" baseline="-25000">
+              <a:rPr lang="pt-BR" altLang="pt-BR" sz="1800" baseline="-25000" dirty="0">
                 <a:solidFill>
                   <a:srgbClr val="FF3300"/>
                 </a:solidFill>
@@ -7063,23 +7153,23 @@
           <a:graphicData uri="http://schemas.openxmlformats.org/presentationml/2006/ole">
             <mc:AlternateContent xmlns:mc="http://schemas.openxmlformats.org/markup-compatibility/2006">
               <mc:Choice xmlns:v="urn:schemas-microsoft-com:vml" Requires="v">
-                <p:oleObj spid="_x0000_s4295" name="Equation" r:id="rId23" imgW="965200" imgH="241300" progId="Equation.DSMT4">
+                <p:oleObj name="Equation" r:id="rId22" imgW="965200" imgH="241300" progId="Equation.DSMT4">
                   <p:embed/>
                 </p:oleObj>
               </mc:Choice>
               <mc:Fallback>
-                <p:oleObj name="Equation" r:id="rId23" imgW="965200" imgH="241300" progId="Equation.DSMT4">
+                <p:oleObj name="Equation" r:id="rId22" imgW="965200" imgH="241300" progId="Equation.DSMT4">
                   <p:embed/>
                   <p:pic>
                     <p:nvPicPr>
-                      <p:cNvPr id="0" name="Object 36"/>
+                      <p:cNvPr id="4107" name="Object 36"/>
                       <p:cNvPicPr>
                         <a:picLocks noChangeAspect="1" noChangeArrowheads="1"/>
                       </p:cNvPicPr>
                       <p:nvPr/>
                     </p:nvPicPr>
                     <p:blipFill>
-                      <a:blip r:embed="rId24">
+                      <a:blip r:embed="rId23">
                         <a:extLst>
                           <a:ext uri="{28A0092B-C50C-407E-A947-70E740481C1C}">
                             <a14:useLocalDpi xmlns:a14="http://schemas.microsoft.com/office/drawing/2010/main" val="0"/>
@@ -7146,23 +7236,23 @@
           <a:graphicData uri="http://schemas.openxmlformats.org/presentationml/2006/ole">
             <mc:AlternateContent xmlns:mc="http://schemas.openxmlformats.org/markup-compatibility/2006">
               <mc:Choice xmlns:v="urn:schemas-microsoft-com:vml" Requires="v">
-                <p:oleObj spid="_x0000_s4296" name="Equation" r:id="rId25" imgW="990600" imgH="457200" progId="Equation.DSMT4">
+                <p:oleObj name="Equation" r:id="rId24" imgW="990600" imgH="457200" progId="Equation.DSMT4">
                   <p:embed/>
                 </p:oleObj>
               </mc:Choice>
               <mc:Fallback>
-                <p:oleObj name="Equation" r:id="rId25" imgW="990600" imgH="457200" progId="Equation.DSMT4">
+                <p:oleObj name="Equation" r:id="rId24" imgW="990600" imgH="457200" progId="Equation.DSMT4">
                   <p:embed/>
                   <p:pic>
                     <p:nvPicPr>
-                      <p:cNvPr id="0" name="Object 38"/>
+                      <p:cNvPr id="149542" name="Object 38"/>
                       <p:cNvPicPr>
                         <a:picLocks noChangeAspect="1" noChangeArrowheads="1"/>
                       </p:cNvPicPr>
                       <p:nvPr/>
                     </p:nvPicPr>
                     <p:blipFill>
-                      <a:blip r:embed="rId26">
+                      <a:blip r:embed="rId25">
                         <a:extLst>
                           <a:ext uri="{28A0092B-C50C-407E-A947-70E740481C1C}">
                             <a14:useLocalDpi xmlns:a14="http://schemas.microsoft.com/office/drawing/2010/main" val="0"/>
@@ -7391,7 +7481,9 @@
                 <a:buFontTx/>
                 <a:buNone/>
               </a:pPr>
-              <a:endParaRPr lang="pt-BR" altLang="pt-BR" sz="1600"/>
+              <a:endParaRPr lang="pt-BR" altLang="pt-BR" sz="1600" dirty="0">
+                <a:latin typeface="Tahoma" panose="020B0604030504040204" pitchFamily="34" charset="0"/>
+              </a:endParaRPr>
             </a:p>
           </p:txBody>
         </p:sp>
@@ -7598,23 +7690,23 @@
           <a:graphicData uri="http://schemas.openxmlformats.org/presentationml/2006/ole">
             <mc:AlternateContent xmlns:mc="http://schemas.openxmlformats.org/markup-compatibility/2006">
               <mc:Choice xmlns:v="urn:schemas-microsoft-com:vml" Requires="v">
-                <p:oleObj spid="_x0000_s4297" name="Equation" r:id="rId27" imgW="1002865" imgH="241195" progId="Equation.DSMT4">
+                <p:oleObj name="Equation" r:id="rId26" imgW="1002865" imgH="241195" progId="Equation.DSMT4">
                   <p:embed/>
                 </p:oleObj>
               </mc:Choice>
               <mc:Fallback>
-                <p:oleObj name="Equation" r:id="rId27" imgW="1002865" imgH="241195" progId="Equation.DSMT4">
+                <p:oleObj name="Equation" r:id="rId26" imgW="1002865" imgH="241195" progId="Equation.DSMT4">
                   <p:embed/>
                   <p:pic>
                     <p:nvPicPr>
-                      <p:cNvPr id="0" name="Object 42"/>
+                      <p:cNvPr id="4110" name="Object 42"/>
                       <p:cNvPicPr>
                         <a:picLocks noChangeAspect="1" noChangeArrowheads="1"/>
                       </p:cNvPicPr>
                       <p:nvPr/>
                     </p:nvPicPr>
                     <p:blipFill>
-                      <a:blip r:embed="rId28">
+                      <a:blip r:embed="rId27">
                         <a:extLst>
                           <a:ext uri="{28A0092B-C50C-407E-A947-70E740481C1C}">
                             <a14:useLocalDpi xmlns:a14="http://schemas.microsoft.com/office/drawing/2010/main" val="0"/>
@@ -7856,24 +7948,29 @@
                 <a:buNone/>
               </a:pPr>
               <a:r>
-                <a:rPr lang="pt-BR" altLang="pt-BR" sz="1600">
+                <a:rPr lang="pt-BR" altLang="pt-BR" sz="1600" dirty="0">
+                  <a:latin typeface="Tahoma" panose="020B0604030504040204" pitchFamily="34" charset="0"/>
                   <a:sym typeface="Symbol" pitchFamily="18" charset="2"/>
                 </a:rPr>
                 <a:t>desconhecidas, mas   </a:t>
               </a:r>
               <a:r>
-                <a:rPr lang="pt-BR" altLang="pt-BR" sz="1600" i="1">
+                <a:rPr lang="pt-BR" altLang="pt-BR" sz="1600" i="1" dirty="0">
+                  <a:latin typeface="Tahoma" panose="020B0604030504040204" pitchFamily="34" charset="0"/>
                   <a:sym typeface="Symbol" pitchFamily="18" charset="2"/>
                 </a:rPr>
                 <a:t>  </a:t>
               </a:r>
               <a:r>
-                <a:rPr lang="pt-BR" altLang="pt-BR" sz="1600">
+                <a:rPr lang="pt-BR" altLang="pt-BR" sz="1600" dirty="0">
+                  <a:latin typeface="Tahoma" panose="020B0604030504040204" pitchFamily="34" charset="0"/>
                   <a:sym typeface="Symbol" pitchFamily="18" charset="2"/>
                 </a:rPr>
                 <a:t>conhecidas</a:t>
               </a:r>
-              <a:endParaRPr lang="pt-BR" altLang="pt-BR" sz="1600"/>
+              <a:endParaRPr lang="pt-BR" altLang="pt-BR" sz="1600" dirty="0">
+                <a:latin typeface="Tahoma" panose="020B0604030504040204" pitchFamily="34" charset="0"/>
+              </a:endParaRPr>
             </a:p>
           </p:txBody>
         </p:sp>
@@ -7893,23 +7990,23 @@
             <a:graphicData uri="http://schemas.openxmlformats.org/presentationml/2006/ole">
               <mc:AlternateContent xmlns:mc="http://schemas.openxmlformats.org/markup-compatibility/2006">
                 <mc:Choice xmlns:v="urn:schemas-microsoft-com:vml" Requires="v">
-                  <p:oleObj spid="_x0000_s4298" name="Equation" r:id="rId29" imgW="165028" imgH="228501" progId="Equation.DSMT4">
+                  <p:oleObj name="Equation" r:id="rId28" imgW="165028" imgH="228501" progId="Equation.DSMT4">
                     <p:embed/>
                   </p:oleObj>
                 </mc:Choice>
                 <mc:Fallback>
-                  <p:oleObj name="Equation" r:id="rId29" imgW="165028" imgH="228501" progId="Equation.DSMT4">
+                  <p:oleObj name="Equation" r:id="rId28" imgW="165028" imgH="228501" progId="Equation.DSMT4">
                     <p:embed/>
                     <p:pic>
                       <p:nvPicPr>
-                        <p:cNvPr id="0" name="Object 44"/>
+                        <p:cNvPr id="4117" name="Object 44"/>
                         <p:cNvPicPr>
                           <a:picLocks noChangeAspect="1" noChangeArrowheads="1"/>
                         </p:cNvPicPr>
                         <p:nvPr/>
                       </p:nvPicPr>
                       <p:blipFill>
-                        <a:blip r:embed="rId30">
+                        <a:blip r:embed="rId29">
                           <a:extLst>
                             <a:ext uri="{28A0092B-C50C-407E-A947-70E740481C1C}">
                               <a14:useLocalDpi xmlns:a14="http://schemas.microsoft.com/office/drawing/2010/main" val="0"/>
@@ -7976,23 +8073,23 @@
             <a:graphicData uri="http://schemas.openxmlformats.org/presentationml/2006/ole">
               <mc:AlternateContent xmlns:mc="http://schemas.openxmlformats.org/markup-compatibility/2006">
                 <mc:Choice xmlns:v="urn:schemas-microsoft-com:vml" Requires="v">
-                  <p:oleObj spid="_x0000_s4299" name="Equation" r:id="rId31" imgW="203112" imgH="241195" progId="Equation.DSMT4">
+                  <p:oleObj name="Equation" r:id="rId30" imgW="203112" imgH="241195" progId="Equation.DSMT4">
                     <p:embed/>
                   </p:oleObj>
                 </mc:Choice>
                 <mc:Fallback>
-                  <p:oleObj name="Equation" r:id="rId31" imgW="203112" imgH="241195" progId="Equation.DSMT4">
+                  <p:oleObj name="Equation" r:id="rId30" imgW="203112" imgH="241195" progId="Equation.DSMT4">
                     <p:embed/>
                     <p:pic>
                       <p:nvPicPr>
-                        <p:cNvPr id="0" name="Object 45"/>
+                        <p:cNvPr id="4118" name="Object 45"/>
                         <p:cNvPicPr>
                           <a:picLocks noChangeAspect="1" noChangeArrowheads="1"/>
                         </p:cNvPicPr>
                         <p:nvPr/>
                       </p:nvPicPr>
                       <p:blipFill>
-                        <a:blip r:embed="rId32">
+                        <a:blip r:embed="rId31">
                           <a:extLst>
                             <a:ext uri="{28A0092B-C50C-407E-A947-70E740481C1C}">
                               <a14:useLocalDpi xmlns:a14="http://schemas.microsoft.com/office/drawing/2010/main" val="0"/>
@@ -8060,23 +8157,23 @@
           <a:graphicData uri="http://schemas.openxmlformats.org/presentationml/2006/ole">
             <mc:AlternateContent xmlns:mc="http://schemas.openxmlformats.org/markup-compatibility/2006">
               <mc:Choice xmlns:v="urn:schemas-microsoft-com:vml" Requires="v">
-                <p:oleObj spid="_x0000_s4300" name="Equation" r:id="rId33" imgW="1028700" imgH="457200" progId="Equation.DSMT4">
+                <p:oleObj name="Equation" r:id="rId32" imgW="1028700" imgH="457200" progId="Equation.DSMT4">
                   <p:embed/>
                 </p:oleObj>
               </mc:Choice>
               <mc:Fallback>
-                <p:oleObj name="Equation" r:id="rId33" imgW="1028700" imgH="457200" progId="Equation.DSMT4">
+                <p:oleObj name="Equation" r:id="rId32" imgW="1028700" imgH="457200" progId="Equation.DSMT4">
                   <p:embed/>
                   <p:pic>
                     <p:nvPicPr>
-                      <p:cNvPr id="0" name="Object 47"/>
+                      <p:cNvPr id="149551" name="Object 47"/>
                       <p:cNvPicPr>
                         <a:picLocks noChangeAspect="1" noChangeArrowheads="1"/>
                       </p:cNvPicPr>
                       <p:nvPr/>
                     </p:nvPicPr>
                     <p:blipFill>
-                      <a:blip r:embed="rId34">
+                      <a:blip r:embed="rId33">
                         <a:extLst>
                           <a:ext uri="{28A0092B-C50C-407E-A947-70E740481C1C}">
                             <a14:useLocalDpi xmlns:a14="http://schemas.microsoft.com/office/drawing/2010/main" val="0"/>
@@ -8138,23 +8235,23 @@
           <a:graphicData uri="http://schemas.openxmlformats.org/presentationml/2006/ole">
             <mc:AlternateContent xmlns:mc="http://schemas.openxmlformats.org/markup-compatibility/2006">
               <mc:Choice xmlns:v="urn:schemas-microsoft-com:vml" Requires="v">
-                <p:oleObj spid="_x0000_s4301" name="Equation" r:id="rId35" imgW="761669" imgH="241195" progId="Equation.DSMT4">
+                <p:oleObj name="Equation" r:id="rId34" imgW="761669" imgH="241195" progId="Equation.DSMT4">
                   <p:embed/>
                 </p:oleObj>
               </mc:Choice>
               <mc:Fallback>
-                <p:oleObj name="Equation" r:id="rId35" imgW="761669" imgH="241195" progId="Equation.DSMT4">
+                <p:oleObj name="Equation" r:id="rId34" imgW="761669" imgH="241195" progId="Equation.DSMT4">
                   <p:embed/>
                   <p:pic>
                     <p:nvPicPr>
-                      <p:cNvPr id="0" name="Object 48"/>
+                      <p:cNvPr id="149552" name="Object 48"/>
                       <p:cNvPicPr>
                         <a:picLocks noChangeAspect="1" noChangeArrowheads="1"/>
                       </p:cNvPicPr>
                       <p:nvPr/>
                     </p:nvPicPr>
                     <p:blipFill>
-                      <a:blip r:embed="rId36">
+                      <a:blip r:embed="rId35">
                         <a:extLst>
                           <a:ext uri="{28A0092B-C50C-407E-A947-70E740481C1C}">
                             <a14:useLocalDpi xmlns:a14="http://schemas.microsoft.com/office/drawing/2010/main" val="0"/>
@@ -8216,23 +8313,23 @@
           <a:graphicData uri="http://schemas.openxmlformats.org/presentationml/2006/ole">
             <mc:AlternateContent xmlns:mc="http://schemas.openxmlformats.org/markup-compatibility/2006">
               <mc:Choice xmlns:v="urn:schemas-microsoft-com:vml" Requires="v">
-                <p:oleObj spid="_x0000_s4302" name="Equation" r:id="rId37" imgW="1943100" imgH="457200" progId="Equation.DSMT4">
+                <p:oleObj name="Equation" r:id="rId36" imgW="1943100" imgH="457200" progId="Equation.DSMT4">
                   <p:embed/>
                 </p:oleObj>
               </mc:Choice>
               <mc:Fallback>
-                <p:oleObj name="Equation" r:id="rId37" imgW="1943100" imgH="457200" progId="Equation.DSMT4">
+                <p:oleObj name="Equation" r:id="rId36" imgW="1943100" imgH="457200" progId="Equation.DSMT4">
                   <p:embed/>
                   <p:pic>
                     <p:nvPicPr>
-                      <p:cNvPr id="0" name="Object 49"/>
+                      <p:cNvPr id="149553" name="Object 49"/>
                       <p:cNvPicPr>
                         <a:picLocks noChangeAspect="1" noChangeArrowheads="1"/>
                       </p:cNvPicPr>
                       <p:nvPr/>
                     </p:nvPicPr>
                     <p:blipFill>
-                      <a:blip r:embed="rId38">
+                      <a:blip r:embed="rId37">
                         <a:extLst>
                           <a:ext uri="{28A0092B-C50C-407E-A947-70E740481C1C}">
                             <a14:useLocalDpi xmlns:a14="http://schemas.microsoft.com/office/drawing/2010/main" val="0"/>
@@ -8969,37 +9066,37 @@
               <a:defRPr/>
             </a:pPr>
             <a:r>
-              <a:rPr lang="pt-BR" smtClean="0"/>
+              <a:rPr lang="pt-BR"/>
               <a:t>Intervalo de Confiança para </a:t>
             </a:r>
             <a:r>
-              <a:rPr lang="pt-BR" i="1" smtClean="0">
+              <a:rPr lang="pt-BR" i="1">
                 <a:sym typeface="Symbol" pitchFamily="18" charset="2"/>
               </a:rPr>
               <a:t></a:t>
             </a:r>
             <a:r>
-              <a:rPr lang="pt-BR" baseline="-25000" smtClean="0">
+              <a:rPr lang="pt-BR" baseline="-25000">
                 <a:latin typeface="Times New Roman" pitchFamily="18" charset="0"/>
                 <a:sym typeface="Symbol" pitchFamily="18" charset="2"/>
               </a:rPr>
               <a:t>1</a:t>
             </a:r>
             <a:r>
-              <a:rPr lang="pt-BR" smtClean="0">
+              <a:rPr lang="pt-BR">
                 <a:latin typeface="Times New Roman" pitchFamily="18" charset="0"/>
                 <a:sym typeface="Symbol" pitchFamily="18" charset="2"/>
               </a:rPr>
               <a:t> -</a:t>
             </a:r>
             <a:r>
-              <a:rPr lang="pt-BR" i="1" smtClean="0">
+              <a:rPr lang="pt-BR" i="1">
                 <a:sym typeface="Symbol" pitchFamily="18" charset="2"/>
               </a:rPr>
               <a:t> </a:t>
             </a:r>
             <a:r>
-              <a:rPr lang="pt-BR" baseline="-25000" smtClean="0">
+              <a:rPr lang="pt-BR" baseline="-25000">
                 <a:latin typeface="Times New Roman" pitchFamily="18" charset="0"/>
                 <a:sym typeface="Symbol" pitchFamily="18" charset="2"/>
               </a:rPr>
@@ -9024,23 +9121,23 @@
           <a:graphicData uri="http://schemas.openxmlformats.org/presentationml/2006/ole">
             <mc:AlternateContent xmlns:mc="http://schemas.openxmlformats.org/markup-compatibility/2006">
               <mc:Choice xmlns:v="urn:schemas-microsoft-com:vml" Requires="v">
-                <p:oleObj spid="_x0000_s8372" name="Equation" r:id="rId3" imgW="2552700" imgH="698500" progId="Equation.DSMT4">
+                <p:oleObj name="Equation" r:id="rId2" imgW="2552700" imgH="698500" progId="Equation.DSMT4">
                   <p:embed/>
                 </p:oleObj>
               </mc:Choice>
               <mc:Fallback>
-                <p:oleObj name="Equation" r:id="rId3" imgW="2552700" imgH="698500" progId="Equation.DSMT4">
+                <p:oleObj name="Equation" r:id="rId2" imgW="2552700" imgH="698500" progId="Equation.DSMT4">
                   <p:embed/>
                   <p:pic>
                     <p:nvPicPr>
-                      <p:cNvPr id="0" name="Object 3"/>
+                      <p:cNvPr id="8195" name="Object 3"/>
                       <p:cNvPicPr>
                         <a:picLocks noChangeAspect="1" noChangeArrowheads="1"/>
                       </p:cNvPicPr>
                       <p:nvPr/>
                     </p:nvPicPr>
                     <p:blipFill>
-                      <a:blip r:embed="rId4">
+                      <a:blip r:embed="rId3">
                         <a:extLst>
                           <a:ext uri="{28A0092B-C50C-407E-A947-70E740481C1C}">
                             <a14:useLocalDpi xmlns:a14="http://schemas.microsoft.com/office/drawing/2010/main" val="0"/>
@@ -9107,23 +9204,23 @@
           <a:graphicData uri="http://schemas.openxmlformats.org/presentationml/2006/ole">
             <mc:AlternateContent xmlns:mc="http://schemas.openxmlformats.org/markup-compatibility/2006">
               <mc:Choice xmlns:v="urn:schemas-microsoft-com:vml" Requires="v">
-                <p:oleObj spid="_x0000_s8373" name="Equation" r:id="rId5" imgW="965200" imgH="241300" progId="Equation.DSMT4">
+                <p:oleObj name="Equation" r:id="rId4" imgW="965200" imgH="241300" progId="Equation.DSMT4">
                   <p:embed/>
                 </p:oleObj>
               </mc:Choice>
               <mc:Fallback>
-                <p:oleObj name="Equation" r:id="rId5" imgW="965200" imgH="241300" progId="Equation.DSMT4">
+                <p:oleObj name="Equation" r:id="rId4" imgW="965200" imgH="241300" progId="Equation.DSMT4">
                   <p:embed/>
                   <p:pic>
                     <p:nvPicPr>
-                      <p:cNvPr id="0" name="Object 4"/>
+                      <p:cNvPr id="8196" name="Object 4"/>
                       <p:cNvPicPr>
                         <a:picLocks noChangeAspect="1" noChangeArrowheads="1"/>
                       </p:cNvPicPr>
                       <p:nvPr/>
                     </p:nvPicPr>
                     <p:blipFill>
-                      <a:blip r:embed="rId6">
+                      <a:blip r:embed="rId5">
                         <a:extLst>
                           <a:ext uri="{28A0092B-C50C-407E-A947-70E740481C1C}">
                             <a14:useLocalDpi xmlns:a14="http://schemas.microsoft.com/office/drawing/2010/main" val="0"/>
@@ -9190,23 +9287,23 @@
           <a:graphicData uri="http://schemas.openxmlformats.org/presentationml/2006/ole">
             <mc:AlternateContent xmlns:mc="http://schemas.openxmlformats.org/markup-compatibility/2006">
               <mc:Choice xmlns:v="urn:schemas-microsoft-com:vml" Requires="v">
-                <p:oleObj spid="_x0000_s8374" name="Equation" r:id="rId7" imgW="1002865" imgH="241195" progId="Equation.DSMT4">
+                <p:oleObj name="Equation" r:id="rId6" imgW="1002865" imgH="241195" progId="Equation.DSMT4">
                   <p:embed/>
                 </p:oleObj>
               </mc:Choice>
               <mc:Fallback>
-                <p:oleObj name="Equation" r:id="rId7" imgW="1002865" imgH="241195" progId="Equation.DSMT4">
+                <p:oleObj name="Equation" r:id="rId6" imgW="1002865" imgH="241195" progId="Equation.DSMT4">
                   <p:embed/>
                   <p:pic>
                     <p:nvPicPr>
-                      <p:cNvPr id="0" name="Object 5"/>
+                      <p:cNvPr id="8197" name="Object 5"/>
                       <p:cNvPicPr>
                         <a:picLocks noChangeAspect="1" noChangeArrowheads="1"/>
                       </p:cNvPicPr>
                       <p:nvPr/>
                     </p:nvPicPr>
                     <p:blipFill>
-                      <a:blip r:embed="rId8">
+                      <a:blip r:embed="rId7">
                         <a:extLst>
                           <a:ext uri="{28A0092B-C50C-407E-A947-70E740481C1C}">
                             <a14:useLocalDpi xmlns:a14="http://schemas.microsoft.com/office/drawing/2010/main" val="0"/>
@@ -9448,12 +9545,15 @@
                 <a:buNone/>
               </a:pPr>
               <a:r>
-                <a:rPr lang="pt-BR" altLang="pt-BR" sz="1600">
+                <a:rPr lang="pt-BR" altLang="pt-BR" sz="1600" dirty="0">
+                  <a:latin typeface="Tahoma" panose="020B0604030504040204" pitchFamily="34" charset="0"/>
                   <a:sym typeface="Symbol" pitchFamily="18" charset="2"/>
                 </a:rPr>
                 <a:t>e     desconhecidas</a:t>
               </a:r>
-              <a:endParaRPr lang="pt-BR" altLang="pt-BR" sz="1600"/>
+              <a:endParaRPr lang="pt-BR" altLang="pt-BR" sz="1600" dirty="0">
+                <a:latin typeface="Tahoma" panose="020B0604030504040204" pitchFamily="34" charset="0"/>
+              </a:endParaRPr>
             </a:p>
           </p:txBody>
         </p:sp>
@@ -9473,23 +9573,23 @@
             <a:graphicData uri="http://schemas.openxmlformats.org/presentationml/2006/ole">
               <mc:AlternateContent xmlns:mc="http://schemas.openxmlformats.org/markup-compatibility/2006">
                 <mc:Choice xmlns:v="urn:schemas-microsoft-com:vml" Requires="v">
-                  <p:oleObj spid="_x0000_s8375" name="Equation" r:id="rId9" imgW="165028" imgH="228501" progId="Equation.DSMT4">
+                  <p:oleObj name="Equation" r:id="rId8" imgW="165028" imgH="228501" progId="Equation.DSMT4">
                     <p:embed/>
                   </p:oleObj>
                 </mc:Choice>
                 <mc:Fallback>
-                  <p:oleObj name="Equation" r:id="rId9" imgW="165028" imgH="228501" progId="Equation.DSMT4">
+                  <p:oleObj name="Equation" r:id="rId8" imgW="165028" imgH="228501" progId="Equation.DSMT4">
                     <p:embed/>
                     <p:pic>
                       <p:nvPicPr>
-                        <p:cNvPr id="0" name="Object 8"/>
+                        <p:cNvPr id="8233" name="Object 8"/>
                         <p:cNvPicPr>
                           <a:picLocks noChangeAspect="1" noChangeArrowheads="1"/>
                         </p:cNvPicPr>
                         <p:nvPr/>
                       </p:nvPicPr>
                       <p:blipFill>
-                        <a:blip r:embed="rId10">
+                        <a:blip r:embed="rId9">
                           <a:extLst>
                             <a:ext uri="{28A0092B-C50C-407E-A947-70E740481C1C}">
                               <a14:useLocalDpi xmlns:a14="http://schemas.microsoft.com/office/drawing/2010/main" val="0"/>
@@ -9556,23 +9656,23 @@
             <a:graphicData uri="http://schemas.openxmlformats.org/presentationml/2006/ole">
               <mc:AlternateContent xmlns:mc="http://schemas.openxmlformats.org/markup-compatibility/2006">
                 <mc:Choice xmlns:v="urn:schemas-microsoft-com:vml" Requires="v">
-                  <p:oleObj spid="_x0000_s8376" name="Equation" r:id="rId11" imgW="203112" imgH="241195" progId="Equation.DSMT4">
+                  <p:oleObj name="Equation" r:id="rId10" imgW="203112" imgH="241195" progId="Equation.DSMT4">
                     <p:embed/>
                   </p:oleObj>
                 </mc:Choice>
                 <mc:Fallback>
-                  <p:oleObj name="Equation" r:id="rId11" imgW="203112" imgH="241195" progId="Equation.DSMT4">
+                  <p:oleObj name="Equation" r:id="rId10" imgW="203112" imgH="241195" progId="Equation.DSMT4">
                     <p:embed/>
                     <p:pic>
                       <p:nvPicPr>
-                        <p:cNvPr id="0" name="Object 9"/>
+                        <p:cNvPr id="8234" name="Object 9"/>
                         <p:cNvPicPr>
                           <a:picLocks noChangeAspect="1" noChangeArrowheads="1"/>
                         </p:cNvPicPr>
                         <p:nvPr/>
                       </p:nvPicPr>
                       <p:blipFill>
-                        <a:blip r:embed="rId12">
+                        <a:blip r:embed="rId11">
                           <a:extLst>
                             <a:ext uri="{28A0092B-C50C-407E-A947-70E740481C1C}">
                               <a14:useLocalDpi xmlns:a14="http://schemas.microsoft.com/office/drawing/2010/main" val="0"/>
@@ -9656,23 +9756,23 @@
             <a:graphicData uri="http://schemas.openxmlformats.org/presentationml/2006/ole">
               <mc:AlternateContent xmlns:mc="http://schemas.openxmlformats.org/markup-compatibility/2006">
                 <mc:Choice xmlns:v="urn:schemas-microsoft-com:vml" Requires="v">
-                  <p:oleObj spid="_x0000_s8377" name="Equation" r:id="rId13" imgW="1574800" imgH="698500" progId="Equation.DSMT4">
+                  <p:oleObj name="Equation" r:id="rId12" imgW="1574800" imgH="698500" progId="Equation.DSMT4">
                     <p:embed/>
                   </p:oleObj>
                 </mc:Choice>
                 <mc:Fallback>
-                  <p:oleObj name="Equation" r:id="rId13" imgW="1574800" imgH="698500" progId="Equation.DSMT4">
+                  <p:oleObj name="Equation" r:id="rId12" imgW="1574800" imgH="698500" progId="Equation.DSMT4">
                     <p:embed/>
                     <p:pic>
                       <p:nvPicPr>
-                        <p:cNvPr id="0" name="Object 11"/>
+                        <p:cNvPr id="8228" name="Object 11"/>
                         <p:cNvPicPr>
                           <a:picLocks noChangeAspect="1" noChangeArrowheads="1"/>
                         </p:cNvPicPr>
                         <p:nvPr/>
                       </p:nvPicPr>
                       <p:blipFill>
-                        <a:blip r:embed="rId14">
+                        <a:blip r:embed="rId13">
                           <a:extLst>
                             <a:ext uri="{28A0092B-C50C-407E-A947-70E740481C1C}">
                               <a14:useLocalDpi xmlns:a14="http://schemas.microsoft.com/office/drawing/2010/main" val="0"/>
@@ -9739,23 +9839,23 @@
             <a:graphicData uri="http://schemas.openxmlformats.org/presentationml/2006/ole">
               <mc:AlternateContent xmlns:mc="http://schemas.openxmlformats.org/markup-compatibility/2006">
                 <mc:Choice xmlns:v="urn:schemas-microsoft-com:vml" Requires="v">
-                  <p:oleObj spid="_x0000_s8378" name="Equation" r:id="rId15" imgW="457002" imgH="203112" progId="Equation.DSMT4">
+                  <p:oleObj name="Equation" r:id="rId14" imgW="457002" imgH="203112" progId="Equation.DSMT4">
                     <p:embed/>
                   </p:oleObj>
                 </mc:Choice>
                 <mc:Fallback>
-                  <p:oleObj name="Equation" r:id="rId15" imgW="457002" imgH="203112" progId="Equation.DSMT4">
+                  <p:oleObj name="Equation" r:id="rId14" imgW="457002" imgH="203112" progId="Equation.DSMT4">
                     <p:embed/>
                     <p:pic>
                       <p:nvPicPr>
-                        <p:cNvPr id="0" name="Object 12"/>
+                        <p:cNvPr id="8229" name="Object 12"/>
                         <p:cNvPicPr>
                           <a:picLocks noChangeAspect="1" noChangeArrowheads="1"/>
                         </p:cNvPicPr>
                         <p:nvPr/>
                       </p:nvPicPr>
                       <p:blipFill>
-                        <a:blip r:embed="rId16">
+                        <a:blip r:embed="rId15">
                           <a:extLst>
                             <a:ext uri="{28A0092B-C50C-407E-A947-70E740481C1C}">
                               <a14:useLocalDpi xmlns:a14="http://schemas.microsoft.com/office/drawing/2010/main" val="0"/>
@@ -9817,23 +9917,23 @@
             <a:graphicData uri="http://schemas.openxmlformats.org/presentationml/2006/ole">
               <mc:AlternateContent xmlns:mc="http://schemas.openxmlformats.org/markup-compatibility/2006">
                 <mc:Choice xmlns:v="urn:schemas-microsoft-com:vml" Requires="v">
-                  <p:oleObj spid="_x0000_s8379" name="Equation" r:id="rId17" imgW="1574800" imgH="457200" progId="Equation.DSMT4">
+                  <p:oleObj name="Equation" r:id="rId16" imgW="1574800" imgH="457200" progId="Equation.DSMT4">
                     <p:embed/>
                   </p:oleObj>
                 </mc:Choice>
                 <mc:Fallback>
-                  <p:oleObj name="Equation" r:id="rId17" imgW="1574800" imgH="457200" progId="Equation.DSMT4">
+                  <p:oleObj name="Equation" r:id="rId16" imgW="1574800" imgH="457200" progId="Equation.DSMT4">
                     <p:embed/>
                     <p:pic>
                       <p:nvPicPr>
-                        <p:cNvPr id="0" name="Object 13"/>
+                        <p:cNvPr id="8230" name="Object 13"/>
                         <p:cNvPicPr>
                           <a:picLocks noChangeAspect="1" noChangeArrowheads="1"/>
                         </p:cNvPicPr>
                         <p:nvPr/>
                       </p:nvPicPr>
                       <p:blipFill>
-                        <a:blip r:embed="rId18">
+                        <a:blip r:embed="rId17">
                           <a:extLst>
                             <a:ext uri="{28A0092B-C50C-407E-A947-70E740481C1C}">
                               <a14:useLocalDpi xmlns:a14="http://schemas.microsoft.com/office/drawing/2010/main" val="0"/>
@@ -9900,23 +10000,23 @@
             <a:graphicData uri="http://schemas.openxmlformats.org/presentationml/2006/ole">
               <mc:AlternateContent xmlns:mc="http://schemas.openxmlformats.org/markup-compatibility/2006">
                 <mc:Choice xmlns:v="urn:schemas-microsoft-com:vml" Requires="v">
-                  <p:oleObj spid="_x0000_s8380" name="Equation" r:id="rId19" imgW="469696" imgH="253890" progId="Equation.DSMT4">
+                  <p:oleObj name="Equation" r:id="rId18" imgW="469696" imgH="253890" progId="Equation.DSMT4">
                     <p:embed/>
                   </p:oleObj>
                 </mc:Choice>
                 <mc:Fallback>
-                  <p:oleObj name="Equation" r:id="rId19" imgW="469696" imgH="253890" progId="Equation.DSMT4">
+                  <p:oleObj name="Equation" r:id="rId18" imgW="469696" imgH="253890" progId="Equation.DSMT4">
                     <p:embed/>
                     <p:pic>
                       <p:nvPicPr>
-                        <p:cNvPr id="0" name="Object 14"/>
+                        <p:cNvPr id="8231" name="Object 14"/>
                         <p:cNvPicPr>
                           <a:picLocks noChangeAspect="1" noChangeArrowheads="1"/>
                         </p:cNvPicPr>
                         <p:nvPr/>
                       </p:nvPicPr>
                       <p:blipFill>
-                        <a:blip r:embed="rId20">
+                        <a:blip r:embed="rId19">
                           <a:extLst>
                             <a:ext uri="{28A0092B-C50C-407E-A947-70E740481C1C}">
                               <a14:useLocalDpi xmlns:a14="http://schemas.microsoft.com/office/drawing/2010/main" val="0"/>
@@ -10020,7 +10120,7 @@
                 <p:nvPr/>
               </p:nvPicPr>
               <p:blipFill>
-                <a:blip r:embed="rId21">
+                <a:blip r:embed="rId20">
                   <a:extLst>
                     <a:ext uri="{28A0092B-C50C-407E-A947-70E740481C1C}">
                       <a14:useLocalDpi xmlns:a14="http://schemas.microsoft.com/office/drawing/2010/main" val="0"/>
@@ -10671,7 +10771,9 @@
                 <a:bodyPr/>
                 <a:lstStyle/>
                 <a:p>
-                  <a:endParaRPr lang="pt-BR"/>
+                  <a:endParaRPr lang="pt-BR" dirty="0">
+                    <a:latin typeface="Tahoma" panose="020B0604030504040204" pitchFamily="34" charset="0"/>
+                  </a:endParaRPr>
                 </a:p>
               </p:txBody>
             </p:sp>
@@ -10713,7 +10815,9 @@
               <a:bodyPr/>
               <a:lstStyle/>
               <a:p>
-                <a:endParaRPr lang="pt-BR"/>
+                <a:endParaRPr lang="pt-BR" dirty="0">
+                  <a:latin typeface="Tahoma" panose="020B0604030504040204" pitchFamily="34" charset="0"/>
+                </a:endParaRPr>
               </a:p>
             </p:txBody>
           </p:sp>
@@ -10733,23 +10837,23 @@
               <a:graphicData uri="http://schemas.openxmlformats.org/presentationml/2006/ole">
                 <mc:AlternateContent xmlns:mc="http://schemas.openxmlformats.org/markup-compatibility/2006">
                   <mc:Choice xmlns:v="urn:schemas-microsoft-com:vml" Requires="v">
-                    <p:oleObj spid="_x0000_s8381" name="Equation" r:id="rId22" imgW="406224" imgH="241195" progId="Equation.DSMT4">
+                    <p:oleObj name="Equation" r:id="rId21" imgW="406224" imgH="241195" progId="Equation.DSMT4">
                       <p:embed/>
                     </p:oleObj>
                   </mc:Choice>
                   <mc:Fallback>
-                    <p:oleObj name="Equation" r:id="rId22" imgW="406224" imgH="241195" progId="Equation.DSMT4">
+                    <p:oleObj name="Equation" r:id="rId21" imgW="406224" imgH="241195" progId="Equation.DSMT4">
                       <p:embed/>
                       <p:pic>
                         <p:nvPicPr>
-                          <p:cNvPr id="0" name="Object 31"/>
+                          <p:cNvPr id="8222" name="Object 31"/>
                           <p:cNvPicPr>
                             <a:picLocks noChangeAspect="1" noChangeArrowheads="1"/>
                           </p:cNvPicPr>
                           <p:nvPr/>
                         </p:nvPicPr>
                         <p:blipFill>
-                          <a:blip r:embed="rId23">
+                          <a:blip r:embed="rId22">
                             <a:extLst>
                               <a:ext uri="{28A0092B-C50C-407E-A947-70E740481C1C}">
                                 <a14:useLocalDpi xmlns:a14="http://schemas.microsoft.com/office/drawing/2010/main" val="0"/>
@@ -11068,7 +11172,9 @@
             <a:bodyPr/>
             <a:lstStyle/>
             <a:p>
-              <a:endParaRPr lang="pt-BR"/>
+              <a:endParaRPr lang="pt-BR" dirty="0">
+                <a:latin typeface="Tahoma" panose="020B0604030504040204" pitchFamily="34" charset="0"/>
+              </a:endParaRPr>
             </a:p>
           </p:txBody>
         </p:sp>
@@ -11491,7 +11597,9 @@
               <a:bodyPr/>
               <a:lstStyle/>
               <a:p>
-                <a:endParaRPr lang="pt-BR"/>
+                <a:endParaRPr lang="pt-BR" dirty="0">
+                  <a:latin typeface="Tahoma" panose="020B0604030504040204" pitchFamily="34" charset="0"/>
+                </a:endParaRPr>
               </a:p>
             </p:txBody>
           </p:sp>
@@ -11511,23 +11619,23 @@
               <a:graphicData uri="http://schemas.openxmlformats.org/presentationml/2006/ole">
                 <mc:AlternateContent xmlns:mc="http://schemas.openxmlformats.org/markup-compatibility/2006">
                   <mc:Choice xmlns:v="urn:schemas-microsoft-com:vml" Requires="v">
-                    <p:oleObj spid="_x0000_s8382" name="Equation" r:id="rId24" imgW="177646" imgH="393359" progId="Equation.DSMT4">
+                    <p:oleObj name="Equation" r:id="rId23" imgW="177646" imgH="393359" progId="Equation.DSMT4">
                       <p:embed/>
                     </p:oleObj>
                   </mc:Choice>
                   <mc:Fallback>
-                    <p:oleObj name="Equation" r:id="rId24" imgW="177646" imgH="393359" progId="Equation.DSMT4">
+                    <p:oleObj name="Equation" r:id="rId23" imgW="177646" imgH="393359" progId="Equation.DSMT4">
                       <p:embed/>
                       <p:pic>
                         <p:nvPicPr>
-                          <p:cNvPr id="0" name="Object 37"/>
+                          <p:cNvPr id="8219" name="Object 37"/>
                           <p:cNvPicPr>
                             <a:picLocks noChangeAspect="1" noChangeArrowheads="1"/>
                           </p:cNvPicPr>
                           <p:nvPr/>
                         </p:nvPicPr>
                         <p:blipFill>
-                          <a:blip r:embed="rId25">
+                          <a:blip r:embed="rId24">
                             <a:extLst>
                               <a:ext uri="{28A0092B-C50C-407E-A947-70E740481C1C}">
                                 <a14:useLocalDpi xmlns:a14="http://schemas.microsoft.com/office/drawing/2010/main" val="0"/>
@@ -11632,7 +11740,9 @@
               <a:bodyPr/>
               <a:lstStyle/>
               <a:p>
-                <a:endParaRPr lang="pt-BR"/>
+                <a:endParaRPr lang="pt-BR" dirty="0">
+                  <a:latin typeface="Tahoma" panose="020B0604030504040204" pitchFamily="34" charset="0"/>
+                </a:endParaRPr>
               </a:p>
             </p:txBody>
           </p:sp>
@@ -11652,23 +11762,23 @@
               <a:graphicData uri="http://schemas.openxmlformats.org/presentationml/2006/ole">
                 <mc:AlternateContent xmlns:mc="http://schemas.openxmlformats.org/markup-compatibility/2006">
                   <mc:Choice xmlns:v="urn:schemas-microsoft-com:vml" Requires="v">
-                    <p:oleObj spid="_x0000_s8383" name="Equation" r:id="rId26" imgW="177646" imgH="393359" progId="Equation.DSMT4">
+                    <p:oleObj name="Equation" r:id="rId25" imgW="177646" imgH="393359" progId="Equation.DSMT4">
                       <p:embed/>
                     </p:oleObj>
                   </mc:Choice>
                   <mc:Fallback>
-                    <p:oleObj name="Equation" r:id="rId26" imgW="177646" imgH="393359" progId="Equation.DSMT4">
+                    <p:oleObj name="Equation" r:id="rId25" imgW="177646" imgH="393359" progId="Equation.DSMT4">
                       <p:embed/>
                       <p:pic>
                         <p:nvPicPr>
-                          <p:cNvPr id="0" name="Object 40"/>
+                          <p:cNvPr id="8217" name="Object 40"/>
                           <p:cNvPicPr>
                             <a:picLocks noChangeAspect="1" noChangeArrowheads="1"/>
                           </p:cNvPicPr>
                           <p:nvPr/>
                         </p:nvPicPr>
                         <p:blipFill>
-                          <a:blip r:embed="rId27">
+                          <a:blip r:embed="rId26">
                             <a:extLst>
                               <a:ext uri="{28A0092B-C50C-407E-A947-70E740481C1C}">
                                 <a14:useLocalDpi xmlns:a14="http://schemas.microsoft.com/office/drawing/2010/main" val="0"/>
@@ -11736,23 +11846,23 @@
             <a:graphicData uri="http://schemas.openxmlformats.org/presentationml/2006/ole">
               <mc:AlternateContent xmlns:mc="http://schemas.openxmlformats.org/markup-compatibility/2006">
                 <mc:Choice xmlns:v="urn:schemas-microsoft-com:vml" Requires="v">
-                  <p:oleObj spid="_x0000_s8384" name="Equation" r:id="rId28" imgW="342603" imgH="177646" progId="Equation.DSMT4">
+                  <p:oleObj name="Equation" r:id="rId27" imgW="342603" imgH="177646" progId="Equation.DSMT4">
                     <p:embed/>
                   </p:oleObj>
                 </mc:Choice>
                 <mc:Fallback>
-                  <p:oleObj name="Equation" r:id="rId28" imgW="342603" imgH="177646" progId="Equation.DSMT4">
+                  <p:oleObj name="Equation" r:id="rId27" imgW="342603" imgH="177646" progId="Equation.DSMT4">
                     <p:embed/>
                     <p:pic>
                       <p:nvPicPr>
-                        <p:cNvPr id="0" name="Object 41"/>
+                        <p:cNvPr id="8214" name="Object 41"/>
                         <p:cNvPicPr>
                           <a:picLocks noChangeAspect="1" noChangeArrowheads="1"/>
                         </p:cNvPicPr>
                         <p:nvPr/>
                       </p:nvPicPr>
                       <p:blipFill>
-                        <a:blip r:embed="rId29">
+                        <a:blip r:embed="rId28">
                           <a:extLst>
                             <a:ext uri="{28A0092B-C50C-407E-A947-70E740481C1C}">
                               <a14:useLocalDpi xmlns:a14="http://schemas.microsoft.com/office/drawing/2010/main" val="0"/>
@@ -11819,23 +11929,23 @@
             <a:graphicData uri="http://schemas.openxmlformats.org/presentationml/2006/ole">
               <mc:AlternateContent xmlns:mc="http://schemas.openxmlformats.org/markup-compatibility/2006">
                 <mc:Choice xmlns:v="urn:schemas-microsoft-com:vml" Requires="v">
-                  <p:oleObj spid="_x0000_s8385" name="Equation" r:id="rId30" imgW="1295400" imgH="203200" progId="Equation.DSMT4">
+                  <p:oleObj name="Equation" r:id="rId29" imgW="1295400" imgH="203200" progId="Equation.DSMT4">
                     <p:embed/>
                   </p:oleObj>
                 </mc:Choice>
                 <mc:Fallback>
-                  <p:oleObj name="Equation" r:id="rId30" imgW="1295400" imgH="203200" progId="Equation.DSMT4">
+                  <p:oleObj name="Equation" r:id="rId29" imgW="1295400" imgH="203200" progId="Equation.DSMT4">
                     <p:embed/>
                     <p:pic>
                       <p:nvPicPr>
-                        <p:cNvPr id="0" name="Object 42"/>
+                        <p:cNvPr id="8215" name="Object 42"/>
                         <p:cNvPicPr>
                           <a:picLocks noChangeAspect="1" noChangeArrowheads="1"/>
                         </p:cNvPicPr>
                         <p:nvPr/>
                       </p:nvPicPr>
                       <p:blipFill>
-                        <a:blip r:embed="rId31">
+                        <a:blip r:embed="rId30">
                           <a:extLst>
                             <a:ext uri="{28A0092B-C50C-407E-A947-70E740481C1C}">
                               <a14:useLocalDpi xmlns:a14="http://schemas.microsoft.com/office/drawing/2010/main" val="0"/>
@@ -11903,23 +12013,23 @@
           <a:graphicData uri="http://schemas.openxmlformats.org/presentationml/2006/ole">
             <mc:AlternateContent xmlns:mc="http://schemas.openxmlformats.org/markup-compatibility/2006">
               <mc:Choice xmlns:v="urn:schemas-microsoft-com:vml" Requires="v">
-                <p:oleObj spid="_x0000_s8386" name="Equation" r:id="rId32" imgW="3187700" imgH="698500" progId="Equation.DSMT4">
+                <p:oleObj name="Equation" r:id="rId31" imgW="3187700" imgH="698500" progId="Equation.DSMT4">
                   <p:embed/>
                 </p:oleObj>
               </mc:Choice>
               <mc:Fallback>
-                <p:oleObj name="Equation" r:id="rId32" imgW="3187700" imgH="698500" progId="Equation.DSMT4">
+                <p:oleObj name="Equation" r:id="rId31" imgW="3187700" imgH="698500" progId="Equation.DSMT4">
                   <p:embed/>
                   <p:pic>
                     <p:nvPicPr>
-                      <p:cNvPr id="0" name="Object 43"/>
+                      <p:cNvPr id="156715" name="Object 43"/>
                       <p:cNvPicPr>
                         <a:picLocks noChangeAspect="1" noChangeArrowheads="1"/>
                       </p:cNvPicPr>
                       <p:nvPr/>
                     </p:nvPicPr>
                     <p:blipFill>
-                      <a:blip r:embed="rId33">
+                      <a:blip r:embed="rId32">
                         <a:extLst>
                           <a:ext uri="{28A0092B-C50C-407E-A947-70E740481C1C}">
                             <a14:useLocalDpi xmlns:a14="http://schemas.microsoft.com/office/drawing/2010/main" val="0"/>
@@ -11986,23 +12096,23 @@
           <a:graphicData uri="http://schemas.openxmlformats.org/presentationml/2006/ole">
             <mc:AlternateContent xmlns:mc="http://schemas.openxmlformats.org/markup-compatibility/2006">
               <mc:Choice xmlns:v="urn:schemas-microsoft-com:vml" Requires="v">
-                <p:oleObj spid="_x0000_s8387" name="Equation" r:id="rId34" imgW="4216400" imgH="495300" progId="Equation.DSMT4">
+                <p:oleObj name="Equation" r:id="rId33" imgW="4216400" imgH="495300" progId="Equation.DSMT4">
                   <p:embed/>
                 </p:oleObj>
               </mc:Choice>
               <mc:Fallback>
-                <p:oleObj name="Equation" r:id="rId34" imgW="4216400" imgH="495300" progId="Equation.DSMT4">
+                <p:oleObj name="Equation" r:id="rId33" imgW="4216400" imgH="495300" progId="Equation.DSMT4">
                   <p:embed/>
                   <p:pic>
                     <p:nvPicPr>
-                      <p:cNvPr id="0" name="Object 44"/>
+                      <p:cNvPr id="156716" name="Object 44"/>
                       <p:cNvPicPr>
                         <a:picLocks noChangeAspect="1" noChangeArrowheads="1"/>
                       </p:cNvPicPr>
                       <p:nvPr/>
                     </p:nvPicPr>
                     <p:blipFill>
-                      <a:blip r:embed="rId35">
+                      <a:blip r:embed="rId34">
                         <a:extLst>
                           <a:ext uri="{28A0092B-C50C-407E-A947-70E740481C1C}">
                             <a14:useLocalDpi xmlns:a14="http://schemas.microsoft.com/office/drawing/2010/main" val="0"/>
@@ -12220,7 +12330,9 @@
               <a:buFontTx/>
               <a:buNone/>
             </a:pPr>
-            <a:endParaRPr lang="pt-BR" altLang="pt-BR" sz="1600"/>
+            <a:endParaRPr lang="pt-BR" altLang="pt-BR" sz="1600" dirty="0">
+              <a:latin typeface="Tahoma" panose="020B0604030504040204" pitchFamily="34" charset="0"/>
+            </a:endParaRPr>
           </a:p>
         </p:txBody>
       </p:sp>
@@ -12415,15 +12527,16 @@
                 <a:buNone/>
               </a:pPr>
               <a:r>
-                <a:rPr lang="pt-BR" altLang="pt-BR" sz="1800">
+                <a:rPr lang="pt-BR" altLang="pt-BR" sz="1800" dirty="0">
                   <a:solidFill>
                     <a:srgbClr val="FF3300"/>
                   </a:solidFill>
+                  <a:latin typeface="Tahoma" panose="020B0604030504040204" pitchFamily="34" charset="0"/>
                 </a:rPr>
                 <a:t>IC para </a:t>
               </a:r>
               <a:r>
-                <a:rPr lang="pt-BR" altLang="pt-BR" sz="1800" i="1">
+                <a:rPr lang="pt-BR" altLang="pt-BR" sz="1800" i="1" dirty="0">
                   <a:solidFill>
                     <a:srgbClr val="FF3300"/>
                   </a:solidFill>
@@ -12432,7 +12545,7 @@
                 <a:t>m</a:t>
               </a:r>
               <a:r>
-                <a:rPr lang="pt-BR" altLang="pt-BR" sz="1800" baseline="-25000">
+                <a:rPr lang="pt-BR" altLang="pt-BR" sz="1800" baseline="-25000" dirty="0">
                   <a:solidFill>
                     <a:srgbClr val="FF3300"/>
                   </a:solidFill>
@@ -12441,7 +12554,7 @@
                 <a:t>1</a:t>
               </a:r>
               <a:r>
-                <a:rPr lang="pt-BR" altLang="pt-BR" sz="1800" i="1">
+                <a:rPr lang="pt-BR" altLang="pt-BR" sz="1800" i="1" dirty="0">
                   <a:solidFill>
                     <a:srgbClr val="FF3300"/>
                   </a:solidFill>
@@ -12450,7 +12563,7 @@
                 <a:t> - </a:t>
               </a:r>
               <a:r>
-                <a:rPr lang="pt-BR" altLang="pt-BR" sz="1800" i="1">
+                <a:rPr lang="pt-BR" altLang="pt-BR" sz="1800" i="1" dirty="0">
                   <a:solidFill>
                     <a:srgbClr val="FF3300"/>
                   </a:solidFill>
@@ -12459,7 +12572,7 @@
                 <a:t>m</a:t>
               </a:r>
               <a:r>
-                <a:rPr lang="pt-BR" altLang="pt-BR" sz="1800" baseline="-25000">
+                <a:rPr lang="pt-BR" altLang="pt-BR" sz="1800" baseline="-25000" dirty="0">
                   <a:solidFill>
                     <a:srgbClr val="FF3300"/>
                   </a:solidFill>
@@ -12468,15 +12581,16 @@
                 <a:t>2</a:t>
               </a:r>
               <a:r>
-                <a:rPr lang="pt-BR" altLang="pt-BR" sz="1800">
+                <a:rPr lang="pt-BR" altLang="pt-BR" sz="1800" dirty="0">
                   <a:solidFill>
                     <a:srgbClr val="FF3300"/>
                   </a:solidFill>
+                  <a:latin typeface="Tahoma" panose="020B0604030504040204" pitchFamily="34" charset="0"/>
                 </a:rPr>
                 <a:t> (atenção:              </a:t>
               </a:r>
               <a:r>
-                <a:rPr lang="pt-BR" altLang="pt-BR" sz="1800" i="1">
+                <a:rPr lang="pt-BR" altLang="pt-BR" sz="1800" i="1" dirty="0">
                   <a:solidFill>
                     <a:srgbClr val="FF3300"/>
                   </a:solidFill>
@@ -12485,12 +12599,31 @@
                 <a:t>t</a:t>
               </a:r>
               <a:r>
-                <a:rPr lang="pt-BR" altLang="pt-BR" sz="1800">
+                <a:rPr lang="pt-BR" altLang="pt-BR" sz="1800" dirty="0">
                   <a:solidFill>
                     <a:srgbClr val="FF3300"/>
                   </a:solidFill>
+                  <a:latin typeface="Tahoma" panose="020B0604030504040204" pitchFamily="34" charset="0"/>
                 </a:rPr>
-                <a:t> homocedástico)</a:t>
+                <a:t> </a:t>
+              </a:r>
+              <a:r>
+                <a:rPr lang="pt-BR" altLang="pt-BR" sz="1800" dirty="0" err="1">
+                  <a:solidFill>
+                    <a:srgbClr val="FF3300"/>
+                  </a:solidFill>
+                  <a:latin typeface="Tahoma" panose="020B0604030504040204" pitchFamily="34" charset="0"/>
+                </a:rPr>
+                <a:t>homocedástico</a:t>
+              </a:r>
+              <a:r>
+                <a:rPr lang="pt-BR" altLang="pt-BR" sz="1800" dirty="0">
+                  <a:solidFill>
+                    <a:srgbClr val="FF3300"/>
+                  </a:solidFill>
+                  <a:latin typeface="Tahoma" panose="020B0604030504040204" pitchFamily="34" charset="0"/>
+                </a:rPr>
+                <a:t>)</a:t>
               </a:r>
             </a:p>
           </p:txBody>
@@ -12511,23 +12644,23 @@
             <a:graphicData uri="http://schemas.openxmlformats.org/presentationml/2006/ole">
               <mc:AlternateContent xmlns:mc="http://schemas.openxmlformats.org/markup-compatibility/2006">
                 <mc:Choice xmlns:v="urn:schemas-microsoft-com:vml" Requires="v">
-                  <p:oleObj spid="_x0000_s8388" name="Equation" r:id="rId36" imgW="533169" imgH="241195" progId="Equation.DSMT4">
+                  <p:oleObj name="Equation" r:id="rId35" imgW="533169" imgH="241195" progId="Equation.DSMT4">
                     <p:embed/>
                   </p:oleObj>
                 </mc:Choice>
                 <mc:Fallback>
-                  <p:oleObj name="Equation" r:id="rId36" imgW="533169" imgH="241195" progId="Equation.DSMT4">
+                  <p:oleObj name="Equation" r:id="rId35" imgW="533169" imgH="241195" progId="Equation.DSMT4">
                     <p:embed/>
                     <p:pic>
                       <p:nvPicPr>
-                        <p:cNvPr id="0" name="Object 55"/>
+                        <p:cNvPr id="8207" name="Object 55"/>
                         <p:cNvPicPr>
                           <a:picLocks noChangeAspect="1" noChangeArrowheads="1"/>
                         </p:cNvPicPr>
                         <p:nvPr/>
                       </p:nvPicPr>
                       <p:blipFill>
-                        <a:blip r:embed="rId37">
+                        <a:blip r:embed="rId36">
                           <a:extLst>
                             <a:ext uri="{28A0092B-C50C-407E-A947-70E740481C1C}">
                               <a14:useLocalDpi xmlns:a14="http://schemas.microsoft.com/office/drawing/2010/main" val="0"/>
@@ -12940,7 +13073,7 @@
                 <p:nvPr/>
               </p:nvPicPr>
               <p:blipFill>
-                <a:blip r:embed="rId3">
+                <a:blip r:embed="rId2">
                   <a:extLst>
                     <a:ext uri="{28A0092B-C50C-407E-A947-70E740481C1C}">
                       <a14:useLocalDpi xmlns:a14="http://schemas.microsoft.com/office/drawing/2010/main" val="0"/>
@@ -13591,7 +13724,9 @@
                 <a:bodyPr/>
                 <a:lstStyle/>
                 <a:p>
-                  <a:endParaRPr lang="pt-BR"/>
+                  <a:endParaRPr lang="pt-BR" dirty="0">
+                    <a:latin typeface="Tahoma" panose="020B0604030504040204" pitchFamily="34" charset="0"/>
+                  </a:endParaRPr>
                 </a:p>
               </p:txBody>
             </p:sp>
@@ -13633,7 +13768,9 @@
               <a:bodyPr/>
               <a:lstStyle/>
               <a:p>
-                <a:endParaRPr lang="pt-BR"/>
+                <a:endParaRPr lang="pt-BR" dirty="0">
+                  <a:latin typeface="Tahoma" panose="020B0604030504040204" pitchFamily="34" charset="0"/>
+                </a:endParaRPr>
               </a:p>
             </p:txBody>
           </p:sp>
@@ -13653,23 +13790,23 @@
               <a:graphicData uri="http://schemas.openxmlformats.org/presentationml/2006/ole">
                 <mc:AlternateContent xmlns:mc="http://schemas.openxmlformats.org/markup-compatibility/2006">
                   <mc:Choice xmlns:v="urn:schemas-microsoft-com:vml" Requires="v">
-                    <p:oleObj spid="_x0000_s9398" name="Equation" r:id="rId4" imgW="152334" imgH="241195" progId="Equation.DSMT4">
+                    <p:oleObj name="Equation" r:id="rId3" imgW="152334" imgH="241195" progId="Equation.DSMT4">
                       <p:embed/>
                     </p:oleObj>
                   </mc:Choice>
                   <mc:Fallback>
-                    <p:oleObj name="Equation" r:id="rId4" imgW="152334" imgH="241195" progId="Equation.DSMT4">
+                    <p:oleObj name="Equation" r:id="rId3" imgW="152334" imgH="241195" progId="Equation.DSMT4">
                       <p:embed/>
                       <p:pic>
                         <p:nvPicPr>
-                          <p:cNvPr id="0" name="Object 53"/>
+                          <p:cNvPr id="9256" name="Object 53"/>
                           <p:cNvPicPr>
                             <a:picLocks noChangeAspect="1" noChangeArrowheads="1"/>
                           </p:cNvPicPr>
                           <p:nvPr/>
                         </p:nvPicPr>
                         <p:blipFill>
-                          <a:blip r:embed="rId5">
+                          <a:blip r:embed="rId4">
                             <a:extLst>
                               <a:ext uri="{28A0092B-C50C-407E-A947-70E740481C1C}">
                                 <a14:useLocalDpi xmlns:a14="http://schemas.microsoft.com/office/drawing/2010/main" val="0"/>
@@ -13988,7 +14125,9 @@
             <a:bodyPr/>
             <a:lstStyle/>
             <a:p>
-              <a:endParaRPr lang="pt-BR"/>
+              <a:endParaRPr lang="pt-BR" dirty="0">
+                <a:latin typeface="Tahoma" panose="020B0604030504040204" pitchFamily="34" charset="0"/>
+              </a:endParaRPr>
             </a:p>
           </p:txBody>
         </p:sp>
@@ -14411,7 +14550,9 @@
               <a:bodyPr/>
               <a:lstStyle/>
               <a:p>
-                <a:endParaRPr lang="pt-BR"/>
+                <a:endParaRPr lang="pt-BR" dirty="0">
+                  <a:latin typeface="Tahoma" panose="020B0604030504040204" pitchFamily="34" charset="0"/>
+                </a:endParaRPr>
               </a:p>
             </p:txBody>
           </p:sp>
@@ -14431,23 +14572,23 @@
               <a:graphicData uri="http://schemas.openxmlformats.org/presentationml/2006/ole">
                 <mc:AlternateContent xmlns:mc="http://schemas.openxmlformats.org/markup-compatibility/2006">
                   <mc:Choice xmlns:v="urn:schemas-microsoft-com:vml" Requires="v">
-                    <p:oleObj spid="_x0000_s9399" name="Equation" r:id="rId6" imgW="177646" imgH="393359" progId="Equation.DSMT4">
+                    <p:oleObj name="Equation" r:id="rId5" imgW="177646" imgH="393359" progId="Equation.DSMT4">
                       <p:embed/>
                     </p:oleObj>
                   </mc:Choice>
                   <mc:Fallback>
-                    <p:oleObj name="Equation" r:id="rId6" imgW="177646" imgH="393359" progId="Equation.DSMT4">
+                    <p:oleObj name="Equation" r:id="rId5" imgW="177646" imgH="393359" progId="Equation.DSMT4">
                       <p:embed/>
                       <p:pic>
                         <p:nvPicPr>
-                          <p:cNvPr id="0" name="Object 59"/>
+                          <p:cNvPr id="9253" name="Object 59"/>
                           <p:cNvPicPr>
                             <a:picLocks noChangeAspect="1" noChangeArrowheads="1"/>
                           </p:cNvPicPr>
                           <p:nvPr/>
                         </p:nvPicPr>
                         <p:blipFill>
-                          <a:blip r:embed="rId7">
+                          <a:blip r:embed="rId6">
                             <a:extLst>
                               <a:ext uri="{28A0092B-C50C-407E-A947-70E740481C1C}">
                                 <a14:useLocalDpi xmlns:a14="http://schemas.microsoft.com/office/drawing/2010/main" val="0"/>
@@ -14552,7 +14693,9 @@
               <a:bodyPr/>
               <a:lstStyle/>
               <a:p>
-                <a:endParaRPr lang="pt-BR"/>
+                <a:endParaRPr lang="pt-BR" dirty="0">
+                  <a:latin typeface="Tahoma" panose="020B0604030504040204" pitchFamily="34" charset="0"/>
+                </a:endParaRPr>
               </a:p>
             </p:txBody>
           </p:sp>
@@ -14572,23 +14715,23 @@
               <a:graphicData uri="http://schemas.openxmlformats.org/presentationml/2006/ole">
                 <mc:AlternateContent xmlns:mc="http://schemas.openxmlformats.org/markup-compatibility/2006">
                   <mc:Choice xmlns:v="urn:schemas-microsoft-com:vml" Requires="v">
-                    <p:oleObj spid="_x0000_s9400" name="Equation" r:id="rId8" imgW="177646" imgH="393359" progId="Equation.DSMT4">
+                    <p:oleObj name="Equation" r:id="rId7" imgW="177646" imgH="393359" progId="Equation.DSMT4">
                       <p:embed/>
                     </p:oleObj>
                   </mc:Choice>
                   <mc:Fallback>
-                    <p:oleObj name="Equation" r:id="rId8" imgW="177646" imgH="393359" progId="Equation.DSMT4">
+                    <p:oleObj name="Equation" r:id="rId7" imgW="177646" imgH="393359" progId="Equation.DSMT4">
                       <p:embed/>
                       <p:pic>
                         <p:nvPicPr>
-                          <p:cNvPr id="0" name="Object 62"/>
+                          <p:cNvPr id="9251" name="Object 62"/>
                           <p:cNvPicPr>
                             <a:picLocks noChangeAspect="1" noChangeArrowheads="1"/>
                           </p:cNvPicPr>
                           <p:nvPr/>
                         </p:nvPicPr>
                         <p:blipFill>
-                          <a:blip r:embed="rId9">
+                          <a:blip r:embed="rId8">
                             <a:extLst>
                               <a:ext uri="{28A0092B-C50C-407E-A947-70E740481C1C}">
                                 <a14:useLocalDpi xmlns:a14="http://schemas.microsoft.com/office/drawing/2010/main" val="0"/>
@@ -14656,23 +14799,23 @@
             <a:graphicData uri="http://schemas.openxmlformats.org/presentationml/2006/ole">
               <mc:AlternateContent xmlns:mc="http://schemas.openxmlformats.org/markup-compatibility/2006">
                 <mc:Choice xmlns:v="urn:schemas-microsoft-com:vml" Requires="v">
-                  <p:oleObj spid="_x0000_s9401" name="Equation" r:id="rId10" imgW="342603" imgH="177646" progId="Equation.DSMT4">
+                  <p:oleObj name="Equation" r:id="rId9" imgW="342603" imgH="177646" progId="Equation.DSMT4">
                     <p:embed/>
                   </p:oleObj>
                 </mc:Choice>
                 <mc:Fallback>
-                  <p:oleObj name="Equation" r:id="rId10" imgW="342603" imgH="177646" progId="Equation.DSMT4">
+                  <p:oleObj name="Equation" r:id="rId9" imgW="342603" imgH="177646" progId="Equation.DSMT4">
                     <p:embed/>
                     <p:pic>
                       <p:nvPicPr>
-                        <p:cNvPr id="0" name="Object 63"/>
+                        <p:cNvPr id="9248" name="Object 63"/>
                         <p:cNvPicPr>
                           <a:picLocks noChangeAspect="1" noChangeArrowheads="1"/>
                         </p:cNvPicPr>
                         <p:nvPr/>
                       </p:nvPicPr>
                       <p:blipFill>
-                        <a:blip r:embed="rId11">
+                        <a:blip r:embed="rId10">
                           <a:extLst>
                             <a:ext uri="{28A0092B-C50C-407E-A947-70E740481C1C}">
                               <a14:useLocalDpi xmlns:a14="http://schemas.microsoft.com/office/drawing/2010/main" val="0"/>
@@ -14739,23 +14882,23 @@
             <a:graphicData uri="http://schemas.openxmlformats.org/presentationml/2006/ole">
               <mc:AlternateContent xmlns:mc="http://schemas.openxmlformats.org/markup-compatibility/2006">
                 <mc:Choice xmlns:v="urn:schemas-microsoft-com:vml" Requires="v">
-                  <p:oleObj spid="_x0000_s9402" name="Equation" r:id="rId12" imgW="1295400" imgH="203200" progId="Equation.DSMT4">
+                  <p:oleObj name="Equation" r:id="rId11" imgW="1295400" imgH="203200" progId="Equation.DSMT4">
                     <p:embed/>
                   </p:oleObj>
                 </mc:Choice>
                 <mc:Fallback>
-                  <p:oleObj name="Equation" r:id="rId12" imgW="1295400" imgH="203200" progId="Equation.DSMT4">
+                  <p:oleObj name="Equation" r:id="rId11" imgW="1295400" imgH="203200" progId="Equation.DSMT4">
                     <p:embed/>
                     <p:pic>
                       <p:nvPicPr>
-                        <p:cNvPr id="0" name="Object 64"/>
+                        <p:cNvPr id="9249" name="Object 64"/>
                         <p:cNvPicPr>
                           <a:picLocks noChangeAspect="1" noChangeArrowheads="1"/>
                         </p:cNvPicPr>
                         <p:nvPr/>
                       </p:nvPicPr>
                       <p:blipFill>
-                        <a:blip r:embed="rId13">
+                        <a:blip r:embed="rId12">
                           <a:extLst>
                             <a:ext uri="{28A0092B-C50C-407E-A947-70E740481C1C}">
                               <a14:useLocalDpi xmlns:a14="http://schemas.microsoft.com/office/drawing/2010/main" val="0"/>
@@ -14826,37 +14969,37 @@
               <a:defRPr/>
             </a:pPr>
             <a:r>
-              <a:rPr lang="pt-BR" smtClean="0"/>
+              <a:rPr lang="pt-BR"/>
               <a:t>Intervalo de Confiança para </a:t>
             </a:r>
             <a:r>
-              <a:rPr lang="pt-BR" i="1" smtClean="0">
+              <a:rPr lang="pt-BR" i="1">
                 <a:sym typeface="Symbol" pitchFamily="18" charset="2"/>
               </a:rPr>
               <a:t></a:t>
             </a:r>
             <a:r>
-              <a:rPr lang="pt-BR" baseline="-25000" smtClean="0">
+              <a:rPr lang="pt-BR" baseline="-25000">
                 <a:latin typeface="Times New Roman" pitchFamily="18" charset="0"/>
                 <a:sym typeface="Symbol" pitchFamily="18" charset="2"/>
               </a:rPr>
               <a:t>1</a:t>
             </a:r>
             <a:r>
-              <a:rPr lang="pt-BR" smtClean="0">
+              <a:rPr lang="pt-BR">
                 <a:latin typeface="Times New Roman" pitchFamily="18" charset="0"/>
                 <a:sym typeface="Symbol" pitchFamily="18" charset="2"/>
               </a:rPr>
               <a:t> -</a:t>
             </a:r>
             <a:r>
-              <a:rPr lang="pt-BR" i="1" smtClean="0">
+              <a:rPr lang="pt-BR" i="1">
                 <a:sym typeface="Symbol" pitchFamily="18" charset="2"/>
               </a:rPr>
               <a:t> </a:t>
             </a:r>
             <a:r>
-              <a:rPr lang="pt-BR" baseline="-25000" smtClean="0">
+              <a:rPr lang="pt-BR" baseline="-25000">
                 <a:latin typeface="Times New Roman" pitchFamily="18" charset="0"/>
                 <a:sym typeface="Symbol" pitchFamily="18" charset="2"/>
               </a:rPr>
@@ -14881,23 +15024,23 @@
           <a:graphicData uri="http://schemas.openxmlformats.org/presentationml/2006/ole">
             <mc:AlternateContent xmlns:mc="http://schemas.openxmlformats.org/markup-compatibility/2006">
               <mc:Choice xmlns:v="urn:schemas-microsoft-com:vml" Requires="v">
-                <p:oleObj spid="_x0000_s9403" name="Equation" r:id="rId14" imgW="1574800" imgH="698500" progId="Equation.DSMT4">
+                <p:oleObj name="Equation" r:id="rId13" imgW="1574800" imgH="698500" progId="Equation.DSMT4">
                   <p:embed/>
                 </p:oleObj>
               </mc:Choice>
               <mc:Fallback>
-                <p:oleObj name="Equation" r:id="rId14" imgW="1574800" imgH="698500" progId="Equation.DSMT4">
+                <p:oleObj name="Equation" r:id="rId13" imgW="1574800" imgH="698500" progId="Equation.DSMT4">
                   <p:embed/>
                   <p:pic>
                     <p:nvPicPr>
-                      <p:cNvPr id="0" name="Object 3"/>
+                      <p:cNvPr id="168963" name="Object 3"/>
                       <p:cNvPicPr>
                         <a:picLocks noChangeAspect="1" noChangeArrowheads="1"/>
                       </p:cNvPicPr>
                       <p:nvPr/>
                     </p:nvPicPr>
                     <p:blipFill>
-                      <a:blip r:embed="rId15">
+                      <a:blip r:embed="rId14">
                         <a:extLst>
                           <a:ext uri="{28A0092B-C50C-407E-A947-70E740481C1C}">
                             <a14:useLocalDpi xmlns:a14="http://schemas.microsoft.com/office/drawing/2010/main" val="0"/>
@@ -14964,23 +15107,23 @@
           <a:graphicData uri="http://schemas.openxmlformats.org/presentationml/2006/ole">
             <mc:AlternateContent xmlns:mc="http://schemas.openxmlformats.org/markup-compatibility/2006">
               <mc:Choice xmlns:v="urn:schemas-microsoft-com:vml" Requires="v">
-                <p:oleObj spid="_x0000_s9404" name="Equation" r:id="rId16" imgW="965200" imgH="241300" progId="Equation.DSMT4">
+                <p:oleObj name="Equation" r:id="rId15" imgW="965200" imgH="241300" progId="Equation.DSMT4">
                   <p:embed/>
                 </p:oleObj>
               </mc:Choice>
               <mc:Fallback>
-                <p:oleObj name="Equation" r:id="rId16" imgW="965200" imgH="241300" progId="Equation.DSMT4">
+                <p:oleObj name="Equation" r:id="rId15" imgW="965200" imgH="241300" progId="Equation.DSMT4">
                   <p:embed/>
                   <p:pic>
                     <p:nvPicPr>
-                      <p:cNvPr id="0" name="Object 4"/>
+                      <p:cNvPr id="9221" name="Object 4"/>
                       <p:cNvPicPr>
                         <a:picLocks noChangeAspect="1" noChangeArrowheads="1"/>
                       </p:cNvPicPr>
                       <p:nvPr/>
                     </p:nvPicPr>
                     <p:blipFill>
-                      <a:blip r:embed="rId17">
+                      <a:blip r:embed="rId16">
                         <a:extLst>
                           <a:ext uri="{28A0092B-C50C-407E-A947-70E740481C1C}">
                             <a14:useLocalDpi xmlns:a14="http://schemas.microsoft.com/office/drawing/2010/main" val="0"/>
@@ -15047,23 +15190,23 @@
           <a:graphicData uri="http://schemas.openxmlformats.org/presentationml/2006/ole">
             <mc:AlternateContent xmlns:mc="http://schemas.openxmlformats.org/markup-compatibility/2006">
               <mc:Choice xmlns:v="urn:schemas-microsoft-com:vml" Requires="v">
-                <p:oleObj spid="_x0000_s9405" name="Equation" r:id="rId18" imgW="1002865" imgH="241195" progId="Equation.DSMT4">
+                <p:oleObj name="Equation" r:id="rId17" imgW="1002865" imgH="241195" progId="Equation.DSMT4">
                   <p:embed/>
                 </p:oleObj>
               </mc:Choice>
               <mc:Fallback>
-                <p:oleObj name="Equation" r:id="rId18" imgW="1002865" imgH="241195" progId="Equation.DSMT4">
+                <p:oleObj name="Equation" r:id="rId17" imgW="1002865" imgH="241195" progId="Equation.DSMT4">
                   <p:embed/>
                   <p:pic>
                     <p:nvPicPr>
-                      <p:cNvPr id="0" name="Object 5"/>
+                      <p:cNvPr id="9222" name="Object 5"/>
                       <p:cNvPicPr>
                         <a:picLocks noChangeAspect="1" noChangeArrowheads="1"/>
                       </p:cNvPicPr>
                       <p:nvPr/>
                     </p:nvPicPr>
                     <p:blipFill>
-                      <a:blip r:embed="rId19">
+                      <a:blip r:embed="rId18">
                         <a:extLst>
                           <a:ext uri="{28A0092B-C50C-407E-A947-70E740481C1C}">
                             <a14:useLocalDpi xmlns:a14="http://schemas.microsoft.com/office/drawing/2010/main" val="0"/>
@@ -15305,12 +15448,15 @@
                 <a:buNone/>
               </a:pPr>
               <a:r>
-                <a:rPr lang="pt-BR" altLang="pt-BR" sz="1600">
+                <a:rPr lang="pt-BR" altLang="pt-BR" sz="1600" dirty="0">
+                  <a:latin typeface="Tahoma" panose="020B0604030504040204" pitchFamily="34" charset="0"/>
                   <a:sym typeface="Symbol" pitchFamily="18" charset="2"/>
                 </a:rPr>
                 <a:t>e     desconhecidas</a:t>
               </a:r>
-              <a:endParaRPr lang="pt-BR" altLang="pt-BR" sz="1600"/>
+              <a:endParaRPr lang="pt-BR" altLang="pt-BR" sz="1600" dirty="0">
+                <a:latin typeface="Tahoma" panose="020B0604030504040204" pitchFamily="34" charset="0"/>
+              </a:endParaRPr>
             </a:p>
           </p:txBody>
         </p:sp>
@@ -15330,23 +15476,23 @@
             <a:graphicData uri="http://schemas.openxmlformats.org/presentationml/2006/ole">
               <mc:AlternateContent xmlns:mc="http://schemas.openxmlformats.org/markup-compatibility/2006">
                 <mc:Choice xmlns:v="urn:schemas-microsoft-com:vml" Requires="v">
-                  <p:oleObj spid="_x0000_s9406" name="Equation" r:id="rId20" imgW="165028" imgH="228501" progId="Equation.DSMT4">
+                  <p:oleObj name="Equation" r:id="rId19" imgW="165028" imgH="228501" progId="Equation.DSMT4">
                     <p:embed/>
                   </p:oleObj>
                 </mc:Choice>
                 <mc:Fallback>
-                  <p:oleObj name="Equation" r:id="rId20" imgW="165028" imgH="228501" progId="Equation.DSMT4">
+                  <p:oleObj name="Equation" r:id="rId19" imgW="165028" imgH="228501" progId="Equation.DSMT4">
                     <p:embed/>
                     <p:pic>
                       <p:nvPicPr>
-                        <p:cNvPr id="0" name="Object 8"/>
+                        <p:cNvPr id="9240" name="Object 8"/>
                         <p:cNvPicPr>
                           <a:picLocks noChangeAspect="1" noChangeArrowheads="1"/>
                         </p:cNvPicPr>
                         <p:nvPr/>
                       </p:nvPicPr>
                       <p:blipFill>
-                        <a:blip r:embed="rId21">
+                        <a:blip r:embed="rId20">
                           <a:extLst>
                             <a:ext uri="{28A0092B-C50C-407E-A947-70E740481C1C}">
                               <a14:useLocalDpi xmlns:a14="http://schemas.microsoft.com/office/drawing/2010/main" val="0"/>
@@ -15413,23 +15559,23 @@
             <a:graphicData uri="http://schemas.openxmlformats.org/presentationml/2006/ole">
               <mc:AlternateContent xmlns:mc="http://schemas.openxmlformats.org/markup-compatibility/2006">
                 <mc:Choice xmlns:v="urn:schemas-microsoft-com:vml" Requires="v">
-                  <p:oleObj spid="_x0000_s9407" name="Equation" r:id="rId22" imgW="203112" imgH="241195" progId="Equation.DSMT4">
+                  <p:oleObj name="Equation" r:id="rId21" imgW="203112" imgH="241195" progId="Equation.DSMT4">
                     <p:embed/>
                   </p:oleObj>
                 </mc:Choice>
                 <mc:Fallback>
-                  <p:oleObj name="Equation" r:id="rId22" imgW="203112" imgH="241195" progId="Equation.DSMT4">
+                  <p:oleObj name="Equation" r:id="rId21" imgW="203112" imgH="241195" progId="Equation.DSMT4">
                     <p:embed/>
                     <p:pic>
                       <p:nvPicPr>
-                        <p:cNvPr id="0" name="Object 9"/>
+                        <p:cNvPr id="9241" name="Object 9"/>
                         <p:cNvPicPr>
                           <a:picLocks noChangeAspect="1" noChangeArrowheads="1"/>
                         </p:cNvPicPr>
                         <p:nvPr/>
                       </p:nvPicPr>
                       <p:blipFill>
-                        <a:blip r:embed="rId23">
+                        <a:blip r:embed="rId22">
                           <a:extLst>
                             <a:ext uri="{28A0092B-C50C-407E-A947-70E740481C1C}">
                               <a14:useLocalDpi xmlns:a14="http://schemas.microsoft.com/office/drawing/2010/main" val="0"/>
@@ -15513,23 +15659,23 @@
             <a:graphicData uri="http://schemas.openxmlformats.org/presentationml/2006/ole">
               <mc:AlternateContent xmlns:mc="http://schemas.openxmlformats.org/markup-compatibility/2006">
                 <mc:Choice xmlns:v="urn:schemas-microsoft-com:vml" Requires="v">
-                  <p:oleObj spid="_x0000_s9408" name="Equation" r:id="rId24" imgW="1574800" imgH="698500" progId="Equation.DSMT4">
+                  <p:oleObj name="Equation" r:id="rId23" imgW="1574800" imgH="698500" progId="Equation.DSMT4">
                     <p:embed/>
                   </p:oleObj>
                 </mc:Choice>
                 <mc:Fallback>
-                  <p:oleObj name="Equation" r:id="rId24" imgW="1574800" imgH="698500" progId="Equation.DSMT4">
+                  <p:oleObj name="Equation" r:id="rId23" imgW="1574800" imgH="698500" progId="Equation.DSMT4">
                     <p:embed/>
                     <p:pic>
                       <p:nvPicPr>
-                        <p:cNvPr id="0" name="Object 11"/>
+                        <p:cNvPr id="9237" name="Object 11"/>
                         <p:cNvPicPr>
                           <a:picLocks noChangeAspect="1" noChangeArrowheads="1"/>
                         </p:cNvPicPr>
                         <p:nvPr/>
                       </p:nvPicPr>
                       <p:blipFill>
-                        <a:blip r:embed="rId25">
+                        <a:blip r:embed="rId24">
                           <a:extLst>
                             <a:ext uri="{28A0092B-C50C-407E-A947-70E740481C1C}">
                               <a14:useLocalDpi xmlns:a14="http://schemas.microsoft.com/office/drawing/2010/main" val="0"/>
@@ -15596,23 +15742,23 @@
             <a:graphicData uri="http://schemas.openxmlformats.org/presentationml/2006/ole">
               <mc:AlternateContent xmlns:mc="http://schemas.openxmlformats.org/markup-compatibility/2006">
                 <mc:Choice xmlns:v="urn:schemas-microsoft-com:vml" Requires="v">
-                  <p:oleObj spid="_x0000_s9409" name="Equation" r:id="rId26" imgW="457002" imgH="203112" progId="Equation.DSMT4">
+                  <p:oleObj name="Equation" r:id="rId25" imgW="457002" imgH="203112" progId="Equation.DSMT4">
                     <p:embed/>
                   </p:oleObj>
                 </mc:Choice>
                 <mc:Fallback>
-                  <p:oleObj name="Equation" r:id="rId26" imgW="457002" imgH="203112" progId="Equation.DSMT4">
+                  <p:oleObj name="Equation" r:id="rId25" imgW="457002" imgH="203112" progId="Equation.DSMT4">
                     <p:embed/>
                     <p:pic>
                       <p:nvPicPr>
-                        <p:cNvPr id="0" name="Object 12"/>
+                        <p:cNvPr id="9238" name="Object 12"/>
                         <p:cNvPicPr>
                           <a:picLocks noChangeAspect="1" noChangeArrowheads="1"/>
                         </p:cNvPicPr>
                         <p:nvPr/>
                       </p:nvPicPr>
                       <p:blipFill>
-                        <a:blip r:embed="rId27">
+                        <a:blip r:embed="rId26">
                           <a:extLst>
                             <a:ext uri="{28A0092B-C50C-407E-A947-70E740481C1C}">
                               <a14:useLocalDpi xmlns:a14="http://schemas.microsoft.com/office/drawing/2010/main" val="0"/>
@@ -15675,23 +15821,23 @@
           <a:graphicData uri="http://schemas.openxmlformats.org/presentationml/2006/ole">
             <mc:AlternateContent xmlns:mc="http://schemas.openxmlformats.org/markup-compatibility/2006">
               <mc:Choice xmlns:v="urn:schemas-microsoft-com:vml" Requires="v">
-                <p:oleObj spid="_x0000_s9410" name="Equation" r:id="rId28" imgW="2451100" imgH="698500" progId="Equation.DSMT4">
+                <p:oleObj name="Equation" r:id="rId27" imgW="2451100" imgH="698500" progId="Equation.DSMT4">
                   <p:embed/>
                 </p:oleObj>
               </mc:Choice>
               <mc:Fallback>
-                <p:oleObj name="Equation" r:id="rId28" imgW="2451100" imgH="698500" progId="Equation.DSMT4">
+                <p:oleObj name="Equation" r:id="rId27" imgW="2451100" imgH="698500" progId="Equation.DSMT4">
                   <p:embed/>
                   <p:pic>
                     <p:nvPicPr>
-                      <p:cNvPr id="0" name="Object 36"/>
+                      <p:cNvPr id="168996" name="Object 36"/>
                       <p:cNvPicPr>
                         <a:picLocks noChangeAspect="1" noChangeArrowheads="1"/>
                       </p:cNvPicPr>
                       <p:nvPr/>
                     </p:nvPicPr>
                     <p:blipFill>
-                      <a:blip r:embed="rId29">
+                      <a:blip r:embed="rId28">
                         <a:extLst>
                           <a:ext uri="{28A0092B-C50C-407E-A947-70E740481C1C}">
                             <a14:useLocalDpi xmlns:a14="http://schemas.microsoft.com/office/drawing/2010/main" val="0"/>
@@ -15758,23 +15904,23 @@
           <a:graphicData uri="http://schemas.openxmlformats.org/presentationml/2006/ole">
             <mc:AlternateContent xmlns:mc="http://schemas.openxmlformats.org/markup-compatibility/2006">
               <mc:Choice xmlns:v="urn:schemas-microsoft-com:vml" Requires="v">
-                <p:oleObj spid="_x0000_s9411" name="Equation" r:id="rId30" imgW="3898900" imgH="495300" progId="Equation.DSMT4">
+                <p:oleObj name="Equation" r:id="rId29" imgW="3898900" imgH="495300" progId="Equation.DSMT4">
                   <p:embed/>
                 </p:oleObj>
               </mc:Choice>
               <mc:Fallback>
-                <p:oleObj name="Equation" r:id="rId30" imgW="3898900" imgH="495300" progId="Equation.DSMT4">
+                <p:oleObj name="Equation" r:id="rId29" imgW="3898900" imgH="495300" progId="Equation.DSMT4">
                   <p:embed/>
                   <p:pic>
                     <p:nvPicPr>
-                      <p:cNvPr id="0" name="Object 37"/>
+                      <p:cNvPr id="168997" name="Object 37"/>
                       <p:cNvPicPr>
                         <a:picLocks noChangeAspect="1" noChangeArrowheads="1"/>
                       </p:cNvPicPr>
                       <p:nvPr/>
                     </p:nvPicPr>
                     <p:blipFill>
-                      <a:blip r:embed="rId31">
+                      <a:blip r:embed="rId30">
                         <a:extLst>
                           <a:ext uri="{28A0092B-C50C-407E-A947-70E740481C1C}">
                             <a14:useLocalDpi xmlns:a14="http://schemas.microsoft.com/office/drawing/2010/main" val="0"/>
@@ -15992,7 +16138,9 @@
               <a:buFontTx/>
               <a:buNone/>
             </a:pPr>
-            <a:endParaRPr lang="pt-BR" altLang="pt-BR" sz="1600"/>
+            <a:endParaRPr lang="pt-BR" altLang="pt-BR" sz="1600" dirty="0">
+              <a:latin typeface="Tahoma" panose="020B0604030504040204" pitchFamily="34" charset="0"/>
+            </a:endParaRPr>
           </a:p>
         </p:txBody>
       </p:sp>
@@ -16187,15 +16335,16 @@
                 <a:buNone/>
               </a:pPr>
               <a:r>
-                <a:rPr lang="pt-BR" altLang="pt-BR" sz="1800">
+                <a:rPr lang="pt-BR" altLang="pt-BR" sz="1800" dirty="0">
                   <a:solidFill>
                     <a:srgbClr val="FF3300"/>
                   </a:solidFill>
+                  <a:latin typeface="Tahoma" panose="020B0604030504040204" pitchFamily="34" charset="0"/>
                 </a:rPr>
                 <a:t>IC para </a:t>
               </a:r>
               <a:r>
-                <a:rPr lang="pt-BR" altLang="pt-BR" sz="1800" i="1">
+                <a:rPr lang="pt-BR" altLang="pt-BR" sz="1800" i="1" dirty="0">
                   <a:solidFill>
                     <a:srgbClr val="FF3300"/>
                   </a:solidFill>
@@ -16204,7 +16353,7 @@
                 <a:t>m</a:t>
               </a:r>
               <a:r>
-                <a:rPr lang="pt-BR" altLang="pt-BR" sz="1800" baseline="-25000">
+                <a:rPr lang="pt-BR" altLang="pt-BR" sz="1800" baseline="-25000" dirty="0">
                   <a:solidFill>
                     <a:srgbClr val="FF3300"/>
                   </a:solidFill>
@@ -16213,7 +16362,7 @@
                 <a:t>1</a:t>
               </a:r>
               <a:r>
-                <a:rPr lang="pt-BR" altLang="pt-BR" sz="1800" i="1">
+                <a:rPr lang="pt-BR" altLang="pt-BR" sz="1800" i="1" dirty="0">
                   <a:solidFill>
                     <a:srgbClr val="FF3300"/>
                   </a:solidFill>
@@ -16222,7 +16371,7 @@
                 <a:t> - </a:t>
               </a:r>
               <a:r>
-                <a:rPr lang="pt-BR" altLang="pt-BR" sz="1800" i="1">
+                <a:rPr lang="pt-BR" altLang="pt-BR" sz="1800" i="1" dirty="0">
                   <a:solidFill>
                     <a:srgbClr val="FF3300"/>
                   </a:solidFill>
@@ -16231,7 +16380,7 @@
                 <a:t>m</a:t>
               </a:r>
               <a:r>
-                <a:rPr lang="pt-BR" altLang="pt-BR" sz="1800" baseline="-25000">
+                <a:rPr lang="pt-BR" altLang="pt-BR" sz="1800" baseline="-25000" dirty="0">
                   <a:solidFill>
                     <a:srgbClr val="FF3300"/>
                   </a:solidFill>
@@ -16240,15 +16389,16 @@
                 <a:t>2</a:t>
               </a:r>
               <a:r>
-                <a:rPr lang="pt-BR" altLang="pt-BR" sz="1800">
+                <a:rPr lang="pt-BR" altLang="pt-BR" sz="1800" dirty="0">
                   <a:solidFill>
                     <a:srgbClr val="FF3300"/>
                   </a:solidFill>
+                  <a:latin typeface="Tahoma" panose="020B0604030504040204" pitchFamily="34" charset="0"/>
                 </a:rPr>
                 <a:t> (atenção:              </a:t>
               </a:r>
               <a:r>
-                <a:rPr lang="pt-BR" altLang="pt-BR" sz="1800" i="1">
+                <a:rPr lang="pt-BR" altLang="pt-BR" sz="1800" i="1" dirty="0">
                   <a:solidFill>
                     <a:srgbClr val="FF3300"/>
                   </a:solidFill>
@@ -16257,12 +16407,31 @@
                 <a:t>t</a:t>
               </a:r>
               <a:r>
-                <a:rPr lang="pt-BR" altLang="pt-BR" sz="1800">
+                <a:rPr lang="pt-BR" altLang="pt-BR" sz="1800" dirty="0">
                   <a:solidFill>
                     <a:srgbClr val="FF3300"/>
                   </a:solidFill>
+                  <a:latin typeface="Tahoma" panose="020B0604030504040204" pitchFamily="34" charset="0"/>
                 </a:rPr>
-                <a:t> heterocedástico)</a:t>
+                <a:t> </a:t>
+              </a:r>
+              <a:r>
+                <a:rPr lang="pt-BR" altLang="pt-BR" sz="1800" dirty="0" err="1">
+                  <a:solidFill>
+                    <a:srgbClr val="FF3300"/>
+                  </a:solidFill>
+                  <a:latin typeface="Tahoma" panose="020B0604030504040204" pitchFamily="34" charset="0"/>
+                </a:rPr>
+                <a:t>heterocedástico</a:t>
+              </a:r>
+              <a:r>
+                <a:rPr lang="pt-BR" altLang="pt-BR" sz="1800" dirty="0">
+                  <a:solidFill>
+                    <a:srgbClr val="FF3300"/>
+                  </a:solidFill>
+                  <a:latin typeface="Tahoma" panose="020B0604030504040204" pitchFamily="34" charset="0"/>
+                </a:rPr>
+                <a:t>)</a:t>
               </a:r>
             </a:p>
           </p:txBody>
@@ -16283,23 +16452,23 @@
             <a:graphicData uri="http://schemas.openxmlformats.org/presentationml/2006/ole">
               <mc:AlternateContent xmlns:mc="http://schemas.openxmlformats.org/markup-compatibility/2006">
                 <mc:Choice xmlns:v="urn:schemas-microsoft-com:vml" Requires="v">
-                  <p:oleObj spid="_x0000_s9412" name="Equation" r:id="rId32" imgW="533169" imgH="241195" progId="Equation.DSMT4">
+                  <p:oleObj name="Equation" r:id="rId31" imgW="533169" imgH="241195" progId="Equation.DSMT4">
                     <p:embed/>
                   </p:oleObj>
                 </mc:Choice>
                 <mc:Fallback>
-                  <p:oleObj name="Equation" r:id="rId32" imgW="533169" imgH="241195" progId="Equation.DSMT4">
+                  <p:oleObj name="Equation" r:id="rId31" imgW="533169" imgH="241195" progId="Equation.DSMT4">
                     <p:embed/>
                     <p:pic>
                       <p:nvPicPr>
-                        <p:cNvPr id="0" name="Object 41"/>
+                        <p:cNvPr id="9236" name="Object 41"/>
                         <p:cNvPicPr>
                           <a:picLocks noChangeAspect="1" noChangeArrowheads="1"/>
                         </p:cNvPicPr>
                         <p:nvPr/>
                       </p:nvPicPr>
                       <p:blipFill>
-                        <a:blip r:embed="rId33">
+                        <a:blip r:embed="rId32">
                           <a:extLst>
                             <a:ext uri="{28A0092B-C50C-407E-A947-70E740481C1C}">
                               <a14:useLocalDpi xmlns:a14="http://schemas.microsoft.com/office/drawing/2010/main" val="0"/>
@@ -16367,23 +16536,23 @@
           <a:graphicData uri="http://schemas.openxmlformats.org/presentationml/2006/ole">
             <mc:AlternateContent xmlns:mc="http://schemas.openxmlformats.org/markup-compatibility/2006">
               <mc:Choice xmlns:v="urn:schemas-microsoft-com:vml" Requires="v">
-                <p:oleObj spid="_x0000_s9413" name="Equation" r:id="rId34" imgW="1257300" imgH="1206500" progId="Equation.DSMT4">
+                <p:oleObj name="Equation" r:id="rId33" imgW="1257300" imgH="1206500" progId="Equation.DSMT4">
                   <p:embed/>
                 </p:oleObj>
               </mc:Choice>
               <mc:Fallback>
-                <p:oleObj name="Equation" r:id="rId34" imgW="1257300" imgH="1206500" progId="Equation.DSMT4">
+                <p:oleObj name="Equation" r:id="rId33" imgW="1257300" imgH="1206500" progId="Equation.DSMT4">
                   <p:embed/>
                   <p:pic>
                     <p:nvPicPr>
-                      <p:cNvPr id="0" name="Object 43"/>
+                      <p:cNvPr id="169003" name="Object 43"/>
                       <p:cNvPicPr>
                         <a:picLocks noChangeAspect="1" noChangeArrowheads="1"/>
                       </p:cNvPicPr>
                       <p:nvPr/>
                     </p:nvPicPr>
                     <p:blipFill>
-                      <a:blip r:embed="rId35">
+                      <a:blip r:embed="rId34">
                         <a:extLst>
                           <a:ext uri="{28A0092B-C50C-407E-A947-70E740481C1C}">
                             <a14:useLocalDpi xmlns:a14="http://schemas.microsoft.com/office/drawing/2010/main" val="0"/>
@@ -16444,10 +16613,10 @@
         </p:nvGrpSpPr>
         <p:grpSpPr bwMode="auto">
           <a:xfrm>
-            <a:off x="4251325" y="2205038"/>
-            <a:ext cx="2354263" cy="346075"/>
+            <a:off x="4251326" y="2205038"/>
+            <a:ext cx="2359026" cy="346075"/>
             <a:chOff x="2678" y="1389"/>
-            <a:chExt cx="1483" cy="218"/>
+            <a:chExt cx="1486" cy="218"/>
           </a:xfrm>
         </p:grpSpPr>
         <p:sp>
@@ -16625,7 +16794,9 @@
                 <a:buNone/>
               </a:pPr>
               <a:r>
-                <a:rPr lang="pt-BR" altLang="pt-BR" sz="1600"/>
+                <a:rPr lang="pt-BR" altLang="pt-BR" sz="1600" dirty="0">
+                  <a:latin typeface="Tahoma" panose="020B0604030504040204" pitchFamily="34" charset="0"/>
+                </a:rPr>
                 <a:t>(considerando</a:t>
               </a:r>
             </a:p>
@@ -16647,23 +16818,23 @@
             <a:graphicData uri="http://schemas.openxmlformats.org/presentationml/2006/ole">
               <mc:AlternateContent xmlns:mc="http://schemas.openxmlformats.org/markup-compatibility/2006">
                 <mc:Choice xmlns:v="urn:schemas-microsoft-com:vml" Requires="v">
-                  <p:oleObj spid="_x0000_s9414" name="Equation" r:id="rId36" imgW="533169" imgH="241195" progId="Equation.DSMT4">
+                  <p:oleObj name="Equation" r:id="rId35" imgW="533169" imgH="241195" progId="Equation.DSMT4">
                     <p:embed/>
                   </p:oleObj>
                 </mc:Choice>
                 <mc:Fallback>
-                  <p:oleObj name="Equation" r:id="rId36" imgW="533169" imgH="241195" progId="Equation.DSMT4">
+                  <p:oleObj name="Equation" r:id="rId35" imgW="533169" imgH="241195" progId="Equation.DSMT4">
                     <p:embed/>
                     <p:pic>
                       <p:nvPicPr>
-                        <p:cNvPr id="0" name="Object 67"/>
+                        <p:cNvPr id="9233" name="Object 67"/>
                         <p:cNvPicPr>
                           <a:picLocks noChangeAspect="1" noChangeArrowheads="1"/>
                         </p:cNvPicPr>
                         <p:nvPr/>
                       </p:nvPicPr>
                       <p:blipFill>
-                        <a:blip r:embed="rId37">
+                        <a:blip r:embed="rId36">
                           <a:extLst>
                             <a:ext uri="{28A0092B-C50C-407E-A947-70E740481C1C}">
                               <a14:useLocalDpi xmlns:a14="http://schemas.microsoft.com/office/drawing/2010/main" val="0"/>
@@ -16725,7 +16896,7 @@
           <p:spPr bwMode="auto">
             <a:xfrm>
               <a:off x="3998" y="1389"/>
-              <a:ext cx="163" cy="212"/>
+              <a:ext cx="166" cy="213"/>
             </a:xfrm>
             <a:prstGeom prst="rect">
               <a:avLst/>
@@ -16889,7 +17060,9 @@
                 <a:buNone/>
               </a:pPr>
               <a:r>
-                <a:rPr lang="pt-BR" altLang="pt-BR" sz="1600"/>
+                <a:rPr lang="pt-BR" altLang="pt-BR" sz="1600" dirty="0">
+                  <a:latin typeface="Tahoma" panose="020B0604030504040204" pitchFamily="34" charset="0"/>
+                </a:rPr>
                 <a:t>)</a:t>
               </a:r>
             </a:p>
@@ -17351,23 +17524,23 @@
           <a:graphicData uri="http://schemas.openxmlformats.org/presentationml/2006/ole">
             <mc:AlternateContent xmlns:mc="http://schemas.openxmlformats.org/markup-compatibility/2006">
               <mc:Choice xmlns:v="urn:schemas-microsoft-com:vml" Requires="v">
-                <p:oleObj spid="_x0000_s15586" name="Equation" r:id="rId3" imgW="583947" imgH="457002" progId="Equation.DSMT4">
+                <p:oleObj name="Equation" r:id="rId2" imgW="583947" imgH="457002" progId="Equation.DSMT4">
                   <p:embed/>
                 </p:oleObj>
               </mc:Choice>
               <mc:Fallback>
-                <p:oleObj name="Equation" r:id="rId3" imgW="583947" imgH="457002" progId="Equation.DSMT4">
+                <p:oleObj name="Equation" r:id="rId2" imgW="583947" imgH="457002" progId="Equation.DSMT4">
                   <p:embed/>
                   <p:pic>
                     <p:nvPicPr>
-                      <p:cNvPr id="0" name="Object 4"/>
+                      <p:cNvPr id="158724" name="Object 4"/>
                       <p:cNvPicPr>
                         <a:picLocks noChangeAspect="1" noChangeArrowheads="1"/>
                       </p:cNvPicPr>
                       <p:nvPr/>
                     </p:nvPicPr>
                     <p:blipFill>
-                      <a:blip r:embed="rId4">
+                      <a:blip r:embed="rId3">
                         <a:extLst>
                           <a:ext uri="{28A0092B-C50C-407E-A947-70E740481C1C}">
                             <a14:useLocalDpi xmlns:a14="http://schemas.microsoft.com/office/drawing/2010/main" val="0"/>
@@ -17434,23 +17607,23 @@
           <a:graphicData uri="http://schemas.openxmlformats.org/presentationml/2006/ole">
             <mc:AlternateContent xmlns:mc="http://schemas.openxmlformats.org/markup-compatibility/2006">
               <mc:Choice xmlns:v="urn:schemas-microsoft-com:vml" Requires="v">
-                <p:oleObj spid="_x0000_s15587" name="Equation" r:id="rId5" imgW="495085" imgH="241195" progId="Equation.DSMT4">
+                <p:oleObj name="Equation" r:id="rId4" imgW="495085" imgH="241195" progId="Equation.DSMT4">
                   <p:embed/>
                 </p:oleObj>
               </mc:Choice>
               <mc:Fallback>
-                <p:oleObj name="Equation" r:id="rId5" imgW="495085" imgH="241195" progId="Equation.DSMT4">
+                <p:oleObj name="Equation" r:id="rId4" imgW="495085" imgH="241195" progId="Equation.DSMT4">
                   <p:embed/>
                   <p:pic>
                     <p:nvPicPr>
-                      <p:cNvPr id="0" name="Object 5"/>
+                      <p:cNvPr id="158725" name="Object 5"/>
                       <p:cNvPicPr>
                         <a:picLocks noChangeAspect="1" noChangeArrowheads="1"/>
                       </p:cNvPicPr>
                       <p:nvPr/>
                     </p:nvPicPr>
                     <p:blipFill>
-                      <a:blip r:embed="rId6">
+                      <a:blip r:embed="rId5">
                         <a:extLst>
                           <a:ext uri="{28A0092B-C50C-407E-A947-70E740481C1C}">
                             <a14:useLocalDpi xmlns:a14="http://schemas.microsoft.com/office/drawing/2010/main" val="0"/>
@@ -17512,23 +17685,23 @@
           <a:graphicData uri="http://schemas.openxmlformats.org/presentationml/2006/ole">
             <mc:AlternateContent xmlns:mc="http://schemas.openxmlformats.org/markup-compatibility/2006">
               <mc:Choice xmlns:v="urn:schemas-microsoft-com:vml" Requires="v">
-                <p:oleObj spid="_x0000_s15588" name="Equation" r:id="rId7" imgW="1625600" imgH="457200" progId="Equation.DSMT4">
+                <p:oleObj name="Equation" r:id="rId6" imgW="1625600" imgH="457200" progId="Equation.DSMT4">
                   <p:embed/>
                 </p:oleObj>
               </mc:Choice>
               <mc:Fallback>
-                <p:oleObj name="Equation" r:id="rId7" imgW="1625600" imgH="457200" progId="Equation.DSMT4">
+                <p:oleObj name="Equation" r:id="rId6" imgW="1625600" imgH="457200" progId="Equation.DSMT4">
                   <p:embed/>
                   <p:pic>
                     <p:nvPicPr>
-                      <p:cNvPr id="0" name="Object 27"/>
+                      <p:cNvPr id="158747" name="Object 27"/>
                       <p:cNvPicPr>
                         <a:picLocks noChangeAspect="1" noChangeArrowheads="1"/>
                       </p:cNvPicPr>
                       <p:nvPr/>
                     </p:nvPicPr>
                     <p:blipFill>
-                      <a:blip r:embed="rId8">
+                      <a:blip r:embed="rId7">
                         <a:extLst>
                           <a:ext uri="{28A0092B-C50C-407E-A947-70E740481C1C}">
                             <a14:useLocalDpi xmlns:a14="http://schemas.microsoft.com/office/drawing/2010/main" val="0"/>
@@ -17595,23 +17768,23 @@
           <a:graphicData uri="http://schemas.openxmlformats.org/presentationml/2006/ole">
             <mc:AlternateContent xmlns:mc="http://schemas.openxmlformats.org/markup-compatibility/2006">
               <mc:Choice xmlns:v="urn:schemas-microsoft-com:vml" Requires="v">
-                <p:oleObj spid="_x0000_s15589" name="Equation" r:id="rId9" imgW="1892300" imgH="457200" progId="Equation.DSMT4">
+                <p:oleObj name="Equation" r:id="rId8" imgW="1892300" imgH="457200" progId="Equation.DSMT4">
                   <p:embed/>
                 </p:oleObj>
               </mc:Choice>
               <mc:Fallback>
-                <p:oleObj name="Equation" r:id="rId9" imgW="1892300" imgH="457200" progId="Equation.DSMT4">
+                <p:oleObj name="Equation" r:id="rId8" imgW="1892300" imgH="457200" progId="Equation.DSMT4">
                   <p:embed/>
                   <p:pic>
                     <p:nvPicPr>
-                      <p:cNvPr id="0" name="Object 28"/>
+                      <p:cNvPr id="158748" name="Object 28"/>
                       <p:cNvPicPr>
                         <a:picLocks noChangeAspect="1" noChangeArrowheads="1"/>
                       </p:cNvPicPr>
                       <p:nvPr/>
                     </p:nvPicPr>
                     <p:blipFill>
-                      <a:blip r:embed="rId10">
+                      <a:blip r:embed="rId9">
                         <a:extLst>
                           <a:ext uri="{28A0092B-C50C-407E-A947-70E740481C1C}">
                             <a14:useLocalDpi xmlns:a14="http://schemas.microsoft.com/office/drawing/2010/main" val="0"/>
@@ -17829,7 +18002,9 @@
               <a:buFontTx/>
               <a:buNone/>
             </a:pPr>
-            <a:endParaRPr lang="pt-BR" altLang="pt-BR" sz="1600"/>
+            <a:endParaRPr lang="pt-BR" altLang="pt-BR" sz="1600" dirty="0">
+              <a:latin typeface="Tahoma" panose="020B0604030504040204" pitchFamily="34" charset="0"/>
+            </a:endParaRPr>
           </a:p>
         </p:txBody>
       </p:sp>
@@ -17849,23 +18024,23 @@
           <a:graphicData uri="http://schemas.openxmlformats.org/presentationml/2006/ole">
             <mc:AlternateContent xmlns:mc="http://schemas.openxmlformats.org/markup-compatibility/2006">
               <mc:Choice xmlns:v="urn:schemas-microsoft-com:vml" Requires="v">
-                <p:oleObj spid="_x0000_s15590" name="Equation" r:id="rId11" imgW="965200" imgH="241300" progId="Equation.DSMT4">
+                <p:oleObj name="Equation" r:id="rId10" imgW="965200" imgH="241300" progId="Equation.DSMT4">
                   <p:embed/>
                 </p:oleObj>
               </mc:Choice>
               <mc:Fallback>
-                <p:oleObj name="Equation" r:id="rId11" imgW="965200" imgH="241300" progId="Equation.DSMT4">
+                <p:oleObj name="Equation" r:id="rId10" imgW="965200" imgH="241300" progId="Equation.DSMT4">
                   <p:embed/>
                   <p:pic>
                     <p:nvPicPr>
-                      <p:cNvPr id="0" name="Object 31"/>
+                      <p:cNvPr id="15367" name="Object 31"/>
                       <p:cNvPicPr>
                         <a:picLocks noChangeAspect="1" noChangeArrowheads="1"/>
                       </p:cNvPicPr>
                       <p:nvPr/>
                     </p:nvPicPr>
                     <p:blipFill>
-                      <a:blip r:embed="rId12">
+                      <a:blip r:embed="rId11">
                         <a:extLst>
                           <a:ext uri="{28A0092B-C50C-407E-A947-70E740481C1C}">
                             <a14:useLocalDpi xmlns:a14="http://schemas.microsoft.com/office/drawing/2010/main" val="0"/>
@@ -18099,7 +18274,9 @@
                 <a:buFontTx/>
                 <a:buNone/>
               </a:pPr>
-              <a:endParaRPr lang="pt-BR" altLang="pt-BR" sz="1600"/>
+              <a:endParaRPr lang="pt-BR" altLang="pt-BR" sz="1600" dirty="0">
+                <a:latin typeface="Tahoma" panose="020B0604030504040204" pitchFamily="34" charset="0"/>
+              </a:endParaRPr>
             </a:p>
           </p:txBody>
         </p:sp>
@@ -18306,23 +18483,23 @@
           <a:graphicData uri="http://schemas.openxmlformats.org/presentationml/2006/ole">
             <mc:AlternateContent xmlns:mc="http://schemas.openxmlformats.org/markup-compatibility/2006">
               <mc:Choice xmlns:v="urn:schemas-microsoft-com:vml" Requires="v">
-                <p:oleObj spid="_x0000_s15591" name="Equation" r:id="rId13" imgW="1002865" imgH="241195" progId="Equation.DSMT4">
+                <p:oleObj name="Equation" r:id="rId12" imgW="1002865" imgH="241195" progId="Equation.DSMT4">
                   <p:embed/>
                 </p:oleObj>
               </mc:Choice>
               <mc:Fallback>
-                <p:oleObj name="Equation" r:id="rId13" imgW="1002865" imgH="241195" progId="Equation.DSMT4">
+                <p:oleObj name="Equation" r:id="rId12" imgW="1002865" imgH="241195" progId="Equation.DSMT4">
                   <p:embed/>
                   <p:pic>
                     <p:nvPicPr>
-                      <p:cNvPr id="0" name="Object 36"/>
+                      <p:cNvPr id="15369" name="Object 36"/>
                       <p:cNvPicPr>
                         <a:picLocks noChangeAspect="1" noChangeArrowheads="1"/>
                       </p:cNvPicPr>
                       <p:nvPr/>
                     </p:nvPicPr>
                     <p:blipFill>
-                      <a:blip r:embed="rId14">
+                      <a:blip r:embed="rId13">
                         <a:extLst>
                           <a:ext uri="{28A0092B-C50C-407E-A947-70E740481C1C}">
                             <a14:useLocalDpi xmlns:a14="http://schemas.microsoft.com/office/drawing/2010/main" val="0"/>
@@ -18564,12 +18741,15 @@
                 <a:buNone/>
               </a:pPr>
               <a:r>
-                <a:rPr lang="pt-BR" altLang="pt-BR" sz="1600">
+                <a:rPr lang="pt-BR" altLang="pt-BR" sz="1600" dirty="0">
+                  <a:latin typeface="Tahoma" panose="020B0604030504040204" pitchFamily="34" charset="0"/>
                   <a:sym typeface="Symbol" pitchFamily="18" charset="2"/>
                 </a:rPr>
                 <a:t>e     desconhecidas</a:t>
               </a:r>
-              <a:endParaRPr lang="pt-BR" altLang="pt-BR" sz="1600"/>
+              <a:endParaRPr lang="pt-BR" altLang="pt-BR" sz="1600" dirty="0">
+                <a:latin typeface="Tahoma" panose="020B0604030504040204" pitchFamily="34" charset="0"/>
+              </a:endParaRPr>
             </a:p>
           </p:txBody>
         </p:sp>
@@ -18589,23 +18769,23 @@
             <a:graphicData uri="http://schemas.openxmlformats.org/presentationml/2006/ole">
               <mc:AlternateContent xmlns:mc="http://schemas.openxmlformats.org/markup-compatibility/2006">
                 <mc:Choice xmlns:v="urn:schemas-microsoft-com:vml" Requires="v">
-                  <p:oleObj spid="_x0000_s15592" name="Equation" r:id="rId15" imgW="165028" imgH="228501" progId="Equation.DSMT4">
+                  <p:oleObj name="Equation" r:id="rId14" imgW="165028" imgH="228501" progId="Equation.DSMT4">
                     <p:embed/>
                   </p:oleObj>
                 </mc:Choice>
                 <mc:Fallback>
-                  <p:oleObj name="Equation" r:id="rId15" imgW="165028" imgH="228501" progId="Equation.DSMT4">
+                  <p:oleObj name="Equation" r:id="rId14" imgW="165028" imgH="228501" progId="Equation.DSMT4">
                     <p:embed/>
                     <p:pic>
                       <p:nvPicPr>
-                        <p:cNvPr id="0" name="Object 46"/>
+                        <p:cNvPr id="15406" name="Object 46"/>
                         <p:cNvPicPr>
                           <a:picLocks noChangeAspect="1" noChangeArrowheads="1"/>
                         </p:cNvPicPr>
                         <p:nvPr/>
                       </p:nvPicPr>
                       <p:blipFill>
-                        <a:blip r:embed="rId16">
+                        <a:blip r:embed="rId15">
                           <a:extLst>
                             <a:ext uri="{28A0092B-C50C-407E-A947-70E740481C1C}">
                               <a14:useLocalDpi xmlns:a14="http://schemas.microsoft.com/office/drawing/2010/main" val="0"/>
@@ -18672,23 +18852,23 @@
             <a:graphicData uri="http://schemas.openxmlformats.org/presentationml/2006/ole">
               <mc:AlternateContent xmlns:mc="http://schemas.openxmlformats.org/markup-compatibility/2006">
                 <mc:Choice xmlns:v="urn:schemas-microsoft-com:vml" Requires="v">
-                  <p:oleObj spid="_x0000_s15593" name="Equation" r:id="rId17" imgW="203112" imgH="241195" progId="Equation.DSMT4">
+                  <p:oleObj name="Equation" r:id="rId16" imgW="203112" imgH="241195" progId="Equation.DSMT4">
                     <p:embed/>
                   </p:oleObj>
                 </mc:Choice>
                 <mc:Fallback>
-                  <p:oleObj name="Equation" r:id="rId17" imgW="203112" imgH="241195" progId="Equation.DSMT4">
+                  <p:oleObj name="Equation" r:id="rId16" imgW="203112" imgH="241195" progId="Equation.DSMT4">
                     <p:embed/>
                     <p:pic>
                       <p:nvPicPr>
-                        <p:cNvPr id="0" name="Object 47"/>
+                        <p:cNvPr id="15407" name="Object 47"/>
                         <p:cNvPicPr>
                           <a:picLocks noChangeAspect="1" noChangeArrowheads="1"/>
                         </p:cNvPicPr>
                         <p:nvPr/>
                       </p:nvPicPr>
                       <p:blipFill>
-                        <a:blip r:embed="rId18">
+                        <a:blip r:embed="rId17">
                           <a:extLst>
                             <a:ext uri="{28A0092B-C50C-407E-A947-70E740481C1C}">
                               <a14:useLocalDpi xmlns:a14="http://schemas.microsoft.com/office/drawing/2010/main" val="0"/>
@@ -18809,7 +18989,9 @@
               <a:bodyPr/>
               <a:lstStyle/>
               <a:p>
-                <a:endParaRPr lang="pt-BR"/>
+                <a:endParaRPr lang="pt-BR" dirty="0">
+                  <a:latin typeface="Tahoma" panose="020B0604030504040204" pitchFamily="34" charset="0"/>
+                </a:endParaRPr>
               </a:p>
             </p:txBody>
           </p:sp>
@@ -18829,23 +19011,23 @@
               <a:graphicData uri="http://schemas.openxmlformats.org/presentationml/2006/ole">
                 <mc:AlternateContent xmlns:mc="http://schemas.openxmlformats.org/markup-compatibility/2006">
                   <mc:Choice xmlns:v="urn:schemas-microsoft-com:vml" Requires="v">
-                    <p:oleObj spid="_x0000_s15594" name="Equation" r:id="rId19" imgW="177646" imgH="393359" progId="Equation.DSMT4">
+                    <p:oleObj name="Equation" r:id="rId18" imgW="177646" imgH="393359" progId="Equation.DSMT4">
                       <p:embed/>
                     </p:oleObj>
                   </mc:Choice>
                   <mc:Fallback>
-                    <p:oleObj name="Equation" r:id="rId19" imgW="177646" imgH="393359" progId="Equation.DSMT4">
+                    <p:oleObj name="Equation" r:id="rId18" imgW="177646" imgH="393359" progId="Equation.DSMT4">
                       <p:embed/>
                       <p:pic>
                         <p:nvPicPr>
-                          <p:cNvPr id="0" name="Object 50"/>
+                          <p:cNvPr id="15404" name="Object 50"/>
                           <p:cNvPicPr>
                             <a:picLocks noChangeAspect="1" noChangeArrowheads="1"/>
                           </p:cNvPicPr>
                           <p:nvPr/>
                         </p:nvPicPr>
                         <p:blipFill>
-                          <a:blip r:embed="rId20">
+                          <a:blip r:embed="rId19">
                             <a:extLst>
                               <a:ext uri="{28A0092B-C50C-407E-A947-70E740481C1C}">
                                 <a14:useLocalDpi xmlns:a14="http://schemas.microsoft.com/office/drawing/2010/main" val="0"/>
@@ -18950,7 +19132,9 @@
               <a:bodyPr/>
               <a:lstStyle/>
               <a:p>
-                <a:endParaRPr lang="pt-BR"/>
+                <a:endParaRPr lang="pt-BR" dirty="0">
+                  <a:latin typeface="Tahoma" panose="020B0604030504040204" pitchFamily="34" charset="0"/>
+                </a:endParaRPr>
               </a:p>
             </p:txBody>
           </p:sp>
@@ -18970,23 +19154,23 @@
               <a:graphicData uri="http://schemas.openxmlformats.org/presentationml/2006/ole">
                 <mc:AlternateContent xmlns:mc="http://schemas.openxmlformats.org/markup-compatibility/2006">
                   <mc:Choice xmlns:v="urn:schemas-microsoft-com:vml" Requires="v">
-                    <p:oleObj spid="_x0000_s15595" name="Equation" r:id="rId21" imgW="177646" imgH="393359" progId="Equation.DSMT4">
+                    <p:oleObj name="Equation" r:id="rId20" imgW="177646" imgH="393359" progId="Equation.DSMT4">
                       <p:embed/>
                     </p:oleObj>
                   </mc:Choice>
                   <mc:Fallback>
-                    <p:oleObj name="Equation" r:id="rId21" imgW="177646" imgH="393359" progId="Equation.DSMT4">
+                    <p:oleObj name="Equation" r:id="rId20" imgW="177646" imgH="393359" progId="Equation.DSMT4">
                       <p:embed/>
                       <p:pic>
                         <p:nvPicPr>
-                          <p:cNvPr id="0" name="Object 53"/>
+                          <p:cNvPr id="15402" name="Object 53"/>
                           <p:cNvPicPr>
                             <a:picLocks noChangeAspect="1" noChangeArrowheads="1"/>
                           </p:cNvPicPr>
                           <p:nvPr/>
                         </p:nvPicPr>
                         <p:blipFill>
-                          <a:blip r:embed="rId22">
+                          <a:blip r:embed="rId21">
                             <a:extLst>
                               <a:ext uri="{28A0092B-C50C-407E-A947-70E740481C1C}">
                                 <a14:useLocalDpi xmlns:a14="http://schemas.microsoft.com/office/drawing/2010/main" val="0"/>
@@ -19265,7 +19449,9 @@
             <a:bodyPr/>
             <a:lstStyle/>
             <a:p>
-              <a:endParaRPr lang="pt-BR"/>
+              <a:endParaRPr lang="pt-BR" dirty="0">
+                <a:latin typeface="Tahoma" panose="020B0604030504040204" pitchFamily="34" charset="0"/>
+              </a:endParaRPr>
             </a:p>
           </p:txBody>
         </p:sp>
@@ -19338,7 +19524,9 @@
                 <a:bodyPr/>
                 <a:lstStyle/>
                 <a:p>
-                  <a:endParaRPr lang="pt-BR"/>
+                  <a:endParaRPr lang="pt-BR" dirty="0">
+                    <a:latin typeface="Tahoma" panose="020B0604030504040204" pitchFamily="34" charset="0"/>
+                  </a:endParaRPr>
                 </a:p>
               </p:txBody>
             </p:sp>
@@ -19358,23 +19546,23 @@
                 <a:graphicData uri="http://schemas.openxmlformats.org/presentationml/2006/ole">
                   <mc:AlternateContent xmlns:mc="http://schemas.openxmlformats.org/markup-compatibility/2006">
                     <mc:Choice xmlns:v="urn:schemas-microsoft-com:vml" Requires="v">
-                      <p:oleObj spid="_x0000_s15596" name="Equation" r:id="rId23" imgW="495085" imgH="241195" progId="Equation.DSMT4">
+                      <p:oleObj name="Equation" r:id="rId22" imgW="495085" imgH="241195" progId="Equation.DSMT4">
                         <p:embed/>
                       </p:oleObj>
                     </mc:Choice>
                     <mc:Fallback>
-                      <p:oleObj name="Equation" r:id="rId23" imgW="495085" imgH="241195" progId="Equation.DSMT4">
+                      <p:oleObj name="Equation" r:id="rId22" imgW="495085" imgH="241195" progId="Equation.DSMT4">
                         <p:embed/>
                         <p:pic>
                           <p:nvPicPr>
-                            <p:cNvPr id="0" name="Object 58"/>
+                            <p:cNvPr id="15400" name="Object 58"/>
                             <p:cNvPicPr>
                               <a:picLocks noChangeAspect="1" noChangeArrowheads="1"/>
                             </p:cNvPicPr>
                             <p:nvPr/>
                           </p:nvPicPr>
                           <p:blipFill>
-                            <a:blip r:embed="rId24">
+                            <a:blip r:embed="rId23">
                               <a:extLst>
                                 <a:ext uri="{28A0092B-C50C-407E-A947-70E740481C1C}">
                                   <a14:useLocalDpi xmlns:a14="http://schemas.microsoft.com/office/drawing/2010/main" val="0"/>
@@ -19501,7 +19689,9 @@
               <a:bodyPr/>
               <a:lstStyle/>
               <a:p>
-                <a:endParaRPr lang="pt-BR"/>
+                <a:endParaRPr lang="pt-BR" dirty="0">
+                  <a:latin typeface="Tahoma" panose="020B0604030504040204" pitchFamily="34" charset="0"/>
+                </a:endParaRPr>
               </a:p>
             </p:txBody>
           </p:sp>
@@ -19600,7 +19790,9 @@
               <a:bodyPr/>
               <a:lstStyle/>
               <a:p>
-                <a:endParaRPr lang="pt-BR"/>
+                <a:endParaRPr lang="pt-BR" dirty="0">
+                  <a:latin typeface="Tahoma" panose="020B0604030504040204" pitchFamily="34" charset="0"/>
+                </a:endParaRPr>
               </a:p>
             </p:txBody>
           </p:sp>
@@ -19997,23 +20189,23 @@
             <a:graphicData uri="http://schemas.openxmlformats.org/presentationml/2006/ole">
               <mc:AlternateContent xmlns:mc="http://schemas.openxmlformats.org/markup-compatibility/2006">
                 <mc:Choice xmlns:v="urn:schemas-microsoft-com:vml" Requires="v">
-                  <p:oleObj spid="_x0000_s15597" name="Equation" r:id="rId25" imgW="190500" imgH="228600" progId="Equation.DSMT4">
+                  <p:oleObj name="Equation" r:id="rId24" imgW="190500" imgH="228600" progId="Equation.DSMT4">
                     <p:embed/>
                   </p:oleObj>
                 </mc:Choice>
                 <mc:Fallback>
-                  <p:oleObj name="Equation" r:id="rId25" imgW="190500" imgH="228600" progId="Equation.DSMT4">
+                  <p:oleObj name="Equation" r:id="rId24" imgW="190500" imgH="228600" progId="Equation.DSMT4">
                     <p:embed/>
                     <p:pic>
                       <p:nvPicPr>
-                        <p:cNvPr id="0" name="Object 63"/>
+                        <p:cNvPr id="15390" name="Object 63"/>
                         <p:cNvPicPr>
                           <a:picLocks noChangeAspect="1" noChangeArrowheads="1"/>
                         </p:cNvPicPr>
                         <p:nvPr/>
                       </p:nvPicPr>
                       <p:blipFill>
-                        <a:blip r:embed="rId26">
+                        <a:blip r:embed="rId25">
                           <a:extLst>
                             <a:ext uri="{28A0092B-C50C-407E-A947-70E740481C1C}">
                               <a14:useLocalDpi xmlns:a14="http://schemas.microsoft.com/office/drawing/2010/main" val="0"/>
@@ -20080,23 +20272,23 @@
             <a:graphicData uri="http://schemas.openxmlformats.org/presentationml/2006/ole">
               <mc:AlternateContent xmlns:mc="http://schemas.openxmlformats.org/markup-compatibility/2006">
                 <mc:Choice xmlns:v="urn:schemas-microsoft-com:vml" Requires="v">
-                  <p:oleObj spid="_x0000_s15598" name="Equation" r:id="rId27" imgW="177646" imgH="228402" progId="Equation.DSMT4">
+                  <p:oleObj name="Equation" r:id="rId26" imgW="177646" imgH="228402" progId="Equation.DSMT4">
                     <p:embed/>
                   </p:oleObj>
                 </mc:Choice>
                 <mc:Fallback>
-                  <p:oleObj name="Equation" r:id="rId27" imgW="177646" imgH="228402" progId="Equation.DSMT4">
+                  <p:oleObj name="Equation" r:id="rId26" imgW="177646" imgH="228402" progId="Equation.DSMT4">
                     <p:embed/>
                     <p:pic>
                       <p:nvPicPr>
-                        <p:cNvPr id="0" name="Object 64"/>
+                        <p:cNvPr id="15391" name="Object 64"/>
                         <p:cNvPicPr>
                           <a:picLocks noChangeAspect="1" noChangeArrowheads="1"/>
                         </p:cNvPicPr>
                         <p:nvPr/>
                       </p:nvPicPr>
                       <p:blipFill>
-                        <a:blip r:embed="rId28">
+                        <a:blip r:embed="rId27">
                           <a:extLst>
                             <a:ext uri="{28A0092B-C50C-407E-A947-70E740481C1C}">
                               <a14:useLocalDpi xmlns:a14="http://schemas.microsoft.com/office/drawing/2010/main" val="0"/>
@@ -20163,23 +20355,23 @@
             <a:graphicData uri="http://schemas.openxmlformats.org/presentationml/2006/ole">
               <mc:AlternateContent xmlns:mc="http://schemas.openxmlformats.org/markup-compatibility/2006">
                 <mc:Choice xmlns:v="urn:schemas-microsoft-com:vml" Requires="v">
-                  <p:oleObj spid="_x0000_s15599" name="Equation" r:id="rId29" imgW="342603" imgH="177646" progId="Equation.DSMT4">
+                  <p:oleObj name="Equation" r:id="rId28" imgW="342603" imgH="177646" progId="Equation.DSMT4">
                     <p:embed/>
                   </p:oleObj>
                 </mc:Choice>
                 <mc:Fallback>
-                  <p:oleObj name="Equation" r:id="rId29" imgW="342603" imgH="177646" progId="Equation.DSMT4">
+                  <p:oleObj name="Equation" r:id="rId28" imgW="342603" imgH="177646" progId="Equation.DSMT4">
                     <p:embed/>
                     <p:pic>
                       <p:nvPicPr>
-                        <p:cNvPr id="0" name="Object 65"/>
+                        <p:cNvPr id="15392" name="Object 65"/>
                         <p:cNvPicPr>
                           <a:picLocks noChangeAspect="1" noChangeArrowheads="1"/>
                         </p:cNvPicPr>
                         <p:nvPr/>
                       </p:nvPicPr>
                       <p:blipFill>
-                        <a:blip r:embed="rId30">
+                        <a:blip r:embed="rId29">
                           <a:extLst>
                             <a:ext uri="{28A0092B-C50C-407E-A947-70E740481C1C}">
                               <a14:useLocalDpi xmlns:a14="http://schemas.microsoft.com/office/drawing/2010/main" val="0"/>
@@ -20246,23 +20438,23 @@
             <a:graphicData uri="http://schemas.openxmlformats.org/presentationml/2006/ole">
               <mc:AlternateContent xmlns:mc="http://schemas.openxmlformats.org/markup-compatibility/2006">
                 <mc:Choice xmlns:v="urn:schemas-microsoft-com:vml" Requires="v">
-                  <p:oleObj spid="_x0000_s15600" name="Equation" r:id="rId31" imgW="1422400" imgH="228600" progId="Equation.DSMT4">
+                  <p:oleObj name="Equation" r:id="rId30" imgW="1422400" imgH="228600" progId="Equation.DSMT4">
                     <p:embed/>
                   </p:oleObj>
                 </mc:Choice>
                 <mc:Fallback>
-                  <p:oleObj name="Equation" r:id="rId31" imgW="1422400" imgH="228600" progId="Equation.DSMT4">
+                  <p:oleObj name="Equation" r:id="rId30" imgW="1422400" imgH="228600" progId="Equation.DSMT4">
                     <p:embed/>
                     <p:pic>
                       <p:nvPicPr>
-                        <p:cNvPr id="0" name="Object 66"/>
+                        <p:cNvPr id="15393" name="Object 66"/>
                         <p:cNvPicPr>
                           <a:picLocks noChangeAspect="1" noChangeArrowheads="1"/>
                         </p:cNvPicPr>
                         <p:nvPr/>
                       </p:nvPicPr>
                       <p:blipFill>
-                        <a:blip r:embed="rId32">
+                        <a:blip r:embed="rId31">
                           <a:extLst>
                             <a:ext uri="{28A0092B-C50C-407E-A947-70E740481C1C}">
                               <a14:useLocalDpi xmlns:a14="http://schemas.microsoft.com/office/drawing/2010/main" val="0"/>
@@ -20362,23 +20554,23 @@
               <a:graphicData uri="http://schemas.openxmlformats.org/presentationml/2006/ole">
                 <mc:AlternateContent xmlns:mc="http://schemas.openxmlformats.org/markup-compatibility/2006">
                   <mc:Choice xmlns:v="urn:schemas-microsoft-com:vml" Requires="v">
-                    <p:oleObj spid="_x0000_s15601" name="Equation" r:id="rId33" imgW="457200" imgH="241300" progId="Equation.DSMT4">
+                    <p:oleObj name="Equation" r:id="rId32" imgW="457200" imgH="241300" progId="Equation.DSMT4">
                       <p:embed/>
                     </p:oleObj>
                   </mc:Choice>
                   <mc:Fallback>
-                    <p:oleObj name="Equation" r:id="rId33" imgW="457200" imgH="241300" progId="Equation.DSMT4">
+                    <p:oleObj name="Equation" r:id="rId32" imgW="457200" imgH="241300" progId="Equation.DSMT4">
                       <p:embed/>
                       <p:pic>
                         <p:nvPicPr>
-                          <p:cNvPr id="0" name="Object 74"/>
+                          <p:cNvPr id="15384" name="Object 74"/>
                           <p:cNvPicPr>
                             <a:picLocks noChangeAspect="1" noChangeArrowheads="1"/>
                           </p:cNvPicPr>
                           <p:nvPr/>
                         </p:nvPicPr>
                         <p:blipFill>
-                          <a:blip r:embed="rId34">
+                          <a:blip r:embed="rId33">
                             <a:extLst>
                               <a:ext uri="{28A0092B-C50C-407E-A947-70E740481C1C}">
                                 <a14:useLocalDpi xmlns:a14="http://schemas.microsoft.com/office/drawing/2010/main" val="0"/>
@@ -20445,23 +20637,23 @@
               <a:graphicData uri="http://schemas.openxmlformats.org/presentationml/2006/ole">
                 <mc:AlternateContent xmlns:mc="http://schemas.openxmlformats.org/markup-compatibility/2006">
                   <mc:Choice xmlns:v="urn:schemas-microsoft-com:vml" Requires="v">
-                    <p:oleObj spid="_x0000_s15602" name="Equation" r:id="rId35" imgW="457200" imgH="241300" progId="Equation.DSMT4">
+                    <p:oleObj name="Equation" r:id="rId34" imgW="457200" imgH="241300" progId="Equation.DSMT4">
                       <p:embed/>
                     </p:oleObj>
                   </mc:Choice>
                   <mc:Fallback>
-                    <p:oleObj name="Equation" r:id="rId35" imgW="457200" imgH="241300" progId="Equation.DSMT4">
+                    <p:oleObj name="Equation" r:id="rId34" imgW="457200" imgH="241300" progId="Equation.DSMT4">
                       <p:embed/>
                       <p:pic>
                         <p:nvPicPr>
-                          <p:cNvPr id="0" name="Object 73"/>
+                          <p:cNvPr id="15385" name="Object 73"/>
                           <p:cNvPicPr>
                             <a:picLocks noChangeAspect="1" noChangeArrowheads="1"/>
                           </p:cNvPicPr>
                           <p:nvPr/>
                         </p:nvPicPr>
                         <p:blipFill>
-                          <a:blip r:embed="rId36">
+                          <a:blip r:embed="rId35">
                             <a:extLst>
                               <a:ext uri="{28A0092B-C50C-407E-A947-70E740481C1C}">
                                 <a14:useLocalDpi xmlns:a14="http://schemas.microsoft.com/office/drawing/2010/main" val="0"/>
@@ -20524,7 +20716,7 @@
           <p:spPr bwMode="auto">
             <a:xfrm>
               <a:off x="768" y="419"/>
-              <a:ext cx="3431" cy="365"/>
+              <a:ext cx="3273" cy="368"/>
             </a:xfrm>
             <a:prstGeom prst="rect">
               <a:avLst/>
@@ -20548,7 +20740,7 @@
                 <a:defRPr/>
               </a:pPr>
               <a:r>
-                <a:rPr lang="pt-BR" sz="3200">
+                <a:rPr lang="pt-BR" sz="3200" dirty="0">
                   <a:solidFill>
                     <a:srgbClr val="FF3300"/>
                   </a:solidFill>
@@ -20557,6 +20749,7 @@
                       <a:srgbClr val="C0C0C0"/>
                     </a:outerShdw>
                   </a:effectLst>
+                  <a:latin typeface="Tahoma" panose="020B0604030504040204" pitchFamily="34" charset="0"/>
                   <a:cs typeface="+mn-cs"/>
                 </a:rPr>
                 <a:t>Intervalo de Confiança para</a:t>
@@ -20581,23 +20774,23 @@
           <a:graphicData uri="http://schemas.openxmlformats.org/presentationml/2006/ole">
             <mc:AlternateContent xmlns:mc="http://schemas.openxmlformats.org/markup-compatibility/2006">
               <mc:Choice xmlns:v="urn:schemas-microsoft-com:vml" Requires="v">
-                <p:oleObj spid="_x0000_s15603" name="Equation" r:id="rId37" imgW="1676400" imgH="457200" progId="Equation.DSMT4">
+                <p:oleObj name="Equation" r:id="rId36" imgW="1676400" imgH="457200" progId="Equation.DSMT4">
                   <p:embed/>
                 </p:oleObj>
               </mc:Choice>
               <mc:Fallback>
-                <p:oleObj name="Equation" r:id="rId37" imgW="1676400" imgH="457200" progId="Equation.DSMT4">
+                <p:oleObj name="Equation" r:id="rId36" imgW="1676400" imgH="457200" progId="Equation.DSMT4">
                   <p:embed/>
                   <p:pic>
                     <p:nvPicPr>
-                      <p:cNvPr id="0" name="Object 80"/>
+                      <p:cNvPr id="158800" name="Object 80"/>
                       <p:cNvPicPr>
                         <a:picLocks noChangeAspect="1" noChangeArrowheads="1"/>
                       </p:cNvPicPr>
                       <p:nvPr/>
                     </p:nvPicPr>
                     <p:blipFill>
-                      <a:blip r:embed="rId38">
+                      <a:blip r:embed="rId37">
                         <a:extLst>
                           <a:ext uri="{28A0092B-C50C-407E-A947-70E740481C1C}">
                             <a14:useLocalDpi xmlns:a14="http://schemas.microsoft.com/office/drawing/2010/main" val="0"/>
@@ -20659,9 +20852,9 @@
         <p:grpSpPr bwMode="auto">
           <a:xfrm>
             <a:off x="1462088" y="6178550"/>
-            <a:ext cx="1565275" cy="366713"/>
+            <a:ext cx="1565275" cy="369888"/>
             <a:chOff x="921" y="3892"/>
-            <a:chExt cx="986" cy="231"/>
+            <a:chExt cx="986" cy="233"/>
           </a:xfrm>
         </p:grpSpPr>
         <p:sp>
@@ -20675,7 +20868,7 @@
           <p:spPr bwMode="auto">
             <a:xfrm>
               <a:off x="921" y="3892"/>
-              <a:ext cx="619" cy="231"/>
+              <a:ext cx="587" cy="233"/>
             </a:xfrm>
             <a:prstGeom prst="rect">
               <a:avLst/>
@@ -20839,14 +21032,15 @@
                 <a:buNone/>
               </a:pPr>
               <a:r>
-                <a:rPr lang="pt-BR" altLang="pt-BR" sz="1800">
+                <a:rPr lang="pt-BR" altLang="pt-BR" sz="1800" dirty="0">
                   <a:solidFill>
                     <a:srgbClr val="FF3300"/>
                   </a:solidFill>
+                  <a:latin typeface="Tahoma" panose="020B0604030504040204" pitchFamily="34" charset="0"/>
                 </a:rPr>
                 <a:t>IC para</a:t>
               </a:r>
-              <a:endParaRPr lang="pt-BR" altLang="pt-BR" sz="1800" baseline="-25000">
+              <a:endParaRPr lang="pt-BR" altLang="pt-BR" sz="1800" baseline="-25000" dirty="0">
                 <a:solidFill>
                   <a:srgbClr val="FF3300"/>
                 </a:solidFill>
@@ -20871,23 +21065,23 @@
             <a:graphicData uri="http://schemas.openxmlformats.org/presentationml/2006/ole">
               <mc:AlternateContent xmlns:mc="http://schemas.openxmlformats.org/markup-compatibility/2006">
                 <mc:Choice xmlns:v="urn:schemas-microsoft-com:vml" Requires="v">
-                  <p:oleObj spid="_x0000_s15604" name="Equation" r:id="rId39" imgW="457200" imgH="241300" progId="Equation.DSMT4">
+                  <p:oleObj name="Equation" r:id="rId38" imgW="457200" imgH="241300" progId="Equation.DSMT4">
                     <p:embed/>
                   </p:oleObj>
                 </mc:Choice>
                 <mc:Fallback>
-                  <p:oleObj name="Equation" r:id="rId39" imgW="457200" imgH="241300" progId="Equation.DSMT4">
+                  <p:oleObj name="Equation" r:id="rId38" imgW="457200" imgH="241300" progId="Equation.DSMT4">
                     <p:embed/>
                     <p:pic>
                       <p:nvPicPr>
-                        <p:cNvPr id="0" name="Object 81"/>
+                        <p:cNvPr id="15381" name="Object 81"/>
                         <p:cNvPicPr>
                           <a:picLocks noChangeAspect="1" noChangeArrowheads="1"/>
                         </p:cNvPicPr>
                         <p:nvPr/>
                       </p:nvPicPr>
                       <p:blipFill>
-                        <a:blip r:embed="rId40">
+                        <a:blip r:embed="rId39">
                           <a:extLst>
                             <a:ext uri="{28A0092B-C50C-407E-A947-70E740481C1C}">
                               <a14:useLocalDpi xmlns:a14="http://schemas.microsoft.com/office/drawing/2010/main" val="0"/>
@@ -21114,30 +21308,32 @@
               <a:buNone/>
             </a:pPr>
             <a:r>
-              <a:rPr lang="pt-BR" altLang="pt-BR" sz="1600"/>
+              <a:rPr lang="pt-BR" altLang="pt-BR" sz="1600" dirty="0">
+                <a:latin typeface="Tahoma" panose="020B0604030504040204" pitchFamily="34" charset="0"/>
+              </a:rPr>
               <a:t>OBS: por exemplo, se </a:t>
             </a:r>
             <a:r>
-              <a:rPr lang="pt-BR" altLang="pt-BR" sz="1600">
+              <a:rPr lang="pt-BR" altLang="pt-BR" sz="1600" dirty="0">
                 <a:latin typeface="Times New Roman" charset="0"/>
               </a:rPr>
               <a:t>1 - </a:t>
             </a:r>
             <a:r>
-              <a:rPr lang="pt-BR" altLang="pt-BR" sz="1600" i="1">
+              <a:rPr lang="pt-BR" altLang="pt-BR" sz="1600" i="1" dirty="0">
                 <a:latin typeface="Times New Roman" charset="0"/>
                 <a:sym typeface="Symbol" pitchFamily="18" charset="2"/>
               </a:rPr>
               <a:t></a:t>
             </a:r>
             <a:r>
-              <a:rPr lang="pt-BR" altLang="pt-BR" sz="1600">
+              <a:rPr lang="pt-BR" altLang="pt-BR" sz="1600" dirty="0">
                 <a:latin typeface="Times New Roman" charset="0"/>
                 <a:sym typeface="Symbol" pitchFamily="18" charset="2"/>
               </a:rPr>
               <a:t> = 95%</a:t>
             </a:r>
-            <a:endParaRPr lang="pt-BR" altLang="pt-BR" sz="1600">
+            <a:endParaRPr lang="pt-BR" altLang="pt-BR" sz="1600" dirty="0">
               <a:latin typeface="Times New Roman" charset="0"/>
             </a:endParaRPr>
           </a:p>
@@ -21159,23 +21355,23 @@
           <a:graphicData uri="http://schemas.openxmlformats.org/presentationml/2006/ole">
             <mc:AlternateContent xmlns:mc="http://schemas.openxmlformats.org/markup-compatibility/2006">
               <mc:Choice xmlns:v="urn:schemas-microsoft-com:vml" Requires="v">
-                <p:oleObj spid="_x0000_s15605" name="Equation" r:id="rId41" imgW="1091726" imgH="241195" progId="Equation.DSMT4">
+                <p:oleObj name="Equation" r:id="rId40" imgW="1091726" imgH="241195" progId="Equation.DSMT4">
                   <p:embed/>
                 </p:oleObj>
               </mc:Choice>
               <mc:Fallback>
-                <p:oleObj name="Equation" r:id="rId41" imgW="1091726" imgH="241195" progId="Equation.DSMT4">
+                <p:oleObj name="Equation" r:id="rId40" imgW="1091726" imgH="241195" progId="Equation.DSMT4">
                   <p:embed/>
                   <p:pic>
                     <p:nvPicPr>
-                      <p:cNvPr id="0" name="Object 86"/>
+                      <p:cNvPr id="158806" name="Object 86"/>
                       <p:cNvPicPr>
                         <a:picLocks noChangeAspect="1" noChangeArrowheads="1"/>
                       </p:cNvPicPr>
                       <p:nvPr/>
                     </p:nvPicPr>
                     <p:blipFill>
-                      <a:blip r:embed="rId42">
+                      <a:blip r:embed="rId41">
                         <a:extLst>
                           <a:ext uri="{28A0092B-C50C-407E-A947-70E740481C1C}">
                             <a14:useLocalDpi xmlns:a14="http://schemas.microsoft.com/office/drawing/2010/main" val="0"/>
@@ -21242,23 +21438,23 @@
           <a:graphicData uri="http://schemas.openxmlformats.org/presentationml/2006/ole">
             <mc:AlternateContent xmlns:mc="http://schemas.openxmlformats.org/markup-compatibility/2006">
               <mc:Choice xmlns:v="urn:schemas-microsoft-com:vml" Requires="v">
-                <p:oleObj spid="_x0000_s15606" name="Equation" r:id="rId43" imgW="1079032" imgH="241195" progId="Equation.DSMT4">
+                <p:oleObj name="Equation" r:id="rId42" imgW="1079032" imgH="241195" progId="Equation.DSMT4">
                   <p:embed/>
                 </p:oleObj>
               </mc:Choice>
               <mc:Fallback>
-                <p:oleObj name="Equation" r:id="rId43" imgW="1079032" imgH="241195" progId="Equation.DSMT4">
+                <p:oleObj name="Equation" r:id="rId42" imgW="1079032" imgH="241195" progId="Equation.DSMT4">
                   <p:embed/>
                   <p:pic>
                     <p:nvPicPr>
-                      <p:cNvPr id="0" name="Object 87"/>
+                      <p:cNvPr id="158807" name="Object 87"/>
                       <p:cNvPicPr>
                         <a:picLocks noChangeAspect="1" noChangeArrowheads="1"/>
                       </p:cNvPicPr>
                       <p:nvPr/>
                     </p:nvPicPr>
                     <p:blipFill>
-                      <a:blip r:embed="rId44">
+                      <a:blip r:embed="rId43">
                         <a:extLst>
                           <a:ext uri="{28A0092B-C50C-407E-A947-70E740481C1C}">
                             <a14:useLocalDpi xmlns:a14="http://schemas.microsoft.com/office/drawing/2010/main" val="0"/>
@@ -21325,23 +21521,23 @@
           <a:graphicData uri="http://schemas.openxmlformats.org/presentationml/2006/ole">
             <mc:AlternateContent xmlns:mc="http://schemas.openxmlformats.org/markup-compatibility/2006">
               <mc:Choice xmlns:v="urn:schemas-microsoft-com:vml" Requires="v">
-                <p:oleObj spid="_x0000_s15607" name="Equation" r:id="rId45" imgW="1384300" imgH="431800" progId="Equation.DSMT4">
+                <p:oleObj name="Equation" r:id="rId44" imgW="1384300" imgH="431800" progId="Equation.DSMT4">
                   <p:embed/>
                 </p:oleObj>
               </mc:Choice>
               <mc:Fallback>
-                <p:oleObj name="Equation" r:id="rId45" imgW="1384300" imgH="431800" progId="Equation.DSMT4">
+                <p:oleObj name="Equation" r:id="rId44" imgW="1384300" imgH="431800" progId="Equation.DSMT4">
                   <p:embed/>
                   <p:pic>
                     <p:nvPicPr>
-                      <p:cNvPr id="0" name="Object 88"/>
+                      <p:cNvPr id="158808" name="Object 88"/>
                       <p:cNvPicPr>
                         <a:picLocks noChangeAspect="1" noChangeArrowheads="1"/>
                       </p:cNvPicPr>
                       <p:nvPr/>
                     </p:nvPicPr>
                     <p:blipFill>
-                      <a:blip r:embed="rId46">
+                      <a:blip r:embed="rId45">
                         <a:extLst>
                           <a:ext uri="{28A0092B-C50C-407E-A947-70E740481C1C}">
                             <a14:useLocalDpi xmlns:a14="http://schemas.microsoft.com/office/drawing/2010/main" val="0"/>
@@ -22239,17 +22435,21 @@
               <a:buNone/>
             </a:pPr>
             <a:r>
-              <a:rPr lang="pt-BR" altLang="pt-BR" sz="1600"/>
+              <a:rPr lang="pt-BR" altLang="pt-BR" sz="1600" dirty="0">
+                <a:latin typeface="Tahoma" panose="020B0604030504040204" pitchFamily="34" charset="0"/>
+              </a:rPr>
               <a:t>Exemplo: duas v.a. quaisquer têm distribuições desconhecidas com médias e variâncias também desconhecidas. Retira-se uma amostra de cada população e calcula-se a média e a variância para cada amostra. Construa um IC de </a:t>
             </a:r>
             <a:r>
-              <a:rPr lang="pt-BR" altLang="pt-BR" sz="1600">
+              <a:rPr lang="pt-BR" altLang="pt-BR" sz="1600" dirty="0">
                 <a:latin typeface="Times New Roman" charset="0"/>
               </a:rPr>
               <a:t>95%</a:t>
             </a:r>
             <a:r>
-              <a:rPr lang="pt-BR" altLang="pt-BR" sz="1600"/>
+              <a:rPr lang="pt-BR" altLang="pt-BR" sz="1600" dirty="0">
+                <a:latin typeface="Tahoma" panose="020B0604030504040204" pitchFamily="34" charset="0"/>
+              </a:rPr>
               <a:t> para a razão entre variâncias e para a diferença entre médias supondo que</a:t>
             </a:r>
           </a:p>
@@ -22271,23 +22471,23 @@
           <a:graphicData uri="http://schemas.openxmlformats.org/presentationml/2006/ole">
             <mc:AlternateContent xmlns:mc="http://schemas.openxmlformats.org/markup-compatibility/2006">
               <mc:Choice xmlns:v="urn:schemas-microsoft-com:vml" Requires="v">
-                <p:oleObj spid="_x0000_s16548" name="Equation" r:id="rId3" imgW="1866900" imgH="482600" progId="Equation.DSMT4">
+                <p:oleObj name="Equation" r:id="rId2" imgW="1866900" imgH="482600" progId="Equation.DSMT4">
                   <p:embed/>
                 </p:oleObj>
               </mc:Choice>
               <mc:Fallback>
-                <p:oleObj name="Equation" r:id="rId3" imgW="1866900" imgH="482600" progId="Equation.DSMT4">
+                <p:oleObj name="Equation" r:id="rId2" imgW="1866900" imgH="482600" progId="Equation.DSMT4">
                   <p:embed/>
                   <p:pic>
                     <p:nvPicPr>
-                      <p:cNvPr id="0" name="Object 5"/>
+                      <p:cNvPr id="16387" name="Object 5"/>
                       <p:cNvPicPr>
                         <a:picLocks noChangeAspect="1" noChangeArrowheads="1"/>
                       </p:cNvPicPr>
                       <p:nvPr/>
                     </p:nvPicPr>
                     <p:blipFill>
-                      <a:blip r:embed="rId4">
+                      <a:blip r:embed="rId3">
                         <a:extLst>
                           <a:ext uri="{28A0092B-C50C-407E-A947-70E740481C1C}">
                             <a14:useLocalDpi xmlns:a14="http://schemas.microsoft.com/office/drawing/2010/main" val="0"/>
@@ -22389,7 +22589,7 @@
                 <a:defRPr/>
               </a:pPr>
               <a:r>
-                <a:rPr lang="pt-BR" sz="3200">
+                <a:rPr lang="pt-BR" sz="3200" dirty="0">
                   <a:solidFill>
                     <a:srgbClr val="FF3300"/>
                   </a:solidFill>
@@ -22398,12 +22598,13 @@
                       <a:srgbClr val="C0C0C0"/>
                     </a:outerShdw>
                   </a:effectLst>
+                  <a:latin typeface="Tahoma" panose="020B0604030504040204" pitchFamily="34" charset="0"/>
                   <a:cs typeface="+mn-cs"/>
                 </a:rPr>
                 <a:t>IC para </a:t>
               </a:r>
               <a:r>
-                <a:rPr lang="pt-BR" sz="3200" i="1">
+                <a:rPr lang="pt-BR" sz="3200" i="1" dirty="0">
                   <a:solidFill>
                     <a:srgbClr val="FF3300"/>
                   </a:solidFill>
@@ -22412,13 +22613,14 @@
                       <a:srgbClr val="C0C0C0"/>
                     </a:outerShdw>
                   </a:effectLst>
+                  <a:latin typeface="Tahoma" panose="020B0604030504040204" pitchFamily="34" charset="0"/>
                   <a:cs typeface="+mn-cs"/>
                   <a:sym typeface="Symbol" pitchFamily="18" charset="2"/>
                 </a:rPr>
                 <a:t></a:t>
               </a:r>
               <a:r>
-                <a:rPr lang="pt-BR" sz="3200" baseline="-25000">
+                <a:rPr lang="pt-BR" sz="3200" baseline="-25000" dirty="0">
                   <a:solidFill>
                     <a:srgbClr val="FF3300"/>
                   </a:solidFill>
@@ -22434,7 +22636,7 @@
                 <a:t>1</a:t>
               </a:r>
               <a:r>
-                <a:rPr lang="pt-BR" sz="3200">
+                <a:rPr lang="pt-BR" sz="3200" dirty="0">
                   <a:solidFill>
                     <a:srgbClr val="FF3300"/>
                   </a:solidFill>
@@ -22450,7 +22652,7 @@
                 <a:t> -</a:t>
               </a:r>
               <a:r>
-                <a:rPr lang="pt-BR" sz="3200" i="1">
+                <a:rPr lang="pt-BR" sz="3200" i="1" dirty="0">
                   <a:solidFill>
                     <a:srgbClr val="FF3300"/>
                   </a:solidFill>
@@ -22459,13 +22661,14 @@
                       <a:srgbClr val="C0C0C0"/>
                     </a:outerShdw>
                   </a:effectLst>
+                  <a:latin typeface="Tahoma" panose="020B0604030504040204" pitchFamily="34" charset="0"/>
                   <a:cs typeface="+mn-cs"/>
                   <a:sym typeface="Symbol" pitchFamily="18" charset="2"/>
                 </a:rPr>
                 <a:t> </a:t>
               </a:r>
               <a:r>
-                <a:rPr lang="pt-BR" sz="3200" baseline="-25000">
+                <a:rPr lang="pt-BR" sz="3200" baseline="-25000" dirty="0">
                   <a:solidFill>
                     <a:srgbClr val="FF3300"/>
                   </a:solidFill>
@@ -22481,7 +22684,7 @@
                 <a:t>2</a:t>
               </a:r>
               <a:r>
-                <a:rPr lang="pt-BR" sz="3200">
+                <a:rPr lang="pt-BR" sz="3200" dirty="0">
                   <a:solidFill>
                     <a:srgbClr val="FF3300"/>
                   </a:solidFill>
@@ -22490,6 +22693,7 @@
                       <a:srgbClr val="C0C0C0"/>
                     </a:outerShdw>
                   </a:effectLst>
+                  <a:latin typeface="Tahoma" panose="020B0604030504040204" pitchFamily="34" charset="0"/>
                   <a:cs typeface="+mn-cs"/>
                   <a:sym typeface="Symbol" pitchFamily="18" charset="2"/>
                 </a:rPr>
@@ -22530,23 +22734,23 @@
               <a:graphicData uri="http://schemas.openxmlformats.org/presentationml/2006/ole">
                 <mc:AlternateContent xmlns:mc="http://schemas.openxmlformats.org/markup-compatibility/2006">
                   <mc:Choice xmlns:v="urn:schemas-microsoft-com:vml" Requires="v">
-                    <p:oleObj spid="_x0000_s16549" name="Equation" r:id="rId5" imgW="457200" imgH="241300" progId="Equation.DSMT4">
+                    <p:oleObj name="Equation" r:id="rId4" imgW="457200" imgH="241300" progId="Equation.DSMT4">
                       <p:embed/>
                     </p:oleObj>
                   </mc:Choice>
                   <mc:Fallback>
-                    <p:oleObj name="Equation" r:id="rId5" imgW="457200" imgH="241300" progId="Equation.DSMT4">
+                    <p:oleObj name="Equation" r:id="rId4" imgW="457200" imgH="241300" progId="Equation.DSMT4">
                       <p:embed/>
                       <p:pic>
                         <p:nvPicPr>
-                          <p:cNvPr id="0" name="Object 36"/>
+                          <p:cNvPr id="16426" name="Object 36"/>
                           <p:cNvPicPr>
                             <a:picLocks noChangeAspect="1" noChangeArrowheads="1"/>
                           </p:cNvPicPr>
                           <p:nvPr/>
                         </p:nvPicPr>
                         <p:blipFill>
-                          <a:blip r:embed="rId6">
+                          <a:blip r:embed="rId5">
                             <a:extLst>
                               <a:ext uri="{28A0092B-C50C-407E-A947-70E740481C1C}">
                                 <a14:useLocalDpi xmlns:a14="http://schemas.microsoft.com/office/drawing/2010/main" val="0"/>
@@ -22613,23 +22817,23 @@
               <a:graphicData uri="http://schemas.openxmlformats.org/presentationml/2006/ole">
                 <mc:AlternateContent xmlns:mc="http://schemas.openxmlformats.org/markup-compatibility/2006">
                   <mc:Choice xmlns:v="urn:schemas-microsoft-com:vml" Requires="v">
-                    <p:oleObj spid="_x0000_s16550" name="Equation" r:id="rId7" imgW="457200" imgH="241300" progId="Equation.DSMT4">
+                    <p:oleObj name="Equation" r:id="rId6" imgW="457200" imgH="241300" progId="Equation.DSMT4">
                       <p:embed/>
                     </p:oleObj>
                   </mc:Choice>
                   <mc:Fallback>
-                    <p:oleObj name="Equation" r:id="rId7" imgW="457200" imgH="241300" progId="Equation.DSMT4">
+                    <p:oleObj name="Equation" r:id="rId6" imgW="457200" imgH="241300" progId="Equation.DSMT4">
                       <p:embed/>
                       <p:pic>
                         <p:nvPicPr>
-                          <p:cNvPr id="0" name="Object 37"/>
+                          <p:cNvPr id="16427" name="Object 37"/>
                           <p:cNvPicPr>
                             <a:picLocks noChangeAspect="1" noChangeArrowheads="1"/>
                           </p:cNvPicPr>
                           <p:nvPr/>
                         </p:nvPicPr>
                         <p:blipFill>
-                          <a:blip r:embed="rId8">
+                          <a:blip r:embed="rId7">
                             <a:extLst>
                               <a:ext uri="{28A0092B-C50C-407E-A947-70E740481C1C}">
                                 <a14:useLocalDpi xmlns:a14="http://schemas.microsoft.com/office/drawing/2010/main" val="0"/>
@@ -22709,7 +22913,7 @@
           <p:spPr bwMode="auto">
             <a:xfrm>
               <a:off x="480" y="2223"/>
-              <a:ext cx="563" cy="212"/>
+              <a:ext cx="534" cy="213"/>
             </a:xfrm>
             <a:prstGeom prst="rect">
               <a:avLst/>
@@ -22873,10 +23077,12 @@
                 <a:buNone/>
               </a:pPr>
               <a:r>
-                <a:rPr lang="pt-BR" altLang="pt-BR" sz="1600"/>
+                <a:rPr lang="pt-BR" altLang="pt-BR" sz="1600" dirty="0">
+                  <a:latin typeface="Tahoma" panose="020B0604030504040204" pitchFamily="34" charset="0"/>
+                </a:rPr>
                 <a:t>IC para</a:t>
               </a:r>
-              <a:endParaRPr lang="pt-BR" altLang="pt-BR" sz="1600" baseline="-25000">
+              <a:endParaRPr lang="pt-BR" altLang="pt-BR" sz="1600" baseline="-25000" dirty="0">
                 <a:latin typeface="Times New Roman" charset="0"/>
               </a:endParaRPr>
             </a:p>
@@ -22898,23 +23104,23 @@
             <a:graphicData uri="http://schemas.openxmlformats.org/presentationml/2006/ole">
               <mc:AlternateContent xmlns:mc="http://schemas.openxmlformats.org/markup-compatibility/2006">
                 <mc:Choice xmlns:v="urn:schemas-microsoft-com:vml" Requires="v">
-                  <p:oleObj spid="_x0000_s16551" name="Equation" r:id="rId9" imgW="457200" imgH="241300" progId="Equation.DSMT4">
+                  <p:oleObj name="Equation" r:id="rId8" imgW="457200" imgH="241300" progId="Equation.DSMT4">
                     <p:embed/>
                   </p:oleObj>
                 </mc:Choice>
                 <mc:Fallback>
-                  <p:oleObj name="Equation" r:id="rId9" imgW="457200" imgH="241300" progId="Equation.DSMT4">
+                  <p:oleObj name="Equation" r:id="rId8" imgW="457200" imgH="241300" progId="Equation.DSMT4">
                     <p:embed/>
                     <p:pic>
                       <p:nvPicPr>
-                        <p:cNvPr id="0" name="Object 44"/>
+                        <p:cNvPr id="16423" name="Object 44"/>
                         <p:cNvPicPr>
                           <a:picLocks noChangeAspect="1" noChangeArrowheads="1"/>
                         </p:cNvPicPr>
                         <p:nvPr/>
                       </p:nvPicPr>
                       <p:blipFill>
-                        <a:blip r:embed="rId10">
+                        <a:blip r:embed="rId9">
                           <a:extLst>
                             <a:ext uri="{28A0092B-C50C-407E-A947-70E740481C1C}">
                               <a14:useLocalDpi xmlns:a14="http://schemas.microsoft.com/office/drawing/2010/main" val="0"/>
@@ -22982,23 +23188,23 @@
           <a:graphicData uri="http://schemas.openxmlformats.org/presentationml/2006/ole">
             <mc:AlternateContent xmlns:mc="http://schemas.openxmlformats.org/markup-compatibility/2006">
               <mc:Choice xmlns:v="urn:schemas-microsoft-com:vml" Requires="v">
-                <p:oleObj spid="_x0000_s16552" name="Equation" r:id="rId11" imgW="1879600" imgH="457200" progId="Equation.DSMT4">
+                <p:oleObj name="Equation" r:id="rId10" imgW="1879600" imgH="457200" progId="Equation.DSMT4">
                   <p:embed/>
                 </p:oleObj>
               </mc:Choice>
               <mc:Fallback>
-                <p:oleObj name="Equation" r:id="rId11" imgW="1879600" imgH="457200" progId="Equation.DSMT4">
+                <p:oleObj name="Equation" r:id="rId10" imgW="1879600" imgH="457200" progId="Equation.DSMT4">
                   <p:embed/>
                   <p:pic>
                     <p:nvPicPr>
-                      <p:cNvPr id="0" name="Object 46"/>
+                      <p:cNvPr id="161838" name="Object 46"/>
                       <p:cNvPicPr>
                         <a:picLocks noChangeAspect="1" noChangeArrowheads="1"/>
                       </p:cNvPicPr>
                       <p:nvPr/>
                     </p:nvPicPr>
                     <p:blipFill>
-                      <a:blip r:embed="rId12">
+                      <a:blip r:embed="rId11">
                         <a:extLst>
                           <a:ext uri="{28A0092B-C50C-407E-A947-70E740481C1C}">
                             <a14:useLocalDpi xmlns:a14="http://schemas.microsoft.com/office/drawing/2010/main" val="0"/>
@@ -23102,7 +23308,9 @@
             <a:bodyPr/>
             <a:lstStyle/>
             <a:p>
-              <a:endParaRPr lang="pt-BR"/>
+              <a:endParaRPr lang="pt-BR" dirty="0">
+                <a:latin typeface="Tahoma" panose="020B0604030504040204" pitchFamily="34" charset="0"/>
+              </a:endParaRPr>
             </a:p>
           </p:txBody>
         </p:sp>
@@ -23122,23 +23330,23 @@
             <a:graphicData uri="http://schemas.openxmlformats.org/presentationml/2006/ole">
               <mc:AlternateContent xmlns:mc="http://schemas.openxmlformats.org/markup-compatibility/2006">
                 <mc:Choice xmlns:v="urn:schemas-microsoft-com:vml" Requires="v">
-                  <p:oleObj spid="_x0000_s16553" name="Equation" r:id="rId13" imgW="393529" imgH="190417" progId="Equation.DSMT4">
+                  <p:oleObj name="Equation" r:id="rId12" imgW="393529" imgH="190417" progId="Equation.DSMT4">
                     <p:embed/>
                   </p:oleObj>
                 </mc:Choice>
                 <mc:Fallback>
-                  <p:oleObj name="Equation" r:id="rId13" imgW="393529" imgH="190417" progId="Equation.DSMT4">
+                  <p:oleObj name="Equation" r:id="rId12" imgW="393529" imgH="190417" progId="Equation.DSMT4">
                     <p:embed/>
                     <p:pic>
                       <p:nvPicPr>
-                        <p:cNvPr id="0" name="Object 50"/>
+                        <p:cNvPr id="16408" name="Object 50"/>
                         <p:cNvPicPr>
                           <a:picLocks noChangeAspect="1" noChangeArrowheads="1"/>
                         </p:cNvPicPr>
                         <p:nvPr/>
                       </p:nvPicPr>
                       <p:blipFill>
-                        <a:blip r:embed="rId14">
+                        <a:blip r:embed="rId13">
                           <a:extLst>
                             <a:ext uri="{28A0092B-C50C-407E-A947-70E740481C1C}">
                               <a14:useLocalDpi xmlns:a14="http://schemas.microsoft.com/office/drawing/2010/main" val="0"/>
@@ -23226,7 +23434,9 @@
             <a:bodyPr/>
             <a:lstStyle/>
             <a:p>
-              <a:endParaRPr lang="pt-BR"/>
+              <a:endParaRPr lang="pt-BR" dirty="0">
+                <a:latin typeface="Tahoma" panose="020B0604030504040204" pitchFamily="34" charset="0"/>
+              </a:endParaRPr>
             </a:p>
           </p:txBody>
         </p:sp>
@@ -23246,23 +23456,23 @@
             <a:graphicData uri="http://schemas.openxmlformats.org/presentationml/2006/ole">
               <mc:AlternateContent xmlns:mc="http://schemas.openxmlformats.org/markup-compatibility/2006">
                 <mc:Choice xmlns:v="urn:schemas-microsoft-com:vml" Requires="v">
-                  <p:oleObj spid="_x0000_s16554" name="Equation" r:id="rId15" imgW="393529" imgH="190417" progId="Equation.DSMT4">
+                  <p:oleObj name="Equation" r:id="rId14" imgW="393529" imgH="190417" progId="Equation.DSMT4">
                     <p:embed/>
                   </p:oleObj>
                 </mc:Choice>
                 <mc:Fallback>
-                  <p:oleObj name="Equation" r:id="rId15" imgW="393529" imgH="190417" progId="Equation.DSMT4">
+                  <p:oleObj name="Equation" r:id="rId14" imgW="393529" imgH="190417" progId="Equation.DSMT4">
                     <p:embed/>
                     <p:pic>
                       <p:nvPicPr>
-                        <p:cNvPr id="0" name="Object 53"/>
+                        <p:cNvPr id="16410" name="Object 53"/>
                         <p:cNvPicPr>
                           <a:picLocks noChangeAspect="1" noChangeArrowheads="1"/>
                         </p:cNvPicPr>
                         <p:nvPr/>
                       </p:nvPicPr>
                       <p:blipFill>
-                        <a:blip r:embed="rId14">
+                        <a:blip r:embed="rId13">
                           <a:extLst>
                             <a:ext uri="{28A0092B-C50C-407E-A947-70E740481C1C}">
                               <a14:useLocalDpi xmlns:a14="http://schemas.microsoft.com/office/drawing/2010/main" val="0"/>
@@ -23540,7 +23750,9 @@
             <a:bodyPr/>
             <a:lstStyle/>
             <a:p>
-              <a:endParaRPr lang="pt-BR"/>
+              <a:endParaRPr lang="pt-BR" dirty="0">
+                <a:latin typeface="Tahoma" panose="020B0604030504040204" pitchFamily="34" charset="0"/>
+              </a:endParaRPr>
             </a:p>
           </p:txBody>
         </p:sp>
@@ -23597,7 +23809,9 @@
               <a:bodyPr/>
               <a:lstStyle/>
               <a:p>
-                <a:endParaRPr lang="pt-BR"/>
+                <a:endParaRPr lang="pt-BR" dirty="0">
+                  <a:latin typeface="Tahoma" panose="020B0604030504040204" pitchFamily="34" charset="0"/>
+                </a:endParaRPr>
               </a:p>
             </p:txBody>
           </p:sp>
@@ -23617,23 +23831,23 @@
               <a:graphicData uri="http://schemas.openxmlformats.org/presentationml/2006/ole">
                 <mc:AlternateContent xmlns:mc="http://schemas.openxmlformats.org/markup-compatibility/2006">
                   <mc:Choice xmlns:v="urn:schemas-microsoft-com:vml" Requires="v">
-                    <p:oleObj spid="_x0000_s16555" name="Equation" r:id="rId16" imgW="342751" imgH="241195" progId="Equation.DSMT4">
+                    <p:oleObj name="Equation" r:id="rId15" imgW="342751" imgH="241195" progId="Equation.DSMT4">
                       <p:embed/>
                     </p:oleObj>
                   </mc:Choice>
                   <mc:Fallback>
-                    <p:oleObj name="Equation" r:id="rId16" imgW="342751" imgH="241195" progId="Equation.DSMT4">
+                    <p:oleObj name="Equation" r:id="rId15" imgW="342751" imgH="241195" progId="Equation.DSMT4">
                       <p:embed/>
                       <p:pic>
                         <p:nvPicPr>
-                          <p:cNvPr id="0" name="Object 58"/>
+                          <p:cNvPr id="16421" name="Object 58"/>
                           <p:cNvPicPr>
                             <a:picLocks noChangeAspect="1" noChangeArrowheads="1"/>
                           </p:cNvPicPr>
                           <p:nvPr/>
                         </p:nvPicPr>
                         <p:blipFill>
-                          <a:blip r:embed="rId17">
+                          <a:blip r:embed="rId16">
                             <a:extLst>
                               <a:ext uri="{28A0092B-C50C-407E-A947-70E740481C1C}">
                                 <a14:useLocalDpi xmlns:a14="http://schemas.microsoft.com/office/drawing/2010/main" val="0"/>
@@ -23760,7 +23974,9 @@
             <a:bodyPr/>
             <a:lstStyle/>
             <a:p>
-              <a:endParaRPr lang="pt-BR"/>
+              <a:endParaRPr lang="pt-BR" dirty="0">
+                <a:latin typeface="Tahoma" panose="020B0604030504040204" pitchFamily="34" charset="0"/>
+              </a:endParaRPr>
             </a:p>
           </p:txBody>
         </p:sp>
@@ -23859,7 +24075,9 @@
             <a:bodyPr/>
             <a:lstStyle/>
             <a:p>
-              <a:endParaRPr lang="pt-BR"/>
+              <a:endParaRPr lang="pt-BR" dirty="0">
+                <a:latin typeface="Tahoma" panose="020B0604030504040204" pitchFamily="34" charset="0"/>
+              </a:endParaRPr>
             </a:p>
           </p:txBody>
         </p:sp>
@@ -24255,23 +24473,23 @@
             <a:graphicData uri="http://schemas.openxmlformats.org/presentationml/2006/ole">
               <mc:AlternateContent xmlns:mc="http://schemas.openxmlformats.org/markup-compatibility/2006">
                 <mc:Choice xmlns:v="urn:schemas-microsoft-com:vml" Requires="v">
-                  <p:oleObj spid="_x0000_s16556" name="Equation" r:id="rId18" imgW="190500" imgH="228600" progId="Equation.DSMT4">
+                  <p:oleObj name="Equation" r:id="rId17" imgW="190500" imgH="228600" progId="Equation.DSMT4">
                     <p:embed/>
                   </p:oleObj>
                 </mc:Choice>
                 <mc:Fallback>
-                  <p:oleObj name="Equation" r:id="rId18" imgW="190500" imgH="228600" progId="Equation.DSMT4">
+                  <p:oleObj name="Equation" r:id="rId17" imgW="190500" imgH="228600" progId="Equation.DSMT4">
                     <p:embed/>
                     <p:pic>
                       <p:nvPicPr>
-                        <p:cNvPr id="0" name="Object 63"/>
+                        <p:cNvPr id="16417" name="Object 63"/>
                         <p:cNvPicPr>
                           <a:picLocks noChangeAspect="1" noChangeArrowheads="1"/>
                         </p:cNvPicPr>
                         <p:nvPr/>
                       </p:nvPicPr>
                       <p:blipFill>
-                        <a:blip r:embed="rId19">
+                        <a:blip r:embed="rId18">
                           <a:extLst>
                             <a:ext uri="{28A0092B-C50C-407E-A947-70E740481C1C}">
                               <a14:useLocalDpi xmlns:a14="http://schemas.microsoft.com/office/drawing/2010/main" val="0"/>
@@ -24338,23 +24556,23 @@
             <a:graphicData uri="http://schemas.openxmlformats.org/presentationml/2006/ole">
               <mc:AlternateContent xmlns:mc="http://schemas.openxmlformats.org/markup-compatibility/2006">
                 <mc:Choice xmlns:v="urn:schemas-microsoft-com:vml" Requires="v">
-                  <p:oleObj spid="_x0000_s16557" name="Equation" r:id="rId20" imgW="177646" imgH="228402" progId="Equation.DSMT4">
+                  <p:oleObj name="Equation" r:id="rId19" imgW="177646" imgH="228402" progId="Equation.DSMT4">
                     <p:embed/>
                   </p:oleObj>
                 </mc:Choice>
                 <mc:Fallback>
-                  <p:oleObj name="Equation" r:id="rId20" imgW="177646" imgH="228402" progId="Equation.DSMT4">
+                  <p:oleObj name="Equation" r:id="rId19" imgW="177646" imgH="228402" progId="Equation.DSMT4">
                     <p:embed/>
                     <p:pic>
                       <p:nvPicPr>
-                        <p:cNvPr id="0" name="Object 64"/>
+                        <p:cNvPr id="16418" name="Object 64"/>
                         <p:cNvPicPr>
                           <a:picLocks noChangeAspect="1" noChangeArrowheads="1"/>
                         </p:cNvPicPr>
                         <p:nvPr/>
                       </p:nvPicPr>
                       <p:blipFill>
-                        <a:blip r:embed="rId21">
+                        <a:blip r:embed="rId20">
                           <a:extLst>
                             <a:ext uri="{28A0092B-C50C-407E-A947-70E740481C1C}">
                               <a14:useLocalDpi xmlns:a14="http://schemas.microsoft.com/office/drawing/2010/main" val="0"/>
@@ -24421,23 +24639,23 @@
             <a:graphicData uri="http://schemas.openxmlformats.org/presentationml/2006/ole">
               <mc:AlternateContent xmlns:mc="http://schemas.openxmlformats.org/markup-compatibility/2006">
                 <mc:Choice xmlns:v="urn:schemas-microsoft-com:vml" Requires="v">
-                  <p:oleObj spid="_x0000_s16558" name="Equation" r:id="rId22" imgW="317225" imgH="190335" progId="Equation.DSMT4">
+                  <p:oleObj name="Equation" r:id="rId21" imgW="317225" imgH="190335" progId="Equation.DSMT4">
                     <p:embed/>
                   </p:oleObj>
                 </mc:Choice>
                 <mc:Fallback>
-                  <p:oleObj name="Equation" r:id="rId22" imgW="317225" imgH="190335" progId="Equation.DSMT4">
+                  <p:oleObj name="Equation" r:id="rId21" imgW="317225" imgH="190335" progId="Equation.DSMT4">
                     <p:embed/>
                     <p:pic>
                       <p:nvPicPr>
-                        <p:cNvPr id="0" name="Object 65"/>
+                        <p:cNvPr id="16419" name="Object 65"/>
                         <p:cNvPicPr>
                           <a:picLocks noChangeAspect="1" noChangeArrowheads="1"/>
                         </p:cNvPicPr>
                         <p:nvPr/>
                       </p:nvPicPr>
                       <p:blipFill>
-                        <a:blip r:embed="rId23">
+                        <a:blip r:embed="rId22">
                           <a:extLst>
                             <a:ext uri="{28A0092B-C50C-407E-A947-70E740481C1C}">
                               <a14:useLocalDpi xmlns:a14="http://schemas.microsoft.com/office/drawing/2010/main" val="0"/>
@@ -24558,7 +24776,9 @@
               <a:bodyPr/>
               <a:lstStyle/>
               <a:p>
-                <a:endParaRPr lang="pt-BR"/>
+                <a:endParaRPr lang="pt-BR" dirty="0">
+                  <a:latin typeface="Tahoma" panose="020B0604030504040204" pitchFamily="34" charset="0"/>
+                </a:endParaRPr>
               </a:p>
             </p:txBody>
           </p:sp>
@@ -24737,10 +24957,11 @@
                   <a:buNone/>
                 </a:pPr>
                 <a:r>
-                  <a:rPr lang="pt-BR" altLang="pt-BR" sz="1600">
+                  <a:rPr lang="pt-BR" altLang="pt-BR" sz="1600" dirty="0">
                     <a:solidFill>
                       <a:srgbClr val="FF3300"/>
                     </a:solidFill>
+                    <a:latin typeface="Tahoma" panose="020B0604030504040204" pitchFamily="34" charset="0"/>
                   </a:rPr>
                   <a:t>?</a:t>
                 </a:r>
@@ -24801,7 +25022,9 @@
               <a:bodyPr/>
               <a:lstStyle/>
               <a:p>
-                <a:endParaRPr lang="pt-BR"/>
+                <a:endParaRPr lang="pt-BR" dirty="0">
+                  <a:latin typeface="Tahoma" panose="020B0604030504040204" pitchFamily="34" charset="0"/>
+                </a:endParaRPr>
               </a:p>
             </p:txBody>
           </p:sp>
@@ -24980,10 +25203,11 @@
                   <a:buNone/>
                 </a:pPr>
                 <a:r>
-                  <a:rPr lang="pt-BR" altLang="pt-BR" sz="1600">
+                  <a:rPr lang="pt-BR" altLang="pt-BR" sz="1600" dirty="0">
                     <a:solidFill>
                       <a:srgbClr val="FF3300"/>
                     </a:solidFill>
+                    <a:latin typeface="Tahoma" panose="020B0604030504040204" pitchFamily="34" charset="0"/>
                   </a:rPr>
                   <a:t>?</a:t>
                 </a:r>
@@ -25008,23 +25232,23 @@
           <a:graphicData uri="http://schemas.openxmlformats.org/presentationml/2006/ole">
             <mc:AlternateContent xmlns:mc="http://schemas.openxmlformats.org/markup-compatibility/2006">
               <mc:Choice xmlns:v="urn:schemas-microsoft-com:vml" Requires="v">
-                <p:oleObj spid="_x0000_s16559" name="Equation" r:id="rId24" imgW="342751" imgH="418918" progId="Equation.DSMT4">
+                <p:oleObj name="Equation" r:id="rId23" imgW="342751" imgH="418918" progId="Equation.DSMT4">
                   <p:embed/>
                 </p:oleObj>
               </mc:Choice>
               <mc:Fallback>
-                <p:oleObj name="Equation" r:id="rId24" imgW="342751" imgH="418918" progId="Equation.DSMT4">
+                <p:oleObj name="Equation" r:id="rId23" imgW="342751" imgH="418918" progId="Equation.DSMT4">
                   <p:embed/>
                   <p:pic>
                     <p:nvPicPr>
-                      <p:cNvPr id="0" name="Object 81"/>
+                      <p:cNvPr id="161873" name="Object 81"/>
                       <p:cNvPicPr>
                         <a:picLocks noChangeAspect="1" noChangeArrowheads="1"/>
                       </p:cNvPicPr>
                       <p:nvPr/>
                     </p:nvPicPr>
                     <p:blipFill>
-                      <a:blip r:embed="rId25">
+                      <a:blip r:embed="rId24">
                         <a:extLst>
                           <a:ext uri="{28A0092B-C50C-407E-A947-70E740481C1C}">
                             <a14:useLocalDpi xmlns:a14="http://schemas.microsoft.com/office/drawing/2010/main" val="0"/>
@@ -25086,23 +25310,23 @@
           <a:graphicData uri="http://schemas.openxmlformats.org/presentationml/2006/ole">
             <mc:AlternateContent xmlns:mc="http://schemas.openxmlformats.org/markup-compatibility/2006">
               <mc:Choice xmlns:v="urn:schemas-microsoft-com:vml" Requires="v">
-                <p:oleObj spid="_x0000_s16560" name="Equation" r:id="rId26" imgW="304668" imgH="190417" progId="Equation.DSMT4">
+                <p:oleObj name="Equation" r:id="rId25" imgW="304668" imgH="190417" progId="Equation.DSMT4">
                   <p:embed/>
                 </p:oleObj>
               </mc:Choice>
               <mc:Fallback>
-                <p:oleObj name="Equation" r:id="rId26" imgW="304668" imgH="190417" progId="Equation.DSMT4">
+                <p:oleObj name="Equation" r:id="rId25" imgW="304668" imgH="190417" progId="Equation.DSMT4">
                   <p:embed/>
                   <p:pic>
                     <p:nvPicPr>
-                      <p:cNvPr id="0" name="Object 82"/>
+                      <p:cNvPr id="161874" name="Object 82"/>
                       <p:cNvPicPr>
                         <a:picLocks noChangeAspect="1" noChangeArrowheads="1"/>
                       </p:cNvPicPr>
                       <p:nvPr/>
                     </p:nvPicPr>
                     <p:blipFill>
-                      <a:blip r:embed="rId27">
+                      <a:blip r:embed="rId26">
                         <a:extLst>
                           <a:ext uri="{28A0092B-C50C-407E-A947-70E740481C1C}">
                             <a14:useLocalDpi xmlns:a14="http://schemas.microsoft.com/office/drawing/2010/main" val="0"/>
@@ -25164,23 +25388,23 @@
           <a:graphicData uri="http://schemas.openxmlformats.org/presentationml/2006/ole">
             <mc:AlternateContent xmlns:mc="http://schemas.openxmlformats.org/markup-compatibility/2006">
               <mc:Choice xmlns:v="urn:schemas-microsoft-com:vml" Requires="v">
-                <p:oleObj spid="_x0000_s16561" name="Equation" r:id="rId28" imgW="2387600" imgH="457200" progId="Equation.DSMT4">
+                <p:oleObj name="Equation" r:id="rId27" imgW="2387600" imgH="457200" progId="Equation.DSMT4">
                   <p:embed/>
                 </p:oleObj>
               </mc:Choice>
               <mc:Fallback>
-                <p:oleObj name="Equation" r:id="rId28" imgW="2387600" imgH="457200" progId="Equation.DSMT4">
+                <p:oleObj name="Equation" r:id="rId27" imgW="2387600" imgH="457200" progId="Equation.DSMT4">
                   <p:embed/>
                   <p:pic>
                     <p:nvPicPr>
-                      <p:cNvPr id="0" name="Object 83"/>
+                      <p:cNvPr id="161875" name="Object 83"/>
                       <p:cNvPicPr>
                         <a:picLocks noChangeAspect="1" noChangeArrowheads="1"/>
                       </p:cNvPicPr>
                       <p:nvPr/>
                     </p:nvPicPr>
                     <p:blipFill>
-                      <a:blip r:embed="rId29">
+                      <a:blip r:embed="rId28">
                         <a:extLst>
                           <a:ext uri="{28A0092B-C50C-407E-A947-70E740481C1C}">
                             <a14:useLocalDpi xmlns:a14="http://schemas.microsoft.com/office/drawing/2010/main" val="0"/>
@@ -25247,23 +25471,23 @@
           <a:graphicData uri="http://schemas.openxmlformats.org/presentationml/2006/ole">
             <mc:AlternateContent xmlns:mc="http://schemas.openxmlformats.org/markup-compatibility/2006">
               <mc:Choice xmlns:v="urn:schemas-microsoft-com:vml" Requires="v">
-                <p:oleObj spid="_x0000_s16562" name="Equation" r:id="rId30" imgW="1892300" imgH="457200" progId="Equation.DSMT4">
+                <p:oleObj name="Equation" r:id="rId29" imgW="1892300" imgH="457200" progId="Equation.DSMT4">
                   <p:embed/>
                 </p:oleObj>
               </mc:Choice>
               <mc:Fallback>
-                <p:oleObj name="Equation" r:id="rId30" imgW="1892300" imgH="457200" progId="Equation.DSMT4">
+                <p:oleObj name="Equation" r:id="rId29" imgW="1892300" imgH="457200" progId="Equation.DSMT4">
                   <p:embed/>
                   <p:pic>
                     <p:nvPicPr>
-                      <p:cNvPr id="0" name="Object 84"/>
+                      <p:cNvPr id="161876" name="Object 84"/>
                       <p:cNvPicPr>
                         <a:picLocks noChangeAspect="1" noChangeArrowheads="1"/>
                       </p:cNvPicPr>
                       <p:nvPr/>
                     </p:nvPicPr>
                     <p:blipFill>
-                      <a:blip r:embed="rId31">
+                      <a:blip r:embed="rId30">
                         <a:extLst>
                           <a:ext uri="{28A0092B-C50C-407E-A947-70E740481C1C}">
                             <a14:useLocalDpi xmlns:a14="http://schemas.microsoft.com/office/drawing/2010/main" val="0"/>
@@ -25481,7 +25705,9 @@
               <a:buFontTx/>
               <a:buNone/>
             </a:pPr>
-            <a:endParaRPr lang="pt-BR" altLang="pt-BR" sz="1600"/>
+            <a:endParaRPr lang="pt-BR" altLang="pt-BR" sz="1600" dirty="0">
+              <a:latin typeface="Tahoma" panose="020B0604030504040204" pitchFamily="34" charset="0"/>
+            </a:endParaRPr>
           </a:p>
         </p:txBody>
       </p:sp>
@@ -25660,7 +25886,9 @@
               <a:buNone/>
             </a:pPr>
             <a:r>
-              <a:rPr lang="pt-BR" altLang="pt-BR" sz="1600"/>
+              <a:rPr lang="pt-BR" altLang="pt-BR" sz="1600" dirty="0">
+                <a:latin typeface="Tahoma" panose="020B0604030504040204" pitchFamily="34" charset="0"/>
+              </a:rPr>
               <a:t>As variâncias podem ser iguais?</a:t>
             </a:r>
           </a:p>
@@ -25673,7 +25901,9 @@
               <a:buNone/>
             </a:pPr>
             <a:r>
-              <a:rPr lang="pt-BR" altLang="pt-BR" sz="1600"/>
+              <a:rPr lang="pt-BR" altLang="pt-BR" sz="1600" dirty="0">
+                <a:latin typeface="Tahoma" panose="020B0604030504040204" pitchFamily="34" charset="0"/>
+              </a:rPr>
               <a:t>R: não há razão para discordar disso.</a:t>
             </a:r>
           </a:p>
@@ -25854,49 +26084,62 @@
               <a:buNone/>
             </a:pPr>
             <a:r>
-              <a:rPr lang="pt-BR" altLang="pt-BR" sz="1600">
+              <a:rPr lang="pt-BR" altLang="pt-BR" sz="1600" dirty="0">
+                <a:latin typeface="Tahoma" panose="020B0604030504040204" pitchFamily="34" charset="0"/>
                 <a:sym typeface="Symbol" pitchFamily="18" charset="2"/>
               </a:rPr>
               <a:t> pode-se fazer o IC para </a:t>
             </a:r>
             <a:r>
-              <a:rPr lang="pt-BR" altLang="pt-BR" sz="1600" i="1">
+              <a:rPr lang="pt-BR" altLang="pt-BR" sz="1600" i="1" dirty="0">
                 <a:latin typeface="Symbol" pitchFamily="18" charset="2"/>
               </a:rPr>
               <a:t>m</a:t>
             </a:r>
             <a:r>
-              <a:rPr lang="pt-BR" altLang="pt-BR" sz="1600" baseline="-25000">
+              <a:rPr lang="pt-BR" altLang="pt-BR" sz="1600" baseline="-25000" dirty="0">
                 <a:latin typeface="Times New Roman" charset="0"/>
               </a:rPr>
               <a:t>1</a:t>
             </a:r>
             <a:r>
-              <a:rPr lang="pt-BR" altLang="pt-BR" sz="1600" i="1">
+              <a:rPr lang="pt-BR" altLang="pt-BR" sz="1600" i="1" dirty="0">
                 <a:latin typeface="Times New Roman" charset="0"/>
               </a:rPr>
               <a:t> - </a:t>
             </a:r>
             <a:r>
-              <a:rPr lang="pt-BR" altLang="pt-BR" sz="1600" i="1">
+              <a:rPr lang="pt-BR" altLang="pt-BR" sz="1600" i="1" dirty="0">
                 <a:latin typeface="Symbol" pitchFamily="18" charset="2"/>
               </a:rPr>
               <a:t>m</a:t>
             </a:r>
             <a:r>
-              <a:rPr lang="pt-BR" altLang="pt-BR" sz="1600" baseline="-25000">
+              <a:rPr lang="pt-BR" altLang="pt-BR" sz="1600" baseline="-25000" dirty="0">
                 <a:latin typeface="Times New Roman" charset="0"/>
               </a:rPr>
               <a:t>2</a:t>
             </a:r>
             <a:r>
-              <a:rPr lang="pt-BR" altLang="pt-BR" sz="1600">
+              <a:rPr lang="pt-BR" altLang="pt-BR" sz="1600" dirty="0">
                 <a:latin typeface="Times New Roman" charset="0"/>
               </a:rPr>
-              <a:t> (homocedástico)</a:t>
+              <a:t> (</a:t>
             </a:r>
             <a:r>
-              <a:rPr lang="pt-BR" altLang="pt-BR" sz="1800">
+              <a:rPr lang="pt-BR" altLang="pt-BR" sz="1600" dirty="0" err="1">
+                <a:latin typeface="Times New Roman" charset="0"/>
+              </a:rPr>
+              <a:t>homocedástico</a:t>
+            </a:r>
+            <a:r>
+              <a:rPr lang="pt-BR" altLang="pt-BR" sz="1600" dirty="0">
+                <a:latin typeface="Times New Roman" charset="0"/>
+              </a:rPr>
+              <a:t>)</a:t>
+            </a:r>
+            <a:r>
+              <a:rPr lang="pt-BR" altLang="pt-BR" sz="1800" dirty="0">
                 <a:solidFill>
                   <a:srgbClr val="FF3300"/>
                 </a:solidFill>
@@ -26711,17 +26954,21 @@
               <a:buNone/>
             </a:pPr>
             <a:r>
-              <a:rPr lang="pt-BR" altLang="pt-BR" sz="1600"/>
+              <a:rPr lang="pt-BR" altLang="pt-BR" sz="1600" dirty="0">
+                <a:latin typeface="Tahoma" panose="020B0604030504040204" pitchFamily="34" charset="0"/>
+              </a:rPr>
               <a:t>Exemplo: duas v.a. quaisquer têm distribuições desconhecidas com médias e variâncias também desconhecidas. Retira-se uma amostra de cada população e calcula-se a média e a variância para cada amostra. Construa um IC de </a:t>
             </a:r>
             <a:r>
-              <a:rPr lang="pt-BR" altLang="pt-BR" sz="1600">
+              <a:rPr lang="pt-BR" altLang="pt-BR" sz="1600" dirty="0">
                 <a:latin typeface="Times New Roman" charset="0"/>
               </a:rPr>
               <a:t>95%</a:t>
             </a:r>
             <a:r>
-              <a:rPr lang="pt-BR" altLang="pt-BR" sz="1600"/>
+              <a:rPr lang="pt-BR" altLang="pt-BR" sz="1600" dirty="0">
+                <a:latin typeface="Tahoma" panose="020B0604030504040204" pitchFamily="34" charset="0"/>
+              </a:rPr>
               <a:t> para a razão entre variâncias e para a diferença entre médias supondo que</a:t>
             </a:r>
           </a:p>
@@ -26743,23 +26990,23 @@
           <a:graphicData uri="http://schemas.openxmlformats.org/presentationml/2006/ole">
             <mc:AlternateContent xmlns:mc="http://schemas.openxmlformats.org/markup-compatibility/2006">
               <mc:Choice xmlns:v="urn:schemas-microsoft-com:vml" Requires="v">
-                <p:oleObj spid="_x0000_s17521" name="Equation" r:id="rId3" imgW="1866900" imgH="482600" progId="Equation.DSMT4">
+                <p:oleObj name="Equation" r:id="rId2" imgW="1866900" imgH="482600" progId="Equation.DSMT4">
                   <p:embed/>
                 </p:oleObj>
               </mc:Choice>
               <mc:Fallback>
-                <p:oleObj name="Equation" r:id="rId3" imgW="1866900" imgH="482600" progId="Equation.DSMT4">
+                <p:oleObj name="Equation" r:id="rId2" imgW="1866900" imgH="482600" progId="Equation.DSMT4">
                   <p:embed/>
                   <p:pic>
                     <p:nvPicPr>
-                      <p:cNvPr id="0" name="Object 3"/>
+                      <p:cNvPr id="17411" name="Object 3"/>
                       <p:cNvPicPr>
                         <a:picLocks noChangeAspect="1" noChangeArrowheads="1"/>
                       </p:cNvPicPr>
                       <p:nvPr/>
                     </p:nvPicPr>
                     <p:blipFill>
-                      <a:blip r:embed="rId4">
+                      <a:blip r:embed="rId3">
                         <a:extLst>
                           <a:ext uri="{28A0092B-C50C-407E-A947-70E740481C1C}">
                             <a14:useLocalDpi xmlns:a14="http://schemas.microsoft.com/office/drawing/2010/main" val="0"/>
@@ -26861,7 +27108,7 @@
                 <a:defRPr/>
               </a:pPr>
               <a:r>
-                <a:rPr lang="pt-BR" sz="3200">
+                <a:rPr lang="pt-BR" sz="3200" dirty="0">
                   <a:solidFill>
                     <a:srgbClr val="FF3300"/>
                   </a:solidFill>
@@ -26870,12 +27117,13 @@
                       <a:srgbClr val="C0C0C0"/>
                     </a:outerShdw>
                   </a:effectLst>
+                  <a:latin typeface="Tahoma" panose="020B0604030504040204" pitchFamily="34" charset="0"/>
                   <a:cs typeface="+mn-cs"/>
                 </a:rPr>
                 <a:t>IC para </a:t>
               </a:r>
               <a:r>
-                <a:rPr lang="pt-BR" sz="3200" i="1">
+                <a:rPr lang="pt-BR" sz="3200" i="1" dirty="0">
                   <a:solidFill>
                     <a:srgbClr val="FF3300"/>
                   </a:solidFill>
@@ -26884,13 +27132,14 @@
                       <a:srgbClr val="C0C0C0"/>
                     </a:outerShdw>
                   </a:effectLst>
+                  <a:latin typeface="Tahoma" panose="020B0604030504040204" pitchFamily="34" charset="0"/>
                   <a:cs typeface="+mn-cs"/>
                   <a:sym typeface="Symbol" pitchFamily="18" charset="2"/>
                 </a:rPr>
                 <a:t></a:t>
               </a:r>
               <a:r>
-                <a:rPr lang="pt-BR" sz="3200" baseline="-25000">
+                <a:rPr lang="pt-BR" sz="3200" baseline="-25000" dirty="0">
                   <a:solidFill>
                     <a:srgbClr val="FF3300"/>
                   </a:solidFill>
@@ -26906,7 +27155,7 @@
                 <a:t>1</a:t>
               </a:r>
               <a:r>
-                <a:rPr lang="pt-BR" sz="3200">
+                <a:rPr lang="pt-BR" sz="3200" dirty="0">
                   <a:solidFill>
                     <a:srgbClr val="FF3300"/>
                   </a:solidFill>
@@ -26922,7 +27171,7 @@
                 <a:t> -</a:t>
               </a:r>
               <a:r>
-                <a:rPr lang="pt-BR" sz="3200" i="1">
+                <a:rPr lang="pt-BR" sz="3200" i="1" dirty="0">
                   <a:solidFill>
                     <a:srgbClr val="FF3300"/>
                   </a:solidFill>
@@ -26931,13 +27180,14 @@
                       <a:srgbClr val="C0C0C0"/>
                     </a:outerShdw>
                   </a:effectLst>
+                  <a:latin typeface="Tahoma" panose="020B0604030504040204" pitchFamily="34" charset="0"/>
                   <a:cs typeface="+mn-cs"/>
                   <a:sym typeface="Symbol" pitchFamily="18" charset="2"/>
                 </a:rPr>
                 <a:t> </a:t>
               </a:r>
               <a:r>
-                <a:rPr lang="pt-BR" sz="3200" baseline="-25000">
+                <a:rPr lang="pt-BR" sz="3200" baseline="-25000" dirty="0">
                   <a:solidFill>
                     <a:srgbClr val="FF3300"/>
                   </a:solidFill>
@@ -26953,7 +27203,7 @@
                 <a:t>2</a:t>
               </a:r>
               <a:r>
-                <a:rPr lang="pt-BR" sz="3200">
+                <a:rPr lang="pt-BR" sz="3200" dirty="0">
                   <a:solidFill>
                     <a:srgbClr val="FF3300"/>
                   </a:solidFill>
@@ -26962,6 +27212,7 @@
                       <a:srgbClr val="C0C0C0"/>
                     </a:outerShdw>
                   </a:effectLst>
+                  <a:latin typeface="Tahoma" panose="020B0604030504040204" pitchFamily="34" charset="0"/>
                   <a:cs typeface="+mn-cs"/>
                   <a:sym typeface="Symbol" pitchFamily="18" charset="2"/>
                 </a:rPr>
@@ -27002,23 +27253,23 @@
               <a:graphicData uri="http://schemas.openxmlformats.org/presentationml/2006/ole">
                 <mc:AlternateContent xmlns:mc="http://schemas.openxmlformats.org/markup-compatibility/2006">
                   <mc:Choice xmlns:v="urn:schemas-microsoft-com:vml" Requires="v">
-                    <p:oleObj spid="_x0000_s17522" name="Equation" r:id="rId5" imgW="457200" imgH="241300" progId="Equation.DSMT4">
+                    <p:oleObj name="Equation" r:id="rId4" imgW="457200" imgH="241300" progId="Equation.DSMT4">
                       <p:embed/>
                     </p:oleObj>
                   </mc:Choice>
                   <mc:Fallback>
-                    <p:oleObj name="Equation" r:id="rId5" imgW="457200" imgH="241300" progId="Equation.DSMT4">
+                    <p:oleObj name="Equation" r:id="rId4" imgW="457200" imgH="241300" progId="Equation.DSMT4">
                       <p:embed/>
                       <p:pic>
                         <p:nvPicPr>
-                          <p:cNvPr id="0" name="Object 7"/>
+                          <p:cNvPr id="17447" name="Object 7"/>
                           <p:cNvPicPr>
                             <a:picLocks noChangeAspect="1" noChangeArrowheads="1"/>
                           </p:cNvPicPr>
                           <p:nvPr/>
                         </p:nvPicPr>
                         <p:blipFill>
-                          <a:blip r:embed="rId6">
+                          <a:blip r:embed="rId5">
                             <a:extLst>
                               <a:ext uri="{28A0092B-C50C-407E-A947-70E740481C1C}">
                                 <a14:useLocalDpi xmlns:a14="http://schemas.microsoft.com/office/drawing/2010/main" val="0"/>
@@ -27085,23 +27336,23 @@
               <a:graphicData uri="http://schemas.openxmlformats.org/presentationml/2006/ole">
                 <mc:AlternateContent xmlns:mc="http://schemas.openxmlformats.org/markup-compatibility/2006">
                   <mc:Choice xmlns:v="urn:schemas-microsoft-com:vml" Requires="v">
-                    <p:oleObj spid="_x0000_s17523" name="Equation" r:id="rId7" imgW="457200" imgH="241300" progId="Equation.DSMT4">
+                    <p:oleObj name="Equation" r:id="rId6" imgW="457200" imgH="241300" progId="Equation.DSMT4">
                       <p:embed/>
                     </p:oleObj>
                   </mc:Choice>
                   <mc:Fallback>
-                    <p:oleObj name="Equation" r:id="rId7" imgW="457200" imgH="241300" progId="Equation.DSMT4">
+                    <p:oleObj name="Equation" r:id="rId6" imgW="457200" imgH="241300" progId="Equation.DSMT4">
                       <p:embed/>
                       <p:pic>
                         <p:nvPicPr>
-                          <p:cNvPr id="0" name="Object 8"/>
+                          <p:cNvPr id="17448" name="Object 8"/>
                           <p:cNvPicPr>
                             <a:picLocks noChangeAspect="1" noChangeArrowheads="1"/>
                           </p:cNvPicPr>
                           <p:nvPr/>
                         </p:nvPicPr>
                         <p:blipFill>
-                          <a:blip r:embed="rId8">
+                          <a:blip r:embed="rId7">
                             <a:extLst>
                               <a:ext uri="{28A0092B-C50C-407E-A947-70E740481C1C}">
                                 <a14:useLocalDpi xmlns:a14="http://schemas.microsoft.com/office/drawing/2010/main" val="0"/>
@@ -27329,35 +27580,37 @@
               <a:buNone/>
             </a:pPr>
             <a:r>
-              <a:rPr lang="pt-BR" altLang="pt-BR" sz="1600"/>
+              <a:rPr lang="pt-BR" altLang="pt-BR" sz="1600" dirty="0">
+                <a:latin typeface="Tahoma" panose="020B0604030504040204" pitchFamily="34" charset="0"/>
+              </a:rPr>
               <a:t>IC para </a:t>
             </a:r>
             <a:r>
-              <a:rPr lang="pt-BR" altLang="pt-BR" sz="1600" i="1">
+              <a:rPr lang="pt-BR" altLang="pt-BR" sz="1600" i="1" dirty="0">
                 <a:latin typeface="Symbol" pitchFamily="18" charset="2"/>
               </a:rPr>
               <a:t>m</a:t>
             </a:r>
             <a:r>
-              <a:rPr lang="pt-BR" altLang="pt-BR" sz="1600" baseline="-25000">
+              <a:rPr lang="pt-BR" altLang="pt-BR" sz="1600" baseline="-25000" dirty="0">
                 <a:latin typeface="Times New Roman" charset="0"/>
               </a:rPr>
               <a:t>1</a:t>
             </a:r>
             <a:r>
-              <a:rPr lang="pt-BR" altLang="pt-BR" sz="1600" i="1">
+              <a:rPr lang="pt-BR" altLang="pt-BR" sz="1600" i="1" dirty="0">
                 <a:latin typeface="Times New Roman" charset="0"/>
               </a:rPr>
               <a:t> - </a:t>
             </a:r>
             <a:r>
-              <a:rPr lang="pt-BR" altLang="pt-BR" sz="1600" i="1">
+              <a:rPr lang="pt-BR" altLang="pt-BR" sz="1600" i="1" dirty="0">
                 <a:latin typeface="Symbol" pitchFamily="18" charset="2"/>
               </a:rPr>
               <a:t>m</a:t>
             </a:r>
             <a:r>
-              <a:rPr lang="pt-BR" altLang="pt-BR" sz="1600" baseline="-25000">
+              <a:rPr lang="pt-BR" altLang="pt-BR" sz="1600" baseline="-25000" dirty="0">
                 <a:latin typeface="Times New Roman" charset="0"/>
               </a:rPr>
               <a:t>2</a:t>
@@ -27381,23 +27634,23 @@
           <a:graphicData uri="http://schemas.openxmlformats.org/presentationml/2006/ole">
             <mc:AlternateContent xmlns:mc="http://schemas.openxmlformats.org/markup-compatibility/2006">
               <mc:Choice xmlns:v="urn:schemas-microsoft-com:vml" Requires="v">
-                <p:oleObj spid="_x0000_s17524" name="Equation" r:id="rId9" imgW="2997200" imgH="241300" progId="Equation.DSMT4">
+                <p:oleObj name="Equation" r:id="rId8" imgW="2997200" imgH="241300" progId="Equation.DSMT4">
                   <p:embed/>
                 </p:oleObj>
               </mc:Choice>
               <mc:Fallback>
-                <p:oleObj name="Equation" r:id="rId9" imgW="2997200" imgH="241300" progId="Equation.DSMT4">
+                <p:oleObj name="Equation" r:id="rId8" imgW="2997200" imgH="241300" progId="Equation.DSMT4">
                   <p:embed/>
                   <p:pic>
                     <p:nvPicPr>
-                      <p:cNvPr id="0" name="Object 43"/>
+                      <p:cNvPr id="162859" name="Object 43"/>
                       <p:cNvPicPr>
                         <a:picLocks noChangeAspect="1" noChangeArrowheads="1"/>
                       </p:cNvPicPr>
                       <p:nvPr/>
                     </p:nvPicPr>
                     <p:blipFill>
-                      <a:blip r:embed="rId10">
+                      <a:blip r:embed="rId9">
                         <a:extLst>
                           <a:ext uri="{28A0092B-C50C-407E-A947-70E740481C1C}">
                             <a14:useLocalDpi xmlns:a14="http://schemas.microsoft.com/office/drawing/2010/main" val="0"/>
@@ -27464,23 +27717,23 @@
           <a:graphicData uri="http://schemas.openxmlformats.org/presentationml/2006/ole">
             <mc:AlternateContent xmlns:mc="http://schemas.openxmlformats.org/markup-compatibility/2006">
               <mc:Choice xmlns:v="urn:schemas-microsoft-com:vml" Requires="v">
-                <p:oleObj spid="_x0000_s17525" name="Equation" r:id="rId11" imgW="2286000" imgH="495300" progId="Equation.DSMT4">
+                <p:oleObj name="Equation" r:id="rId10" imgW="2286000" imgH="495300" progId="Equation.DSMT4">
                   <p:embed/>
                 </p:oleObj>
               </mc:Choice>
               <mc:Fallback>
-                <p:oleObj name="Equation" r:id="rId11" imgW="2286000" imgH="495300" progId="Equation.DSMT4">
+                <p:oleObj name="Equation" r:id="rId10" imgW="2286000" imgH="495300" progId="Equation.DSMT4">
                   <p:embed/>
                   <p:pic>
                     <p:nvPicPr>
-                      <p:cNvPr id="0" name="Object 44"/>
+                      <p:cNvPr id="162860" name="Object 44"/>
                       <p:cNvPicPr>
                         <a:picLocks noChangeAspect="1" noChangeArrowheads="1"/>
                       </p:cNvPicPr>
                       <p:nvPr/>
                     </p:nvPicPr>
                     <p:blipFill>
-                      <a:blip r:embed="rId12">
+                      <a:blip r:embed="rId11">
                         <a:extLst>
                           <a:ext uri="{28A0092B-C50C-407E-A947-70E740481C1C}">
                             <a14:useLocalDpi xmlns:a14="http://schemas.microsoft.com/office/drawing/2010/main" val="0"/>
@@ -27588,7 +27841,7 @@
                 <p:nvPr/>
               </p:nvPicPr>
               <p:blipFill>
-                <a:blip r:embed="rId13">
+                <a:blip r:embed="rId12">
                   <a:extLst>
                     <a:ext uri="{28A0092B-C50C-407E-A947-70E740481C1C}">
                       <a14:useLocalDpi xmlns:a14="http://schemas.microsoft.com/office/drawing/2010/main" val="0"/>
@@ -28239,7 +28492,9 @@
                 <a:bodyPr/>
                 <a:lstStyle/>
                 <a:p>
-                  <a:endParaRPr lang="pt-BR"/>
+                  <a:endParaRPr lang="pt-BR" dirty="0">
+                    <a:latin typeface="Tahoma" panose="020B0604030504040204" pitchFamily="34" charset="0"/>
+                  </a:endParaRPr>
                 </a:p>
               </p:txBody>
             </p:sp>
@@ -28281,7 +28536,9 @@
               <a:bodyPr/>
               <a:lstStyle/>
               <a:p>
-                <a:endParaRPr lang="pt-BR"/>
+                <a:endParaRPr lang="pt-BR" dirty="0">
+                  <a:latin typeface="Tahoma" panose="020B0604030504040204" pitchFamily="34" charset="0"/>
+                </a:endParaRPr>
               </a:p>
             </p:txBody>
           </p:sp>
@@ -28301,23 +28558,23 @@
               <a:graphicData uri="http://schemas.openxmlformats.org/presentationml/2006/ole">
                 <mc:AlternateContent xmlns:mc="http://schemas.openxmlformats.org/markup-compatibility/2006">
                   <mc:Choice xmlns:v="urn:schemas-microsoft-com:vml" Requires="v">
-                    <p:oleObj spid="_x0000_s17526" name="Equation" r:id="rId14" imgW="177646" imgH="228402" progId="Equation.DSMT4">
+                    <p:oleObj name="Equation" r:id="rId13" imgW="177646" imgH="228402" progId="Equation.DSMT4">
                       <p:embed/>
                     </p:oleObj>
                   </mc:Choice>
                   <mc:Fallback>
-                    <p:oleObj name="Equation" r:id="rId14" imgW="177646" imgH="228402" progId="Equation.DSMT4">
+                    <p:oleObj name="Equation" r:id="rId13" imgW="177646" imgH="228402" progId="Equation.DSMT4">
                       <p:embed/>
                       <p:pic>
                         <p:nvPicPr>
-                          <p:cNvPr id="0" name="Object 75"/>
+                          <p:cNvPr id="17439" name="Object 75"/>
                           <p:cNvPicPr>
                             <a:picLocks noChangeAspect="1" noChangeArrowheads="1"/>
                           </p:cNvPicPr>
                           <p:nvPr/>
                         </p:nvPicPr>
                         <p:blipFill>
-                          <a:blip r:embed="rId15">
+                          <a:blip r:embed="rId14">
                             <a:extLst>
                               <a:ext uri="{28A0092B-C50C-407E-A947-70E740481C1C}">
                                 <a14:useLocalDpi xmlns:a14="http://schemas.microsoft.com/office/drawing/2010/main" val="0"/>
@@ -28636,7 +28893,9 @@
             <a:bodyPr/>
             <a:lstStyle/>
             <a:p>
-              <a:endParaRPr lang="pt-BR"/>
+              <a:endParaRPr lang="pt-BR" dirty="0">
+                <a:latin typeface="Tahoma" panose="020B0604030504040204" pitchFamily="34" charset="0"/>
+              </a:endParaRPr>
             </a:p>
           </p:txBody>
         </p:sp>
@@ -29226,7 +29485,9 @@
             <a:bodyPr/>
             <a:lstStyle/>
             <a:p>
-              <a:endParaRPr lang="pt-BR"/>
+              <a:endParaRPr lang="pt-BR" dirty="0">
+                <a:latin typeface="Tahoma" panose="020B0604030504040204" pitchFamily="34" charset="0"/>
+              </a:endParaRPr>
             </a:p>
           </p:txBody>
         </p:sp>
@@ -29267,7 +29528,9 @@
             <a:bodyPr/>
             <a:lstStyle/>
             <a:p>
-              <a:endParaRPr lang="pt-BR"/>
+              <a:endParaRPr lang="pt-BR" dirty="0">
+                <a:latin typeface="Tahoma" panose="020B0604030504040204" pitchFamily="34" charset="0"/>
+              </a:endParaRPr>
             </a:p>
           </p:txBody>
         </p:sp>
@@ -29691,7 +29954,9 @@
             <a:bodyPr/>
             <a:lstStyle/>
             <a:p>
-              <a:endParaRPr lang="pt-BR"/>
+              <a:endParaRPr lang="pt-BR" dirty="0">
+                <a:latin typeface="Tahoma" panose="020B0604030504040204" pitchFamily="34" charset="0"/>
+              </a:endParaRPr>
             </a:p>
           </p:txBody>
         </p:sp>
@@ -29870,10 +30135,11 @@
                 <a:buNone/>
               </a:pPr>
               <a:r>
-                <a:rPr lang="pt-BR" altLang="pt-BR" sz="1600">
+                <a:rPr lang="pt-BR" altLang="pt-BR" sz="1600" dirty="0">
                   <a:solidFill>
                     <a:srgbClr val="FF3300"/>
                   </a:solidFill>
+                  <a:latin typeface="Tahoma" panose="020B0604030504040204" pitchFamily="34" charset="0"/>
                 </a:rPr>
                 <a:t>?</a:t>
               </a:r>
@@ -30078,23 +30344,23 @@
           <a:graphicData uri="http://schemas.openxmlformats.org/presentationml/2006/ole">
             <mc:AlternateContent xmlns:mc="http://schemas.openxmlformats.org/markup-compatibility/2006">
               <mc:Choice xmlns:v="urn:schemas-microsoft-com:vml" Requires="v">
-                <p:oleObj spid="_x0000_s17527" name="Equation" r:id="rId16" imgW="2590800" imgH="444500" progId="Equation.DSMT4">
+                <p:oleObj name="Equation" r:id="rId15" imgW="2590800" imgH="444500" progId="Equation.DSMT4">
                   <p:embed/>
                 </p:oleObj>
               </mc:Choice>
               <mc:Fallback>
-                <p:oleObj name="Equation" r:id="rId16" imgW="2590800" imgH="444500" progId="Equation.DSMT4">
+                <p:oleObj name="Equation" r:id="rId15" imgW="2590800" imgH="444500" progId="Equation.DSMT4">
                   <p:embed/>
                   <p:pic>
                     <p:nvPicPr>
-                      <p:cNvPr id="0" name="Object 90"/>
+                      <p:cNvPr id="162906" name="Object 90"/>
                       <p:cNvPicPr>
                         <a:picLocks noChangeAspect="1" noChangeArrowheads="1"/>
                       </p:cNvPicPr>
                       <p:nvPr/>
                     </p:nvPicPr>
                     <p:blipFill>
-                      <a:blip r:embed="rId17">
+                      <a:blip r:embed="rId16">
                         <a:extLst>
                           <a:ext uri="{28A0092B-C50C-407E-A947-70E740481C1C}">
                             <a14:useLocalDpi xmlns:a14="http://schemas.microsoft.com/office/drawing/2010/main" val="0"/>
@@ -30161,23 +30427,23 @@
           <a:graphicData uri="http://schemas.openxmlformats.org/presentationml/2006/ole">
             <mc:AlternateContent xmlns:mc="http://schemas.openxmlformats.org/markup-compatibility/2006">
               <mc:Choice xmlns:v="urn:schemas-microsoft-com:vml" Requires="v">
-                <p:oleObj spid="_x0000_s17528" name="Equation" r:id="rId18" imgW="4432300" imgH="228600" progId="Equation.DSMT4">
+                <p:oleObj name="Equation" r:id="rId17" imgW="4432300" imgH="228600" progId="Equation.DSMT4">
                   <p:embed/>
                 </p:oleObj>
               </mc:Choice>
               <mc:Fallback>
-                <p:oleObj name="Equation" r:id="rId18" imgW="4432300" imgH="228600" progId="Equation.DSMT4">
+                <p:oleObj name="Equation" r:id="rId17" imgW="4432300" imgH="228600" progId="Equation.DSMT4">
                   <p:embed/>
                   <p:pic>
                     <p:nvPicPr>
-                      <p:cNvPr id="0" name="Object 91"/>
+                      <p:cNvPr id="162907" name="Object 91"/>
                       <p:cNvPicPr>
                         <a:picLocks noChangeAspect="1" noChangeArrowheads="1"/>
                       </p:cNvPicPr>
                       <p:nvPr/>
                     </p:nvPicPr>
                     <p:blipFill>
-                      <a:blip r:embed="rId19">
+                      <a:blip r:embed="rId18">
                         <a:extLst>
                           <a:ext uri="{28A0092B-C50C-407E-A947-70E740481C1C}">
                             <a14:useLocalDpi xmlns:a14="http://schemas.microsoft.com/office/drawing/2010/main" val="0"/>
@@ -30244,23 +30510,23 @@
           <a:graphicData uri="http://schemas.openxmlformats.org/presentationml/2006/ole">
             <mc:AlternateContent xmlns:mc="http://schemas.openxmlformats.org/markup-compatibility/2006">
               <mc:Choice xmlns:v="urn:schemas-microsoft-com:vml" Requires="v">
-                <p:oleObj spid="_x0000_s17529" name="Equation" r:id="rId20" imgW="2286000" imgH="228600" progId="Equation.DSMT4">
+                <p:oleObj name="Equation" r:id="rId19" imgW="2286000" imgH="228600" progId="Equation.DSMT4">
                   <p:embed/>
                 </p:oleObj>
               </mc:Choice>
               <mc:Fallback>
-                <p:oleObj name="Equation" r:id="rId20" imgW="2286000" imgH="228600" progId="Equation.DSMT4">
+                <p:oleObj name="Equation" r:id="rId19" imgW="2286000" imgH="228600" progId="Equation.DSMT4">
                   <p:embed/>
                   <p:pic>
                     <p:nvPicPr>
-                      <p:cNvPr id="0" name="Object 92"/>
+                      <p:cNvPr id="162908" name="Object 92"/>
                       <p:cNvPicPr>
                         <a:picLocks noChangeAspect="1" noChangeArrowheads="1"/>
                       </p:cNvPicPr>
                       <p:nvPr/>
                     </p:nvPicPr>
                     <p:blipFill>
-                      <a:blip r:embed="rId21">
+                      <a:blip r:embed="rId20">
                         <a:extLst>
                           <a:ext uri="{28A0092B-C50C-407E-A947-70E740481C1C}">
                             <a14:useLocalDpi xmlns:a14="http://schemas.microsoft.com/office/drawing/2010/main" val="0"/>
@@ -30478,7 +30744,9 @@
               <a:buFontTx/>
               <a:buNone/>
             </a:pPr>
-            <a:endParaRPr lang="pt-BR" altLang="pt-BR" sz="1600"/>
+            <a:endParaRPr lang="pt-BR" altLang="pt-BR" sz="1600" dirty="0">
+              <a:latin typeface="Tahoma" panose="020B0604030504040204" pitchFamily="34" charset="0"/>
+            </a:endParaRPr>
           </a:p>
         </p:txBody>
       </p:sp>
@@ -30657,37 +30925,39 @@
               <a:buNone/>
             </a:pPr>
             <a:r>
-              <a:rPr lang="pt-BR" altLang="pt-BR" sz="1600" i="1">
+              <a:rPr lang="pt-BR" altLang="pt-BR" sz="1600" i="1" dirty="0">
                 <a:latin typeface="Symbol" pitchFamily="18" charset="2"/>
               </a:rPr>
               <a:t>m</a:t>
             </a:r>
             <a:r>
-              <a:rPr lang="pt-BR" altLang="pt-BR" sz="1600" baseline="-25000">
+              <a:rPr lang="pt-BR" altLang="pt-BR" sz="1600" baseline="-25000" dirty="0">
                 <a:latin typeface="Times New Roman" charset="0"/>
               </a:rPr>
               <a:t>1</a:t>
             </a:r>
             <a:r>
-              <a:rPr lang="pt-BR" altLang="pt-BR" sz="1600" i="1">
+              <a:rPr lang="pt-BR" altLang="pt-BR" sz="1600" i="1" dirty="0">
                 <a:latin typeface="Times New Roman" charset="0"/>
               </a:rPr>
               <a:t> = </a:t>
             </a:r>
             <a:r>
-              <a:rPr lang="pt-BR" altLang="pt-BR" sz="1600" i="1">
+              <a:rPr lang="pt-BR" altLang="pt-BR" sz="1600" i="1" dirty="0">
                 <a:latin typeface="Symbol" pitchFamily="18" charset="2"/>
               </a:rPr>
               <a:t>m</a:t>
             </a:r>
             <a:r>
-              <a:rPr lang="pt-BR" altLang="pt-BR" sz="1600" baseline="-25000">
+              <a:rPr lang="pt-BR" altLang="pt-BR" sz="1600" baseline="-25000" dirty="0">
                 <a:latin typeface="Times New Roman" charset="0"/>
               </a:rPr>
               <a:t>2</a:t>
             </a:r>
             <a:r>
-              <a:rPr lang="pt-BR" altLang="pt-BR" sz="1600"/>
+              <a:rPr lang="pt-BR" altLang="pt-BR" sz="1600" dirty="0">
+                <a:latin typeface="Tahoma" panose="020B0604030504040204" pitchFamily="34" charset="0"/>
+              </a:rPr>
               <a:t>?</a:t>
             </a:r>
           </a:p>
@@ -30868,43 +31138,45 @@
               <a:buNone/>
             </a:pPr>
             <a:r>
-              <a:rPr lang="pt-BR" altLang="pt-BR" sz="1600">
+              <a:rPr lang="pt-BR" altLang="pt-BR" sz="1600" dirty="0">
                 <a:latin typeface="Symbol" pitchFamily="18" charset="2"/>
                 <a:sym typeface="Symbol" pitchFamily="18" charset="2"/>
               </a:rPr>
               <a:t>  </a:t>
             </a:r>
             <a:r>
-              <a:rPr lang="pt-BR" altLang="pt-BR" sz="1600" i="1">
+              <a:rPr lang="pt-BR" altLang="pt-BR" sz="1600" i="1" dirty="0">
                 <a:latin typeface="Symbol" pitchFamily="18" charset="2"/>
               </a:rPr>
               <a:t>m</a:t>
             </a:r>
             <a:r>
-              <a:rPr lang="pt-BR" altLang="pt-BR" sz="1600" baseline="-25000">
+              <a:rPr lang="pt-BR" altLang="pt-BR" sz="1600" baseline="-25000" dirty="0">
                 <a:latin typeface="Times New Roman" charset="0"/>
               </a:rPr>
               <a:t>1</a:t>
             </a:r>
             <a:r>
-              <a:rPr lang="pt-BR" altLang="pt-BR" sz="1600" i="1">
+              <a:rPr lang="pt-BR" altLang="pt-BR" sz="1600" i="1" dirty="0">
                 <a:latin typeface="Times New Roman" charset="0"/>
               </a:rPr>
               <a:t> &lt; </a:t>
             </a:r>
             <a:r>
-              <a:rPr lang="pt-BR" altLang="pt-BR" sz="1600" i="1">
+              <a:rPr lang="pt-BR" altLang="pt-BR" sz="1600" i="1" dirty="0">
                 <a:latin typeface="Symbol" pitchFamily="18" charset="2"/>
               </a:rPr>
               <a:t>m</a:t>
             </a:r>
             <a:r>
-              <a:rPr lang="pt-BR" altLang="pt-BR" sz="1600" baseline="-25000">
+              <a:rPr lang="pt-BR" altLang="pt-BR" sz="1600" baseline="-25000" dirty="0">
                 <a:latin typeface="Times New Roman" charset="0"/>
               </a:rPr>
               <a:t>2</a:t>
             </a:r>
-            <a:endParaRPr lang="pt-BR" altLang="pt-BR" sz="1600"/>
+            <a:endParaRPr lang="pt-BR" altLang="pt-BR" sz="1600" dirty="0">
+              <a:latin typeface="Tahoma" panose="020B0604030504040204" pitchFamily="34" charset="0"/>
+            </a:endParaRPr>
           </a:p>
         </p:txBody>
       </p:sp>
@@ -31492,23 +31764,23 @@
           <a:graphicData uri="http://schemas.openxmlformats.org/presentationml/2006/ole">
             <mc:AlternateContent xmlns:mc="http://schemas.openxmlformats.org/markup-compatibility/2006">
               <mc:Choice xmlns:v="urn:schemas-microsoft-com:vml" Requires="v">
-                <p:oleObj spid="_x0000_s18562" name="Equation" r:id="rId3" imgW="1040948" imgH="431613" progId="Equation.DSMT4">
+                <p:oleObj name="Equation" r:id="rId2" imgW="1040948" imgH="431613" progId="Equation.DSMT4">
                   <p:embed/>
                 </p:oleObj>
               </mc:Choice>
               <mc:Fallback>
-                <p:oleObj name="Equation" r:id="rId3" imgW="1040948" imgH="431613" progId="Equation.DSMT4">
+                <p:oleObj name="Equation" r:id="rId2" imgW="1040948" imgH="431613" progId="Equation.DSMT4">
                   <p:embed/>
                   <p:pic>
                     <p:nvPicPr>
-                      <p:cNvPr id="0" name="Object 2"/>
+                      <p:cNvPr id="18434" name="Object 2"/>
                       <p:cNvPicPr>
                         <a:picLocks noChangeAspect="1" noChangeArrowheads="1"/>
                       </p:cNvPicPr>
                       <p:nvPr/>
                     </p:nvPicPr>
                     <p:blipFill>
-                      <a:blip r:embed="rId4">
+                      <a:blip r:embed="rId3">
                         <a:extLst>
                           <a:ext uri="{28A0092B-C50C-407E-A947-70E740481C1C}">
                             <a14:useLocalDpi xmlns:a14="http://schemas.microsoft.com/office/drawing/2010/main" val="0"/>
@@ -31578,45 +31850,45 @@
               <a:defRPr/>
             </a:pPr>
             <a:r>
-              <a:rPr lang="pt-BR" smtClean="0"/>
+              <a:rPr lang="pt-BR"/>
               <a:t>Intervalo de Confiança para </a:t>
             </a:r>
             <a:r>
-              <a:rPr lang="pt-BR" i="1" smtClean="0">
+              <a:rPr lang="pt-BR" i="1">
                 <a:latin typeface="Times New Roman" pitchFamily="18" charset="0"/>
                 <a:sym typeface="Symbol" pitchFamily="18" charset="2"/>
               </a:rPr>
               <a:t>p</a:t>
             </a:r>
             <a:r>
-              <a:rPr lang="pt-BR" baseline="-25000" smtClean="0">
+              <a:rPr lang="pt-BR" baseline="-25000">
                 <a:latin typeface="Times New Roman" pitchFamily="18" charset="0"/>
                 <a:sym typeface="Symbol" pitchFamily="18" charset="2"/>
               </a:rPr>
               <a:t>1</a:t>
             </a:r>
             <a:r>
-              <a:rPr lang="pt-BR" smtClean="0">
+              <a:rPr lang="pt-BR">
                 <a:latin typeface="Times New Roman" pitchFamily="18" charset="0"/>
                 <a:sym typeface="Symbol" pitchFamily="18" charset="2"/>
               </a:rPr>
               <a:t> – </a:t>
             </a:r>
             <a:r>
-              <a:rPr lang="pt-BR" i="1" smtClean="0">
+              <a:rPr lang="pt-BR" i="1">
                 <a:latin typeface="Times New Roman" pitchFamily="18" charset="0"/>
                 <a:sym typeface="Symbol" pitchFamily="18" charset="2"/>
               </a:rPr>
               <a:t>p</a:t>
             </a:r>
             <a:r>
-              <a:rPr lang="pt-BR" baseline="-25000" smtClean="0">
+              <a:rPr lang="pt-BR" baseline="-25000">
                 <a:latin typeface="Times New Roman" pitchFamily="18" charset="0"/>
                 <a:sym typeface="Symbol" pitchFamily="18" charset="2"/>
               </a:rPr>
               <a:t>2</a:t>
             </a:r>
-            <a:endParaRPr lang="pt-BR" i="1" baseline="-25000" smtClean="0">
+            <a:endParaRPr lang="pt-BR" i="1" baseline="-25000">
               <a:latin typeface="Times New Roman" pitchFamily="18" charset="0"/>
               <a:sym typeface="Symbol" pitchFamily="18" charset="2"/>
             </a:endParaRPr>
@@ -31639,23 +31911,23 @@
           <a:graphicData uri="http://schemas.openxmlformats.org/presentationml/2006/ole">
             <mc:AlternateContent xmlns:mc="http://schemas.openxmlformats.org/markup-compatibility/2006">
               <mc:Choice xmlns:v="urn:schemas-microsoft-com:vml" Requires="v">
-                <p:oleObj spid="_x0000_s18563" name="Equation" r:id="rId5" imgW="1866900" imgH="660400" progId="Equation.DSMT4">
+                <p:oleObj name="Equation" r:id="rId4" imgW="1866900" imgH="660400" progId="Equation.DSMT4">
                   <p:embed/>
                 </p:oleObj>
               </mc:Choice>
               <mc:Fallback>
-                <p:oleObj name="Equation" r:id="rId5" imgW="1866900" imgH="660400" progId="Equation.DSMT4">
+                <p:oleObj name="Equation" r:id="rId4" imgW="1866900" imgH="660400" progId="Equation.DSMT4">
                   <p:embed/>
                   <p:pic>
                     <p:nvPicPr>
-                      <p:cNvPr id="0" name="Object 4"/>
+                      <p:cNvPr id="166916" name="Object 4"/>
                       <p:cNvPicPr>
                         <a:picLocks noChangeAspect="1" noChangeArrowheads="1"/>
                       </p:cNvPicPr>
                       <p:nvPr/>
                     </p:nvPicPr>
                     <p:blipFill>
-                      <a:blip r:embed="rId6">
+                      <a:blip r:embed="rId5">
                         <a:extLst>
                           <a:ext uri="{28A0092B-C50C-407E-A947-70E740481C1C}">
                             <a14:useLocalDpi xmlns:a14="http://schemas.microsoft.com/office/drawing/2010/main" val="0"/>
@@ -31722,23 +31994,23 @@
           <a:graphicData uri="http://schemas.openxmlformats.org/presentationml/2006/ole">
             <mc:AlternateContent xmlns:mc="http://schemas.openxmlformats.org/markup-compatibility/2006">
               <mc:Choice xmlns:v="urn:schemas-microsoft-com:vml" Requires="v">
-                <p:oleObj spid="_x0000_s18564" name="Equation" r:id="rId7" imgW="2489200" imgH="660400" progId="Equation.DSMT4">
+                <p:oleObj name="Equation" r:id="rId6" imgW="2489200" imgH="660400" progId="Equation.DSMT4">
                   <p:embed/>
                 </p:oleObj>
               </mc:Choice>
               <mc:Fallback>
-                <p:oleObj name="Equation" r:id="rId7" imgW="2489200" imgH="660400" progId="Equation.DSMT4">
+                <p:oleObj name="Equation" r:id="rId6" imgW="2489200" imgH="660400" progId="Equation.DSMT4">
                   <p:embed/>
                   <p:pic>
                     <p:nvPicPr>
-                      <p:cNvPr id="0" name="Object 6"/>
+                      <p:cNvPr id="166918" name="Object 6"/>
                       <p:cNvPicPr>
                         <a:picLocks noChangeAspect="1" noChangeArrowheads="1"/>
                       </p:cNvPicPr>
                       <p:nvPr/>
                     </p:nvPicPr>
                     <p:blipFill>
-                      <a:blip r:embed="rId8">
+                      <a:blip r:embed="rId7">
                         <a:extLst>
                           <a:ext uri="{28A0092B-C50C-407E-A947-70E740481C1C}">
                             <a14:useLocalDpi xmlns:a14="http://schemas.microsoft.com/office/drawing/2010/main" val="0"/>
@@ -31956,7 +32228,9 @@
               <a:buFontTx/>
               <a:buNone/>
             </a:pPr>
-            <a:endParaRPr lang="pt-BR" altLang="pt-BR" sz="1600"/>
+            <a:endParaRPr lang="pt-BR" altLang="pt-BR" sz="1600" dirty="0">
+              <a:latin typeface="Tahoma" panose="020B0604030504040204" pitchFamily="34" charset="0"/>
+            </a:endParaRPr>
           </a:p>
         </p:txBody>
       </p:sp>
@@ -32135,15 +32409,16 @@
               <a:buNone/>
             </a:pPr>
             <a:r>
-              <a:rPr lang="pt-BR" altLang="pt-BR" sz="1800">
+              <a:rPr lang="pt-BR" altLang="pt-BR" sz="1800" dirty="0">
                 <a:solidFill>
                   <a:srgbClr val="FF3300"/>
                 </a:solidFill>
+                <a:latin typeface="Tahoma" panose="020B0604030504040204" pitchFamily="34" charset="0"/>
               </a:rPr>
               <a:t>IC para </a:t>
             </a:r>
             <a:r>
-              <a:rPr lang="pt-BR" altLang="pt-BR" sz="1800" i="1">
+              <a:rPr lang="pt-BR" altLang="pt-BR" sz="1800" i="1" dirty="0">
                 <a:solidFill>
                   <a:srgbClr val="FF3300"/>
                 </a:solidFill>
@@ -32152,7 +32427,7 @@
               <a:t>p</a:t>
             </a:r>
             <a:r>
-              <a:rPr lang="pt-BR" altLang="pt-BR" sz="1800" baseline="-25000">
+              <a:rPr lang="pt-BR" altLang="pt-BR" sz="1800" baseline="-25000" dirty="0">
                 <a:solidFill>
                   <a:srgbClr val="FF3300"/>
                 </a:solidFill>
@@ -32161,7 +32436,7 @@
               <a:t>1</a:t>
             </a:r>
             <a:r>
-              <a:rPr lang="pt-BR" altLang="pt-BR" sz="1800">
+              <a:rPr lang="pt-BR" altLang="pt-BR" sz="1800" dirty="0">
                 <a:solidFill>
                   <a:srgbClr val="FF3300"/>
                 </a:solidFill>
@@ -32170,7 +32445,7 @@
               <a:t> – </a:t>
             </a:r>
             <a:r>
-              <a:rPr lang="pt-BR" altLang="pt-BR" sz="1800" i="1">
+              <a:rPr lang="pt-BR" altLang="pt-BR" sz="1800" i="1" dirty="0">
                 <a:solidFill>
                   <a:srgbClr val="FF3300"/>
                 </a:solidFill>
@@ -32179,7 +32454,7 @@
               <a:t>p</a:t>
             </a:r>
             <a:r>
-              <a:rPr lang="pt-BR" altLang="pt-BR" sz="1800" baseline="-25000">
+              <a:rPr lang="pt-BR" altLang="pt-BR" sz="1800" baseline="-25000" dirty="0">
                 <a:solidFill>
                   <a:srgbClr val="FF3300"/>
                 </a:solidFill>
@@ -32247,7 +32522,7 @@
                 <p:nvPr/>
               </p:nvPicPr>
               <p:blipFill>
-                <a:blip r:embed="rId9">
+                <a:blip r:embed="rId8">
                   <a:extLst>
                     <a:ext uri="{28A0092B-C50C-407E-A947-70E740481C1C}">
                       <a14:useLocalDpi xmlns:a14="http://schemas.microsoft.com/office/drawing/2010/main" val="0"/>
@@ -32898,7 +33173,9 @@
                 <a:bodyPr/>
                 <a:lstStyle/>
                 <a:p>
-                  <a:endParaRPr lang="pt-BR"/>
+                  <a:endParaRPr lang="pt-BR" dirty="0">
+                    <a:latin typeface="Tahoma" panose="020B0604030504040204" pitchFamily="34" charset="0"/>
+                  </a:endParaRPr>
                 </a:p>
               </p:txBody>
             </p:sp>
@@ -32940,7 +33217,9 @@
               <a:bodyPr/>
               <a:lstStyle/>
               <a:p>
-                <a:endParaRPr lang="pt-BR"/>
+                <a:endParaRPr lang="pt-BR" dirty="0">
+                  <a:latin typeface="Tahoma" panose="020B0604030504040204" pitchFamily="34" charset="0"/>
+                </a:endParaRPr>
               </a:p>
             </p:txBody>
           </p:sp>
@@ -32960,23 +33239,23 @@
               <a:graphicData uri="http://schemas.openxmlformats.org/presentationml/2006/ole">
                 <mc:AlternateContent xmlns:mc="http://schemas.openxmlformats.org/markup-compatibility/2006">
                   <mc:Choice xmlns:v="urn:schemas-microsoft-com:vml" Requires="v">
-                    <p:oleObj spid="_x0000_s18565" name="Equation" r:id="rId10" imgW="457002" imgH="203112" progId="Equation.DSMT4">
+                    <p:oleObj name="Equation" r:id="rId9" imgW="457002" imgH="203112" progId="Equation.DSMT4">
                       <p:embed/>
                     </p:oleObj>
                   </mc:Choice>
                   <mc:Fallback>
-                    <p:oleObj name="Equation" r:id="rId10" imgW="457002" imgH="203112" progId="Equation.DSMT4">
+                    <p:oleObj name="Equation" r:id="rId9" imgW="457002" imgH="203112" progId="Equation.DSMT4">
                       <p:embed/>
                       <p:pic>
                         <p:nvPicPr>
-                          <p:cNvPr id="0" name="Object 21"/>
+                          <p:cNvPr id="18460" name="Object 21"/>
                           <p:cNvPicPr>
                             <a:picLocks noChangeAspect="1" noChangeArrowheads="1"/>
                           </p:cNvPicPr>
                           <p:nvPr/>
                         </p:nvPicPr>
                         <p:blipFill>
-                          <a:blip r:embed="rId11">
+                          <a:blip r:embed="rId10">
                             <a:extLst>
                               <a:ext uri="{28A0092B-C50C-407E-A947-70E740481C1C}">
                                 <a14:useLocalDpi xmlns:a14="http://schemas.microsoft.com/office/drawing/2010/main" val="0"/>
@@ -33295,7 +33574,9 @@
             <a:bodyPr/>
             <a:lstStyle/>
             <a:p>
-              <a:endParaRPr lang="pt-BR"/>
+              <a:endParaRPr lang="pt-BR" dirty="0">
+                <a:latin typeface="Tahoma" panose="020B0604030504040204" pitchFamily="34" charset="0"/>
+              </a:endParaRPr>
             </a:p>
           </p:txBody>
         </p:sp>
@@ -33718,7 +33999,9 @@
               <a:bodyPr/>
               <a:lstStyle/>
               <a:p>
-                <a:endParaRPr lang="pt-BR"/>
+                <a:endParaRPr lang="pt-BR" dirty="0">
+                  <a:latin typeface="Tahoma" panose="020B0604030504040204" pitchFamily="34" charset="0"/>
+                </a:endParaRPr>
               </a:p>
             </p:txBody>
           </p:sp>
@@ -33738,23 +34021,23 @@
               <a:graphicData uri="http://schemas.openxmlformats.org/presentationml/2006/ole">
                 <mc:AlternateContent xmlns:mc="http://schemas.openxmlformats.org/markup-compatibility/2006">
                   <mc:Choice xmlns:v="urn:schemas-microsoft-com:vml" Requires="v">
-                    <p:oleObj spid="_x0000_s18566" name="Equation" r:id="rId12" imgW="177646" imgH="393359" progId="Equation.DSMT4">
+                    <p:oleObj name="Equation" r:id="rId11" imgW="177646" imgH="393359" progId="Equation.DSMT4">
                       <p:embed/>
                     </p:oleObj>
                   </mc:Choice>
                   <mc:Fallback>
-                    <p:oleObj name="Equation" r:id="rId12" imgW="177646" imgH="393359" progId="Equation.DSMT4">
+                    <p:oleObj name="Equation" r:id="rId11" imgW="177646" imgH="393359" progId="Equation.DSMT4">
                       <p:embed/>
                       <p:pic>
                         <p:nvPicPr>
-                          <p:cNvPr id="0" name="Object 27"/>
+                          <p:cNvPr id="18457" name="Object 27"/>
                           <p:cNvPicPr>
                             <a:picLocks noChangeAspect="1" noChangeArrowheads="1"/>
                           </p:cNvPicPr>
                           <p:nvPr/>
                         </p:nvPicPr>
                         <p:blipFill>
-                          <a:blip r:embed="rId13">
+                          <a:blip r:embed="rId12">
                             <a:extLst>
                               <a:ext uri="{28A0092B-C50C-407E-A947-70E740481C1C}">
                                 <a14:useLocalDpi xmlns:a14="http://schemas.microsoft.com/office/drawing/2010/main" val="0"/>
@@ -33859,7 +34142,9 @@
               <a:bodyPr/>
               <a:lstStyle/>
               <a:p>
-                <a:endParaRPr lang="pt-BR"/>
+                <a:endParaRPr lang="pt-BR" dirty="0">
+                  <a:latin typeface="Tahoma" panose="020B0604030504040204" pitchFamily="34" charset="0"/>
+                </a:endParaRPr>
               </a:p>
             </p:txBody>
           </p:sp>
@@ -33879,23 +34164,23 @@
               <a:graphicData uri="http://schemas.openxmlformats.org/presentationml/2006/ole">
                 <mc:AlternateContent xmlns:mc="http://schemas.openxmlformats.org/markup-compatibility/2006">
                   <mc:Choice xmlns:v="urn:schemas-microsoft-com:vml" Requires="v">
-                    <p:oleObj spid="_x0000_s18567" name="Equation" r:id="rId14" imgW="177646" imgH="393359" progId="Equation.DSMT4">
+                    <p:oleObj name="Equation" r:id="rId13" imgW="177646" imgH="393359" progId="Equation.DSMT4">
                       <p:embed/>
                     </p:oleObj>
                   </mc:Choice>
                   <mc:Fallback>
-                    <p:oleObj name="Equation" r:id="rId14" imgW="177646" imgH="393359" progId="Equation.DSMT4">
+                    <p:oleObj name="Equation" r:id="rId13" imgW="177646" imgH="393359" progId="Equation.DSMT4">
                       <p:embed/>
                       <p:pic>
                         <p:nvPicPr>
-                          <p:cNvPr id="0" name="Object 30"/>
+                          <p:cNvPr id="18455" name="Object 30"/>
                           <p:cNvPicPr>
                             <a:picLocks noChangeAspect="1" noChangeArrowheads="1"/>
                           </p:cNvPicPr>
                           <p:nvPr/>
                         </p:nvPicPr>
                         <p:blipFill>
-                          <a:blip r:embed="rId15">
+                          <a:blip r:embed="rId14">
                             <a:extLst>
                               <a:ext uri="{28A0092B-C50C-407E-A947-70E740481C1C}">
                                 <a14:useLocalDpi xmlns:a14="http://schemas.microsoft.com/office/drawing/2010/main" val="0"/>
@@ -33963,23 +34248,23 @@
             <a:graphicData uri="http://schemas.openxmlformats.org/presentationml/2006/ole">
               <mc:AlternateContent xmlns:mc="http://schemas.openxmlformats.org/markup-compatibility/2006">
                 <mc:Choice xmlns:v="urn:schemas-microsoft-com:vml" Requires="v">
-                  <p:oleObj spid="_x0000_s18568" name="Equation" r:id="rId16" imgW="342603" imgH="177646" progId="Equation.DSMT4">
+                  <p:oleObj name="Equation" r:id="rId15" imgW="342603" imgH="177646" progId="Equation.DSMT4">
                     <p:embed/>
                   </p:oleObj>
                 </mc:Choice>
                 <mc:Fallback>
-                  <p:oleObj name="Equation" r:id="rId16" imgW="342603" imgH="177646" progId="Equation.DSMT4">
+                  <p:oleObj name="Equation" r:id="rId15" imgW="342603" imgH="177646" progId="Equation.DSMT4">
                     <p:embed/>
                     <p:pic>
                       <p:nvPicPr>
-                        <p:cNvPr id="0" name="Object 31"/>
+                        <p:cNvPr id="18452" name="Object 31"/>
                         <p:cNvPicPr>
                           <a:picLocks noChangeAspect="1" noChangeArrowheads="1"/>
                         </p:cNvPicPr>
                         <p:nvPr/>
                       </p:nvPicPr>
                       <p:blipFill>
-                        <a:blip r:embed="rId17">
+                        <a:blip r:embed="rId16">
                           <a:extLst>
                             <a:ext uri="{28A0092B-C50C-407E-A947-70E740481C1C}">
                               <a14:useLocalDpi xmlns:a14="http://schemas.microsoft.com/office/drawing/2010/main" val="0"/>
@@ -34046,23 +34331,23 @@
             <a:graphicData uri="http://schemas.openxmlformats.org/presentationml/2006/ole">
               <mc:AlternateContent xmlns:mc="http://schemas.openxmlformats.org/markup-compatibility/2006">
                 <mc:Choice xmlns:v="urn:schemas-microsoft-com:vml" Requires="v">
-                  <p:oleObj spid="_x0000_s18569" name="Equation" r:id="rId18" imgW="1346200" imgH="203200" progId="Equation.DSMT4">
+                  <p:oleObj name="Equation" r:id="rId17" imgW="1346200" imgH="203200" progId="Equation.DSMT4">
                     <p:embed/>
                   </p:oleObj>
                 </mc:Choice>
                 <mc:Fallback>
-                  <p:oleObj name="Equation" r:id="rId18" imgW="1346200" imgH="203200" progId="Equation.DSMT4">
+                  <p:oleObj name="Equation" r:id="rId17" imgW="1346200" imgH="203200" progId="Equation.DSMT4">
                     <p:embed/>
                     <p:pic>
                       <p:nvPicPr>
-                        <p:cNvPr id="0" name="Object 32"/>
+                        <p:cNvPr id="18453" name="Object 32"/>
                         <p:cNvPicPr>
                           <a:picLocks noChangeAspect="1" noChangeArrowheads="1"/>
                         </p:cNvPicPr>
                         <p:nvPr/>
                       </p:nvPicPr>
                       <p:blipFill>
-                        <a:blip r:embed="rId19">
+                        <a:blip r:embed="rId18">
                           <a:extLst>
                             <a:ext uri="{28A0092B-C50C-407E-A947-70E740481C1C}">
                               <a14:useLocalDpi xmlns:a14="http://schemas.microsoft.com/office/drawing/2010/main" val="0"/>
@@ -34130,23 +34415,23 @@
           <a:graphicData uri="http://schemas.openxmlformats.org/presentationml/2006/ole">
             <mc:AlternateContent xmlns:mc="http://schemas.openxmlformats.org/markup-compatibility/2006">
               <mc:Choice xmlns:v="urn:schemas-microsoft-com:vml" Requires="v">
-                <p:oleObj spid="_x0000_s18570" name="Equation" r:id="rId20" imgW="4381500" imgH="482600" progId="Equation.DSMT4">
+                <p:oleObj name="Equation" r:id="rId19" imgW="4381500" imgH="482600" progId="Equation.DSMT4">
                   <p:embed/>
                 </p:oleObj>
               </mc:Choice>
               <mc:Fallback>
-                <p:oleObj name="Equation" r:id="rId20" imgW="4381500" imgH="482600" progId="Equation.DSMT4">
+                <p:oleObj name="Equation" r:id="rId19" imgW="4381500" imgH="482600" progId="Equation.DSMT4">
                   <p:embed/>
                   <p:pic>
                     <p:nvPicPr>
-                      <p:cNvPr id="0" name="Object 34"/>
+                      <p:cNvPr id="166946" name="Object 34"/>
                       <p:cNvPicPr>
                         <a:picLocks noChangeAspect="1" noChangeArrowheads="1"/>
                       </p:cNvPicPr>
                       <p:nvPr/>
                     </p:nvPicPr>
                     <p:blipFill>
-                      <a:blip r:embed="rId21">
+                      <a:blip r:embed="rId20">
                         <a:extLst>
                           <a:ext uri="{28A0092B-C50C-407E-A947-70E740481C1C}">
                             <a14:useLocalDpi xmlns:a14="http://schemas.microsoft.com/office/drawing/2010/main" val="0"/>
@@ -34213,23 +34498,23 @@
           <a:graphicData uri="http://schemas.openxmlformats.org/presentationml/2006/ole">
             <mc:AlternateContent xmlns:mc="http://schemas.openxmlformats.org/markup-compatibility/2006">
               <mc:Choice xmlns:v="urn:schemas-microsoft-com:vml" Requires="v">
-                <p:oleObj spid="_x0000_s18571" name="Equation" r:id="rId22" imgW="1104900" imgH="431800" progId="Equation.DSMT4">
+                <p:oleObj name="Equation" r:id="rId21" imgW="1104900" imgH="431800" progId="Equation.DSMT4">
                   <p:embed/>
                 </p:oleObj>
               </mc:Choice>
               <mc:Fallback>
-                <p:oleObj name="Equation" r:id="rId22" imgW="1104900" imgH="431800" progId="Equation.DSMT4">
+                <p:oleObj name="Equation" r:id="rId21" imgW="1104900" imgH="431800" progId="Equation.DSMT4">
                   <p:embed/>
                   <p:pic>
                     <p:nvPicPr>
-                      <p:cNvPr id="0" name="Object 35"/>
+                      <p:cNvPr id="18442" name="Object 35"/>
                       <p:cNvPicPr>
                         <a:picLocks noChangeAspect="1" noChangeArrowheads="1"/>
                       </p:cNvPicPr>
                       <p:nvPr/>
                     </p:nvPicPr>
                     <p:blipFill>
-                      <a:blip r:embed="rId23">
+                      <a:blip r:embed="rId22">
                         <a:extLst>
                           <a:ext uri="{28A0092B-C50C-407E-A947-70E740481C1C}">
                             <a14:useLocalDpi xmlns:a14="http://schemas.microsoft.com/office/drawing/2010/main" val="0"/>
@@ -34296,23 +34581,23 @@
           <a:graphicData uri="http://schemas.openxmlformats.org/presentationml/2006/ole">
             <mc:AlternateContent xmlns:mc="http://schemas.openxmlformats.org/markup-compatibility/2006">
               <mc:Choice xmlns:v="urn:schemas-microsoft-com:vml" Requires="v">
-                <p:oleObj spid="_x0000_s18572" name="Equation" r:id="rId24" imgW="698500" imgH="228600" progId="Equation.DSMT4">
+                <p:oleObj name="Equation" r:id="rId23" imgW="698500" imgH="228600" progId="Equation.DSMT4">
                   <p:embed/>
                 </p:oleObj>
               </mc:Choice>
               <mc:Fallback>
-                <p:oleObj name="Equation" r:id="rId24" imgW="698500" imgH="228600" progId="Equation.DSMT4">
+                <p:oleObj name="Equation" r:id="rId23" imgW="698500" imgH="228600" progId="Equation.DSMT4">
                   <p:embed/>
                   <p:pic>
                     <p:nvPicPr>
-                      <p:cNvPr id="0" name="Object 36"/>
+                      <p:cNvPr id="166948" name="Object 36"/>
                       <p:cNvPicPr>
                         <a:picLocks noChangeAspect="1" noChangeArrowheads="1"/>
                       </p:cNvPicPr>
                       <p:nvPr/>
                     </p:nvPicPr>
                     <p:blipFill>
-                      <a:blip r:embed="rId25">
+                      <a:blip r:embed="rId24">
                         <a:extLst>
                           <a:ext uri="{28A0092B-C50C-407E-A947-70E740481C1C}">
                             <a14:useLocalDpi xmlns:a14="http://schemas.microsoft.com/office/drawing/2010/main" val="0"/>
@@ -34379,23 +34664,23 @@
           <a:graphicData uri="http://schemas.openxmlformats.org/presentationml/2006/ole">
             <mc:AlternateContent xmlns:mc="http://schemas.openxmlformats.org/markup-compatibility/2006">
               <mc:Choice xmlns:v="urn:schemas-microsoft-com:vml" Requires="v">
-                <p:oleObj spid="_x0000_s18573" name="Equation" r:id="rId26" imgW="2082800" imgH="431800" progId="Equation.DSMT4">
+                <p:oleObj name="Equation" r:id="rId25" imgW="2082800" imgH="431800" progId="Equation.DSMT4">
                   <p:embed/>
                 </p:oleObj>
               </mc:Choice>
               <mc:Fallback>
-                <p:oleObj name="Equation" r:id="rId26" imgW="2082800" imgH="431800" progId="Equation.DSMT4">
+                <p:oleObj name="Equation" r:id="rId25" imgW="2082800" imgH="431800" progId="Equation.DSMT4">
                   <p:embed/>
                   <p:pic>
                     <p:nvPicPr>
-                      <p:cNvPr id="0" name="Object 37"/>
+                      <p:cNvPr id="166949" name="Object 37"/>
                       <p:cNvPicPr>
                         <a:picLocks noChangeAspect="1" noChangeArrowheads="1"/>
                       </p:cNvPicPr>
                       <p:nvPr/>
                     </p:nvPicPr>
                     <p:blipFill>
-                      <a:blip r:embed="rId27">
+                      <a:blip r:embed="rId26">
                         <a:extLst>
                           <a:ext uri="{28A0092B-C50C-407E-A947-70E740481C1C}">
                             <a14:useLocalDpi xmlns:a14="http://schemas.microsoft.com/office/drawing/2010/main" val="0"/>
@@ -34891,10 +35176,10 @@
               <a:defRPr/>
             </a:pPr>
             <a:r>
-              <a:rPr lang="pt-BR" smtClean="0"/>
+              <a:rPr lang="pt-BR"/>
               <a:t>Intervalos de Confiança (Resumo)</a:t>
             </a:r>
-            <a:endParaRPr lang="pt-BR" i="1" baseline="-25000" smtClean="0">
+            <a:endParaRPr lang="pt-BR" i="1" baseline="-25000">
               <a:latin typeface="Times New Roman" pitchFamily="18" charset="0"/>
               <a:sym typeface="Symbol" pitchFamily="18" charset="2"/>
             </a:endParaRPr>
@@ -35092,16 +35377,21 @@
                 <a:buNone/>
               </a:pPr>
               <a:r>
-                <a:rPr lang="pt-BR" altLang="pt-BR" sz="1600"/>
+                <a:rPr lang="pt-BR" altLang="pt-BR" sz="1600" dirty="0">
+                  <a:latin typeface="Tahoma" panose="020B0604030504040204" pitchFamily="34" charset="0"/>
+                </a:rPr>
                 <a:t>para </a:t>
               </a:r>
               <a:r>
-                <a:rPr lang="pt-BR" altLang="pt-BR" sz="1600" i="1">
+                <a:rPr lang="pt-BR" altLang="pt-BR" sz="1600" i="1" dirty="0">
+                  <a:latin typeface="Tahoma" panose="020B0604030504040204" pitchFamily="34" charset="0"/>
                   <a:sym typeface="Symbol" pitchFamily="18" charset="2"/>
                 </a:rPr>
                 <a:t></a:t>
               </a:r>
-              <a:endParaRPr lang="pt-BR" altLang="pt-BR" sz="1600" i="1"/>
+              <a:endParaRPr lang="pt-BR" altLang="pt-BR" sz="1600" i="1" dirty="0">
+                <a:latin typeface="Tahoma" panose="020B0604030504040204" pitchFamily="34" charset="0"/>
+              </a:endParaRPr>
             </a:p>
           </p:txBody>
         </p:sp>
@@ -35137,23 +35427,23 @@
               <a:graphicData uri="http://schemas.openxmlformats.org/presentationml/2006/ole">
                 <mc:AlternateContent xmlns:mc="http://schemas.openxmlformats.org/markup-compatibility/2006">
                   <mc:Choice xmlns:v="urn:schemas-microsoft-com:vml" Requires="v">
-                    <p:oleObj spid="_x0000_s19647" name="Equation" r:id="rId3" imgW="457002" imgH="203112" progId="Equation.DSMT4">
+                    <p:oleObj name="Equation" r:id="rId2" imgW="457002" imgH="203112" progId="Equation.DSMT4">
                       <p:embed/>
                     </p:oleObj>
                   </mc:Choice>
                   <mc:Fallback>
-                    <p:oleObj name="Equation" r:id="rId3" imgW="457002" imgH="203112" progId="Equation.DSMT4">
+                    <p:oleObj name="Equation" r:id="rId2" imgW="457002" imgH="203112" progId="Equation.DSMT4">
                       <p:embed/>
                       <p:pic>
                         <p:nvPicPr>
-                          <p:cNvPr id="0" name="Object 35"/>
+                          <p:cNvPr id="19501" name="Object 35"/>
                           <p:cNvPicPr>
                             <a:picLocks noChangeAspect="1" noChangeArrowheads="1"/>
                           </p:cNvPicPr>
                           <p:nvPr/>
                         </p:nvPicPr>
                         <p:blipFill>
-                          <a:blip r:embed="rId4">
+                          <a:blip r:embed="rId3">
                             <a:extLst>
                               <a:ext uri="{28A0092B-C50C-407E-A947-70E740481C1C}">
                                 <a14:useLocalDpi xmlns:a14="http://schemas.microsoft.com/office/drawing/2010/main" val="0"/>
@@ -35220,23 +35510,23 @@
               <a:graphicData uri="http://schemas.openxmlformats.org/presentationml/2006/ole">
                 <mc:AlternateContent xmlns:mc="http://schemas.openxmlformats.org/markup-compatibility/2006">
                   <mc:Choice xmlns:v="urn:schemas-microsoft-com:vml" Requires="v">
-                    <p:oleObj spid="_x0000_s19648" name="Equation" r:id="rId5" imgW="228600" imgH="228600" progId="Equation.DSMT4">
+                    <p:oleObj name="Equation" r:id="rId4" imgW="228600" imgH="228600" progId="Equation.DSMT4">
                       <p:embed/>
                     </p:oleObj>
                   </mc:Choice>
                   <mc:Fallback>
-                    <p:oleObj name="Equation" r:id="rId5" imgW="228600" imgH="228600" progId="Equation.DSMT4">
+                    <p:oleObj name="Equation" r:id="rId4" imgW="228600" imgH="228600" progId="Equation.DSMT4">
                       <p:embed/>
                       <p:pic>
                         <p:nvPicPr>
-                          <p:cNvPr id="0" name="Object 36"/>
+                          <p:cNvPr id="19502" name="Object 36"/>
                           <p:cNvPicPr>
                             <a:picLocks noChangeAspect="1" noChangeArrowheads="1"/>
                           </p:cNvPicPr>
                           <p:nvPr/>
                         </p:nvPicPr>
                         <p:blipFill>
-                          <a:blip r:embed="rId6">
+                          <a:blip r:embed="rId5">
                             <a:extLst>
                               <a:ext uri="{28A0092B-C50C-407E-A947-70E740481C1C}">
                                 <a14:useLocalDpi xmlns:a14="http://schemas.microsoft.com/office/drawing/2010/main" val="0"/>
@@ -35463,29 +35753,35 @@
                 <a:buNone/>
               </a:pPr>
               <a:r>
-                <a:rPr lang="pt-BR" altLang="pt-BR" sz="1600"/>
+                <a:rPr lang="pt-BR" altLang="pt-BR" sz="1600" dirty="0">
+                  <a:latin typeface="Tahoma" panose="020B0604030504040204" pitchFamily="34" charset="0"/>
+                </a:rPr>
                 <a:t>se </a:t>
               </a:r>
               <a:r>
-                <a:rPr lang="pt-BR" altLang="pt-BR" sz="1600" i="1">
+                <a:rPr lang="pt-BR" altLang="pt-BR" sz="1600" i="1" dirty="0">
+                  <a:latin typeface="Tahoma" panose="020B0604030504040204" pitchFamily="34" charset="0"/>
                   <a:sym typeface="Symbol" pitchFamily="18" charset="2"/>
                 </a:rPr>
                 <a:t></a:t>
               </a:r>
               <a:r>
-                <a:rPr lang="pt-BR" altLang="pt-BR" sz="1600" baseline="30000">
+                <a:rPr lang="pt-BR" altLang="pt-BR" sz="1600" baseline="30000" dirty="0">
                   <a:latin typeface="Times New Roman" charset="0"/>
                   <a:sym typeface="Symbol" pitchFamily="18" charset="2"/>
                 </a:rPr>
                 <a:t>2</a:t>
               </a:r>
               <a:r>
-                <a:rPr lang="pt-BR" altLang="pt-BR" sz="1600">
+                <a:rPr lang="pt-BR" altLang="pt-BR" sz="1600" dirty="0">
+                  <a:latin typeface="Tahoma" panose="020B0604030504040204" pitchFamily="34" charset="0"/>
                   <a:sym typeface="Symbol" pitchFamily="18" charset="2"/>
                 </a:rPr>
                 <a:t> é conhecida</a:t>
               </a:r>
-              <a:endParaRPr lang="pt-BR" altLang="pt-BR" sz="1600"/>
+              <a:endParaRPr lang="pt-BR" altLang="pt-BR" sz="1600" dirty="0">
+                <a:latin typeface="Tahoma" panose="020B0604030504040204" pitchFamily="34" charset="0"/>
+              </a:endParaRPr>
             </a:p>
           </p:txBody>
         </p:sp>
@@ -35664,29 +35960,35 @@
                 <a:buNone/>
               </a:pPr>
               <a:r>
-                <a:rPr lang="pt-BR" altLang="pt-BR" sz="1600"/>
+                <a:rPr lang="pt-BR" altLang="pt-BR" sz="1600" dirty="0">
+                  <a:latin typeface="Tahoma" panose="020B0604030504040204" pitchFamily="34" charset="0"/>
+                </a:rPr>
                 <a:t>se </a:t>
               </a:r>
               <a:r>
-                <a:rPr lang="pt-BR" altLang="pt-BR" sz="1600" i="1">
+                <a:rPr lang="pt-BR" altLang="pt-BR" sz="1600" i="1" dirty="0">
+                  <a:latin typeface="Tahoma" panose="020B0604030504040204" pitchFamily="34" charset="0"/>
                   <a:sym typeface="Symbol" pitchFamily="18" charset="2"/>
                 </a:rPr>
                 <a:t></a:t>
               </a:r>
               <a:r>
-                <a:rPr lang="pt-BR" altLang="pt-BR" sz="1600" baseline="30000">
+                <a:rPr lang="pt-BR" altLang="pt-BR" sz="1600" baseline="30000" dirty="0">
                   <a:latin typeface="Times New Roman" charset="0"/>
                   <a:sym typeface="Symbol" pitchFamily="18" charset="2"/>
                 </a:rPr>
                 <a:t>2</a:t>
               </a:r>
               <a:r>
-                <a:rPr lang="pt-BR" altLang="pt-BR" sz="1600">
+                <a:rPr lang="pt-BR" altLang="pt-BR" sz="1600" dirty="0">
+                  <a:latin typeface="Tahoma" panose="020B0604030504040204" pitchFamily="34" charset="0"/>
                   <a:sym typeface="Symbol" pitchFamily="18" charset="2"/>
                 </a:rPr>
                 <a:t> é desconhecida</a:t>
               </a:r>
-              <a:endParaRPr lang="pt-BR" altLang="pt-BR" sz="1600"/>
+              <a:endParaRPr lang="pt-BR" altLang="pt-BR" sz="1600" dirty="0">
+                <a:latin typeface="Tahoma" panose="020B0604030504040204" pitchFamily="34" charset="0"/>
+              </a:endParaRPr>
             </a:p>
           </p:txBody>
         </p:sp>
@@ -35860,7 +36162,9 @@
                 <a:buFontTx/>
                 <a:buNone/>
               </a:pPr>
-              <a:endParaRPr lang="pt-BR" altLang="pt-BR" sz="1600"/>
+              <a:endParaRPr lang="pt-BR" altLang="pt-BR" sz="1600" dirty="0">
+                <a:latin typeface="Tahoma" panose="020B0604030504040204" pitchFamily="34" charset="0"/>
+              </a:endParaRPr>
             </a:p>
           </p:txBody>
         </p:sp>
@@ -36056,24 +36360,28 @@
                 <a:buNone/>
               </a:pPr>
               <a:r>
-                <a:rPr lang="pt-BR" altLang="pt-BR" sz="1600"/>
+                <a:rPr lang="pt-BR" altLang="pt-BR" sz="1600" dirty="0">
+                  <a:latin typeface="Tahoma" panose="020B0604030504040204" pitchFamily="34" charset="0"/>
+                </a:rPr>
                 <a:t>para </a:t>
               </a:r>
               <a:r>
-                <a:rPr lang="pt-BR" altLang="pt-BR" sz="1600" i="1">
+                <a:rPr lang="pt-BR" altLang="pt-BR" sz="1600" i="1" dirty="0">
+                  <a:latin typeface="Tahoma" panose="020B0604030504040204" pitchFamily="34" charset="0"/>
                   <a:sym typeface="Symbol" pitchFamily="18" charset="2"/>
                 </a:rPr>
                 <a:t></a:t>
               </a:r>
               <a:r>
-                <a:rPr lang="pt-BR" altLang="pt-BR" sz="1600" baseline="30000">
+                <a:rPr lang="pt-BR" altLang="pt-BR" sz="1600" baseline="30000" dirty="0">
                   <a:latin typeface="Times New Roman" charset="0"/>
                   <a:sym typeface="Symbol" pitchFamily="18" charset="2"/>
                 </a:rPr>
                 <a:t>2</a:t>
               </a:r>
               <a:r>
-                <a:rPr lang="pt-BR" altLang="pt-BR" sz="1600">
+                <a:rPr lang="pt-BR" altLang="pt-BR" sz="1600" dirty="0">
+                  <a:latin typeface="Tahoma" panose="020B0604030504040204" pitchFamily="34" charset="0"/>
                   <a:sym typeface="Symbol" pitchFamily="18" charset="2"/>
                 </a:rPr>
                 <a:t> </a:t>
@@ -36097,23 +36405,23 @@
             <a:graphicData uri="http://schemas.openxmlformats.org/presentationml/2006/ole">
               <mc:AlternateContent xmlns:mc="http://schemas.openxmlformats.org/markup-compatibility/2006">
                 <mc:Choice xmlns:v="urn:schemas-microsoft-com:vml" Requires="v">
-                  <p:oleObj spid="_x0000_s19649" name="Equation" r:id="rId7" imgW="279279" imgH="241195" progId="Equation.DSMT4">
+                  <p:oleObj name="Equation" r:id="rId6" imgW="279279" imgH="241195" progId="Equation.DSMT4">
                     <p:embed/>
                   </p:oleObj>
                 </mc:Choice>
                 <mc:Fallback>
-                  <p:oleObj name="Equation" r:id="rId7" imgW="279279" imgH="241195" progId="Equation.DSMT4">
+                  <p:oleObj name="Equation" r:id="rId6" imgW="279279" imgH="241195" progId="Equation.DSMT4">
                     <p:embed/>
                     <p:pic>
                       <p:nvPicPr>
-                        <p:cNvPr id="0" name="Object 45"/>
+                        <p:cNvPr id="19494" name="Object 45"/>
                         <p:cNvPicPr>
                           <a:picLocks noChangeAspect="1" noChangeArrowheads="1"/>
                         </p:cNvPicPr>
                         <p:nvPr/>
                       </p:nvPicPr>
                       <p:blipFill>
-                        <a:blip r:embed="rId8">
+                        <a:blip r:embed="rId7">
                           <a:extLst>
                             <a:ext uri="{28A0092B-C50C-407E-A947-70E740481C1C}">
                               <a14:useLocalDpi xmlns:a14="http://schemas.microsoft.com/office/drawing/2010/main" val="0"/>
@@ -36334,7 +36642,9 @@
                 <a:buFontTx/>
                 <a:buNone/>
               </a:pPr>
-              <a:endParaRPr lang="pt-BR" altLang="pt-BR" sz="1600"/>
+              <a:endParaRPr lang="pt-BR" altLang="pt-BR" sz="1600" dirty="0">
+                <a:latin typeface="Tahoma" panose="020B0604030504040204" pitchFamily="34" charset="0"/>
+              </a:endParaRPr>
             </a:p>
           </p:txBody>
         </p:sp>
@@ -36530,11 +36840,14 @@
                 <a:buNone/>
               </a:pPr>
               <a:r>
-                <a:rPr lang="pt-BR" altLang="pt-BR" sz="1600"/>
+                <a:rPr lang="pt-BR" altLang="pt-BR" sz="1600" dirty="0">
+                  <a:latin typeface="Tahoma" panose="020B0604030504040204" pitchFamily="34" charset="0"/>
+                </a:rPr>
                 <a:t>para</a:t>
               </a:r>
               <a:r>
-                <a:rPr lang="pt-BR" altLang="pt-BR" sz="1600">
+                <a:rPr lang="pt-BR" altLang="pt-BR" sz="1600" dirty="0">
+                  <a:latin typeface="Tahoma" panose="020B0604030504040204" pitchFamily="34" charset="0"/>
                   <a:sym typeface="Symbol" pitchFamily="18" charset="2"/>
                 </a:rPr>
                 <a:t> </a:t>
@@ -36558,23 +36871,23 @@
             <a:graphicData uri="http://schemas.openxmlformats.org/presentationml/2006/ole">
               <mc:AlternateContent xmlns:mc="http://schemas.openxmlformats.org/markup-compatibility/2006">
                 <mc:Choice xmlns:v="urn:schemas-microsoft-com:vml" Requires="v">
-                  <p:oleObj spid="_x0000_s19650" name="Equation" r:id="rId9" imgW="495085" imgH="241195" progId="Equation.DSMT4">
+                  <p:oleObj name="Equation" r:id="rId8" imgW="495085" imgH="241195" progId="Equation.DSMT4">
                     <p:embed/>
                   </p:oleObj>
                 </mc:Choice>
                 <mc:Fallback>
-                  <p:oleObj name="Equation" r:id="rId9" imgW="495085" imgH="241195" progId="Equation.DSMT4">
+                  <p:oleObj name="Equation" r:id="rId8" imgW="495085" imgH="241195" progId="Equation.DSMT4">
                     <p:embed/>
                     <p:pic>
                       <p:nvPicPr>
-                        <p:cNvPr id="0" name="Object 69"/>
+                        <p:cNvPr id="19490" name="Object 69"/>
                         <p:cNvPicPr>
                           <a:picLocks noChangeAspect="1" noChangeArrowheads="1"/>
                         </p:cNvPicPr>
                         <p:nvPr/>
                       </p:nvPicPr>
                       <p:blipFill>
-                        <a:blip r:embed="rId10">
+                        <a:blip r:embed="rId9">
                           <a:extLst>
                             <a:ext uri="{28A0092B-C50C-407E-A947-70E740481C1C}">
                               <a14:useLocalDpi xmlns:a14="http://schemas.microsoft.com/office/drawing/2010/main" val="0"/>
@@ -36795,7 +37108,9 @@
                 <a:buFontTx/>
                 <a:buNone/>
               </a:pPr>
-              <a:endParaRPr lang="pt-BR" altLang="pt-BR" sz="1600"/>
+              <a:endParaRPr lang="pt-BR" altLang="pt-BR" sz="1600" dirty="0">
+                <a:latin typeface="Tahoma" panose="020B0604030504040204" pitchFamily="34" charset="0"/>
+              </a:endParaRPr>
             </a:p>
           </p:txBody>
         </p:sp>
@@ -36815,23 +37130,23 @@
             <a:graphicData uri="http://schemas.openxmlformats.org/presentationml/2006/ole">
               <mc:AlternateContent xmlns:mc="http://schemas.openxmlformats.org/markup-compatibility/2006">
                 <mc:Choice xmlns:v="urn:schemas-microsoft-com:vml" Requires="v">
-                  <p:oleObj spid="_x0000_s19651" name="Equation" r:id="rId11" imgW="241300" imgH="457200" progId="Equation.DSMT4">
+                  <p:oleObj name="Equation" r:id="rId10" imgW="241300" imgH="457200" progId="Equation.DSMT4">
                     <p:embed/>
                   </p:oleObj>
                 </mc:Choice>
                 <mc:Fallback>
-                  <p:oleObj name="Equation" r:id="rId11" imgW="241300" imgH="457200" progId="Equation.DSMT4">
+                  <p:oleObj name="Equation" r:id="rId10" imgW="241300" imgH="457200" progId="Equation.DSMT4">
                     <p:embed/>
                     <p:pic>
                       <p:nvPicPr>
-                        <p:cNvPr id="0" name="Object 72"/>
+                        <p:cNvPr id="19492" name="Object 72"/>
                         <p:cNvPicPr>
                           <a:picLocks noChangeAspect="1" noChangeArrowheads="1"/>
                         </p:cNvPicPr>
                         <p:nvPr/>
                       </p:nvPicPr>
                       <p:blipFill>
-                        <a:blip r:embed="rId12">
+                        <a:blip r:embed="rId11">
                           <a:extLst>
                             <a:ext uri="{28A0092B-C50C-407E-A947-70E740481C1C}">
                               <a14:useLocalDpi xmlns:a14="http://schemas.microsoft.com/office/drawing/2010/main" val="0"/>
@@ -37074,18 +37389,20 @@
                 <a:buNone/>
               </a:pPr>
               <a:r>
-                <a:rPr lang="pt-BR" altLang="pt-BR" sz="1600"/>
+                <a:rPr lang="pt-BR" altLang="pt-BR" sz="1600" dirty="0">
+                  <a:latin typeface="Tahoma" panose="020B0604030504040204" pitchFamily="34" charset="0"/>
+                </a:rPr>
                 <a:t>para  </a:t>
               </a:r>
               <a:r>
-                <a:rPr lang="pt-BR" altLang="pt-BR" sz="1600" i="1">
+                <a:rPr lang="pt-BR" altLang="pt-BR" sz="1600" i="1" dirty="0">
                   <a:latin typeface="Times New Roman" charset="0"/>
                   <a:sym typeface="Symbol" pitchFamily="18" charset="2"/>
                 </a:rPr>
                 <a:t>p</a:t>
               </a:r>
               <a:r>
-                <a:rPr lang="pt-BR" altLang="pt-BR" sz="1600">
+                <a:rPr lang="pt-BR" altLang="pt-BR" sz="1600" dirty="0">
                   <a:latin typeface="Times New Roman" charset="0"/>
                   <a:sym typeface="Symbol" pitchFamily="18" charset="2"/>
                 </a:rPr>
@@ -37110,23 +37427,23 @@
             <a:graphicData uri="http://schemas.openxmlformats.org/presentationml/2006/ole">
               <mc:AlternateContent xmlns:mc="http://schemas.openxmlformats.org/markup-compatibility/2006">
                 <mc:Choice xmlns:v="urn:schemas-microsoft-com:vml" Requires="v">
-                  <p:oleObj spid="_x0000_s19652" name="Equation" r:id="rId13" imgW="457002" imgH="203112" progId="Equation.DSMT4">
+                  <p:oleObj name="Equation" r:id="rId12" imgW="457002" imgH="203112" progId="Equation.DSMT4">
                     <p:embed/>
                   </p:oleObj>
                 </mc:Choice>
                 <mc:Fallback>
-                  <p:oleObj name="Equation" r:id="rId13" imgW="457002" imgH="203112" progId="Equation.DSMT4">
+                  <p:oleObj name="Equation" r:id="rId12" imgW="457002" imgH="203112" progId="Equation.DSMT4">
                     <p:embed/>
                     <p:pic>
                       <p:nvPicPr>
-                        <p:cNvPr id="0" name="Object 77"/>
+                        <p:cNvPr id="19487" name="Object 77"/>
                         <p:cNvPicPr>
                           <a:picLocks noChangeAspect="1" noChangeArrowheads="1"/>
                         </p:cNvPicPr>
                         <p:nvPr/>
                       </p:nvPicPr>
                       <p:blipFill>
-                        <a:blip r:embed="rId4">
+                        <a:blip r:embed="rId3">
                           <a:extLst>
                             <a:ext uri="{28A0092B-C50C-407E-A947-70E740481C1C}">
                               <a14:useLocalDpi xmlns:a14="http://schemas.microsoft.com/office/drawing/2010/main" val="0"/>
@@ -37347,7 +37664,9 @@
                 <a:buFontTx/>
                 <a:buNone/>
               </a:pPr>
-              <a:endParaRPr lang="pt-BR" altLang="pt-BR" sz="1600"/>
+              <a:endParaRPr lang="pt-BR" altLang="pt-BR" sz="1600" dirty="0">
+                <a:latin typeface="Tahoma" panose="020B0604030504040204" pitchFamily="34" charset="0"/>
+              </a:endParaRPr>
             </a:p>
           </p:txBody>
         </p:sp>
@@ -37543,39 +37862,41 @@
                 <a:buNone/>
               </a:pPr>
               <a:r>
-                <a:rPr lang="pt-BR" altLang="pt-BR" sz="1600"/>
+                <a:rPr lang="pt-BR" altLang="pt-BR" sz="1600" dirty="0">
+                  <a:latin typeface="Tahoma" panose="020B0604030504040204" pitchFamily="34" charset="0"/>
+                </a:rPr>
                 <a:t>para  </a:t>
               </a:r>
               <a:r>
-                <a:rPr lang="pt-BR" altLang="pt-BR" sz="1600" i="1">
+                <a:rPr lang="pt-BR" altLang="pt-BR" sz="1600" i="1" dirty="0">
                   <a:latin typeface="Times New Roman" charset="0"/>
                   <a:sym typeface="Symbol" pitchFamily="18" charset="2"/>
                 </a:rPr>
                 <a:t>p</a:t>
               </a:r>
               <a:r>
-                <a:rPr lang="pt-BR" altLang="pt-BR" sz="1600" baseline="-25000">
+                <a:rPr lang="pt-BR" altLang="pt-BR" sz="1600" baseline="-25000" dirty="0">
                   <a:latin typeface="Times New Roman" charset="0"/>
                   <a:sym typeface="Symbol" pitchFamily="18" charset="2"/>
                 </a:rPr>
                 <a:t>1</a:t>
               </a:r>
               <a:r>
-                <a:rPr lang="pt-BR" altLang="pt-BR" sz="1600" i="1">
+                <a:rPr lang="pt-BR" altLang="pt-BR" sz="1600" i="1" dirty="0">
                   <a:latin typeface="Times New Roman" charset="0"/>
                   <a:sym typeface="Symbol" pitchFamily="18" charset="2"/>
                 </a:rPr>
                 <a:t> – p</a:t>
               </a:r>
               <a:r>
-                <a:rPr lang="pt-BR" altLang="pt-BR" sz="1600" baseline="-25000">
+                <a:rPr lang="pt-BR" altLang="pt-BR" sz="1600" baseline="-25000" dirty="0">
                   <a:latin typeface="Times New Roman" charset="0"/>
                   <a:sym typeface="Symbol" pitchFamily="18" charset="2"/>
                 </a:rPr>
                 <a:t>2</a:t>
               </a:r>
               <a:r>
-                <a:rPr lang="pt-BR" altLang="pt-BR" sz="1600">
+                <a:rPr lang="pt-BR" altLang="pt-BR" sz="1600" dirty="0">
                   <a:latin typeface="Times New Roman" charset="0"/>
                   <a:sym typeface="Symbol" pitchFamily="18" charset="2"/>
                 </a:rPr>
@@ -37600,23 +37921,23 @@
             <a:graphicData uri="http://schemas.openxmlformats.org/presentationml/2006/ole">
               <mc:AlternateContent xmlns:mc="http://schemas.openxmlformats.org/markup-compatibility/2006">
                 <mc:Choice xmlns:v="urn:schemas-microsoft-com:vml" Requires="v">
-                  <p:oleObj spid="_x0000_s19653" name="Equation" r:id="rId14" imgW="457002" imgH="203112" progId="Equation.DSMT4">
+                  <p:oleObj name="Equation" r:id="rId13" imgW="457002" imgH="203112" progId="Equation.DSMT4">
                     <p:embed/>
                   </p:oleObj>
                 </mc:Choice>
                 <mc:Fallback>
-                  <p:oleObj name="Equation" r:id="rId14" imgW="457002" imgH="203112" progId="Equation.DSMT4">
+                  <p:oleObj name="Equation" r:id="rId13" imgW="457002" imgH="203112" progId="Equation.DSMT4">
                     <p:embed/>
                     <p:pic>
                       <p:nvPicPr>
-                        <p:cNvPr id="0" name="Object 82"/>
+                        <p:cNvPr id="19484" name="Object 82"/>
                         <p:cNvPicPr>
                           <a:picLocks noChangeAspect="1" noChangeArrowheads="1"/>
                         </p:cNvPicPr>
                         <p:nvPr/>
                       </p:nvPicPr>
                       <p:blipFill>
-                        <a:blip r:embed="rId4">
+                        <a:blip r:embed="rId3">
                           <a:extLst>
                             <a:ext uri="{28A0092B-C50C-407E-A947-70E740481C1C}">
                               <a14:useLocalDpi xmlns:a14="http://schemas.microsoft.com/office/drawing/2010/main" val="0"/>
@@ -37837,7 +38158,9 @@
                 <a:buFontTx/>
                 <a:buNone/>
               </a:pPr>
-              <a:endParaRPr lang="pt-BR" altLang="pt-BR" sz="1600"/>
+              <a:endParaRPr lang="pt-BR" altLang="pt-BR" sz="1600" dirty="0">
+                <a:latin typeface="Tahoma" panose="020B0604030504040204" pitchFamily="34" charset="0"/>
+              </a:endParaRPr>
             </a:p>
           </p:txBody>
         </p:sp>
@@ -38033,37 +38356,41 @@
                 <a:buNone/>
               </a:pPr>
               <a:r>
-                <a:rPr lang="pt-BR" altLang="pt-BR" sz="1600"/>
+                <a:rPr lang="pt-BR" altLang="pt-BR" sz="1600" dirty="0">
+                  <a:latin typeface="Tahoma" panose="020B0604030504040204" pitchFamily="34" charset="0"/>
+                </a:rPr>
                 <a:t>para </a:t>
               </a:r>
               <a:r>
-                <a:rPr lang="pt-BR" altLang="pt-BR" sz="1600" i="1">
+                <a:rPr lang="pt-BR" altLang="pt-BR" sz="1600" i="1" dirty="0">
+                  <a:latin typeface="Tahoma" panose="020B0604030504040204" pitchFamily="34" charset="0"/>
                   <a:sym typeface="Symbol" pitchFamily="18" charset="2"/>
                 </a:rPr>
                 <a:t></a:t>
               </a:r>
               <a:r>
-                <a:rPr lang="pt-BR" altLang="pt-BR" sz="1600" baseline="-25000">
+                <a:rPr lang="pt-BR" altLang="pt-BR" sz="1600" baseline="-25000" dirty="0">
                   <a:latin typeface="Times New Roman" charset="0"/>
                   <a:sym typeface="Symbol" pitchFamily="18" charset="2"/>
                 </a:rPr>
                 <a:t>1</a:t>
               </a:r>
               <a:r>
-                <a:rPr lang="pt-BR" altLang="pt-BR" sz="1600" i="1">
+                <a:rPr lang="pt-BR" altLang="pt-BR" sz="1600" i="1" dirty="0">
                   <a:latin typeface="Times New Roman" charset="0"/>
                   <a:sym typeface="Symbol" pitchFamily="18" charset="2"/>
                 </a:rPr>
                 <a:t> - </a:t>
               </a:r>
               <a:r>
-                <a:rPr lang="pt-BR" altLang="pt-BR" sz="1600" i="1">
+                <a:rPr lang="pt-BR" altLang="pt-BR" sz="1600" i="1" dirty="0">
+                  <a:latin typeface="Tahoma" panose="020B0604030504040204" pitchFamily="34" charset="0"/>
                   <a:sym typeface="Symbol" pitchFamily="18" charset="2"/>
                 </a:rPr>
                 <a:t></a:t>
               </a:r>
               <a:r>
-                <a:rPr lang="pt-BR" altLang="pt-BR" sz="1600" baseline="-25000">
+                <a:rPr lang="pt-BR" altLang="pt-BR" sz="1600" baseline="-25000" dirty="0">
                   <a:latin typeface="Times New Roman" charset="0"/>
                   <a:sym typeface="Symbol" pitchFamily="18" charset="2"/>
                 </a:rPr>
@@ -38083,7 +38410,7 @@
           <p:spPr bwMode="auto">
             <a:xfrm>
               <a:off x="2253" y="1979"/>
-              <a:ext cx="1656" cy="212"/>
+              <a:ext cx="1673" cy="213"/>
             </a:xfrm>
             <a:prstGeom prst="rect">
               <a:avLst/>
@@ -38247,22 +38574,28 @@
                 <a:buNone/>
               </a:pPr>
               <a:r>
-                <a:rPr lang="pt-BR" altLang="pt-BR" sz="1600"/>
+                <a:rPr lang="pt-BR" altLang="pt-BR" sz="1600" dirty="0">
+                  <a:latin typeface="Tahoma" panose="020B0604030504040204" pitchFamily="34" charset="0"/>
+                </a:rPr>
                 <a:t>se </a:t>
               </a:r>
               <a:r>
-                <a:rPr lang="pt-BR" altLang="pt-BR" sz="1600" i="1">
+                <a:rPr lang="pt-BR" altLang="pt-BR" sz="1600" i="1" dirty="0">
+                  <a:latin typeface="Tahoma" panose="020B0604030504040204" pitchFamily="34" charset="0"/>
                   <a:sym typeface="Symbol" pitchFamily="18" charset="2"/>
                 </a:rPr>
                 <a:t>    </a:t>
               </a:r>
               <a:r>
-                <a:rPr lang="pt-BR" altLang="pt-BR" sz="1600">
+                <a:rPr lang="pt-BR" altLang="pt-BR" sz="1600" dirty="0">
+                  <a:latin typeface="Tahoma" panose="020B0604030504040204" pitchFamily="34" charset="0"/>
                   <a:sym typeface="Symbol" pitchFamily="18" charset="2"/>
                 </a:rPr>
                 <a:t> e      são conhecidas</a:t>
               </a:r>
-              <a:endParaRPr lang="pt-BR" altLang="pt-BR" sz="1600"/>
+              <a:endParaRPr lang="pt-BR" altLang="pt-BR" sz="1600" dirty="0">
+                <a:latin typeface="Tahoma" panose="020B0604030504040204" pitchFamily="34" charset="0"/>
+              </a:endParaRPr>
             </a:p>
           </p:txBody>
         </p:sp>
@@ -38277,7 +38610,7 @@
           <p:spPr bwMode="auto">
             <a:xfrm>
               <a:off x="2253" y="2320"/>
-              <a:ext cx="2163" cy="212"/>
+              <a:ext cx="2185" cy="213"/>
             </a:xfrm>
             <a:prstGeom prst="rect">
               <a:avLst/>
@@ -38441,17 +38774,21 @@
                 <a:buNone/>
               </a:pPr>
               <a:r>
-                <a:rPr lang="pt-BR" altLang="pt-BR" sz="1600"/>
+                <a:rPr lang="pt-BR" altLang="pt-BR" sz="1600" dirty="0">
+                  <a:latin typeface="Tahoma" panose="020B0604030504040204" pitchFamily="34" charset="0"/>
+                </a:rPr>
                 <a:t>se </a:t>
               </a:r>
               <a:r>
-                <a:rPr lang="pt-BR" altLang="pt-BR" sz="1600" i="1">
+                <a:rPr lang="pt-BR" altLang="pt-BR" sz="1600" i="1" dirty="0">
+                  <a:latin typeface="Tahoma" panose="020B0604030504040204" pitchFamily="34" charset="0"/>
                   <a:sym typeface="Symbol" pitchFamily="18" charset="2"/>
                 </a:rPr>
                 <a:t>    </a:t>
               </a:r>
               <a:r>
-                <a:rPr lang="pt-BR" altLang="pt-BR" sz="1600">
+                <a:rPr lang="pt-BR" altLang="pt-BR" sz="1600" dirty="0">
+                  <a:latin typeface="Tahoma" panose="020B0604030504040204" pitchFamily="34" charset="0"/>
                   <a:sym typeface="Symbol" pitchFamily="18" charset="2"/>
                 </a:rPr>
                 <a:t> e      são desconhecidas, mas</a:t>
@@ -38629,7 +38966,9 @@
                 <a:buFontTx/>
                 <a:buNone/>
               </a:pPr>
-              <a:endParaRPr lang="pt-BR" altLang="pt-BR" sz="1600"/>
+              <a:endParaRPr lang="pt-BR" altLang="pt-BR" sz="1600" dirty="0">
+                <a:latin typeface="Tahoma" panose="020B0604030504040204" pitchFamily="34" charset="0"/>
+              </a:endParaRPr>
             </a:p>
           </p:txBody>
         </p:sp>
@@ -38649,23 +38988,23 @@
             <a:graphicData uri="http://schemas.openxmlformats.org/presentationml/2006/ole">
               <mc:AlternateContent xmlns:mc="http://schemas.openxmlformats.org/markup-compatibility/2006">
                 <mc:Choice xmlns:v="urn:schemas-microsoft-com:vml" Requires="v">
-                  <p:oleObj spid="_x0000_s19654" name="Equation" r:id="rId15" imgW="203112" imgH="241195" progId="Equation.DSMT4">
+                  <p:oleObj name="Equation" r:id="rId14" imgW="203112" imgH="241195" progId="Equation.DSMT4">
                     <p:embed/>
                   </p:oleObj>
                 </mc:Choice>
                 <mc:Fallback>
-                  <p:oleObj name="Equation" r:id="rId15" imgW="203112" imgH="241195" progId="Equation.DSMT4">
+                  <p:oleObj name="Equation" r:id="rId14" imgW="203112" imgH="241195" progId="Equation.DSMT4">
                     <p:embed/>
                     <p:pic>
                       <p:nvPicPr>
-                        <p:cNvPr id="0" name="Object 58"/>
+                        <p:cNvPr id="19470" name="Object 58"/>
                         <p:cNvPicPr>
                           <a:picLocks noChangeAspect="1" noChangeArrowheads="1"/>
                         </p:cNvPicPr>
                         <p:nvPr/>
                       </p:nvPicPr>
                       <p:blipFill>
-                        <a:blip r:embed="rId16">
+                        <a:blip r:embed="rId15">
                           <a:extLst>
                             <a:ext uri="{28A0092B-C50C-407E-A947-70E740481C1C}">
                               <a14:useLocalDpi xmlns:a14="http://schemas.microsoft.com/office/drawing/2010/main" val="0"/>
@@ -38732,23 +39071,23 @@
             <a:graphicData uri="http://schemas.openxmlformats.org/presentationml/2006/ole">
               <mc:AlternateContent xmlns:mc="http://schemas.openxmlformats.org/markup-compatibility/2006">
                 <mc:Choice xmlns:v="urn:schemas-microsoft-com:vml" Requires="v">
-                  <p:oleObj spid="_x0000_s19655" name="Equation" r:id="rId17" imgW="203112" imgH="241195" progId="Equation.DSMT4">
+                  <p:oleObj name="Equation" r:id="rId16" imgW="203112" imgH="241195" progId="Equation.DSMT4">
                     <p:embed/>
                   </p:oleObj>
                 </mc:Choice>
                 <mc:Fallback>
-                  <p:oleObj name="Equation" r:id="rId17" imgW="203112" imgH="241195" progId="Equation.DSMT4">
+                  <p:oleObj name="Equation" r:id="rId16" imgW="203112" imgH="241195" progId="Equation.DSMT4">
                     <p:embed/>
                     <p:pic>
                       <p:nvPicPr>
-                        <p:cNvPr id="0" name="Object 59"/>
+                        <p:cNvPr id="19471" name="Object 59"/>
                         <p:cNvPicPr>
                           <a:picLocks noChangeAspect="1" noChangeArrowheads="1"/>
                         </p:cNvPicPr>
                         <p:nvPr/>
                       </p:nvPicPr>
                       <p:blipFill>
-                        <a:blip r:embed="rId18">
+                        <a:blip r:embed="rId17">
                           <a:extLst>
                             <a:ext uri="{28A0092B-C50C-407E-A947-70E740481C1C}">
                               <a14:useLocalDpi xmlns:a14="http://schemas.microsoft.com/office/drawing/2010/main" val="0"/>
@@ -38815,23 +39154,23 @@
             <a:graphicData uri="http://schemas.openxmlformats.org/presentationml/2006/ole">
               <mc:AlternateContent xmlns:mc="http://schemas.openxmlformats.org/markup-compatibility/2006">
                 <mc:Choice xmlns:v="urn:schemas-microsoft-com:vml" Requires="v">
-                  <p:oleObj spid="_x0000_s19656" name="Equation" r:id="rId19" imgW="203112" imgH="241195" progId="Equation.DSMT4">
+                  <p:oleObj name="Equation" r:id="rId18" imgW="203112" imgH="241195" progId="Equation.DSMT4">
                     <p:embed/>
                   </p:oleObj>
                 </mc:Choice>
                 <mc:Fallback>
-                  <p:oleObj name="Equation" r:id="rId19" imgW="203112" imgH="241195" progId="Equation.DSMT4">
+                  <p:oleObj name="Equation" r:id="rId18" imgW="203112" imgH="241195" progId="Equation.DSMT4">
                     <p:embed/>
                     <p:pic>
                       <p:nvPicPr>
-                        <p:cNvPr id="0" name="Object 60"/>
+                        <p:cNvPr id="19472" name="Object 60"/>
                         <p:cNvPicPr>
                           <a:picLocks noChangeAspect="1" noChangeArrowheads="1"/>
                         </p:cNvPicPr>
                         <p:nvPr/>
                       </p:nvPicPr>
                       <p:blipFill>
-                        <a:blip r:embed="rId16">
+                        <a:blip r:embed="rId15">
                           <a:extLst>
                             <a:ext uri="{28A0092B-C50C-407E-A947-70E740481C1C}">
                               <a14:useLocalDpi xmlns:a14="http://schemas.microsoft.com/office/drawing/2010/main" val="0"/>
@@ -38898,23 +39237,23 @@
             <a:graphicData uri="http://schemas.openxmlformats.org/presentationml/2006/ole">
               <mc:AlternateContent xmlns:mc="http://schemas.openxmlformats.org/markup-compatibility/2006">
                 <mc:Choice xmlns:v="urn:schemas-microsoft-com:vml" Requires="v">
-                  <p:oleObj spid="_x0000_s19657" name="Equation" r:id="rId20" imgW="203112" imgH="241195" progId="Equation.DSMT4">
+                  <p:oleObj name="Equation" r:id="rId19" imgW="203112" imgH="241195" progId="Equation.DSMT4">
                     <p:embed/>
                   </p:oleObj>
                 </mc:Choice>
                 <mc:Fallback>
-                  <p:oleObj name="Equation" r:id="rId20" imgW="203112" imgH="241195" progId="Equation.DSMT4">
+                  <p:oleObj name="Equation" r:id="rId19" imgW="203112" imgH="241195" progId="Equation.DSMT4">
                     <p:embed/>
                     <p:pic>
                       <p:nvPicPr>
-                        <p:cNvPr id="0" name="Object 61"/>
+                        <p:cNvPr id="19473" name="Object 61"/>
                         <p:cNvPicPr>
                           <a:picLocks noChangeAspect="1" noChangeArrowheads="1"/>
                         </p:cNvPicPr>
                         <p:nvPr/>
                       </p:nvPicPr>
                       <p:blipFill>
-                        <a:blip r:embed="rId18">
+                        <a:blip r:embed="rId17">
                           <a:extLst>
                             <a:ext uri="{28A0092B-C50C-407E-A947-70E740481C1C}">
                               <a14:useLocalDpi xmlns:a14="http://schemas.microsoft.com/office/drawing/2010/main" val="0"/>
@@ -38981,23 +39320,23 @@
             <a:graphicData uri="http://schemas.openxmlformats.org/presentationml/2006/ole">
               <mc:AlternateContent xmlns:mc="http://schemas.openxmlformats.org/markup-compatibility/2006">
                 <mc:Choice xmlns:v="urn:schemas-microsoft-com:vml" Requires="v">
-                  <p:oleObj spid="_x0000_s19658" name="Equation" r:id="rId21" imgW="533169" imgH="241195" progId="Equation.DSMT4">
+                  <p:oleObj name="Equation" r:id="rId20" imgW="533169" imgH="241195" progId="Equation.DSMT4">
                     <p:embed/>
                   </p:oleObj>
                 </mc:Choice>
                 <mc:Fallback>
-                  <p:oleObj name="Equation" r:id="rId21" imgW="533169" imgH="241195" progId="Equation.DSMT4">
+                  <p:oleObj name="Equation" r:id="rId20" imgW="533169" imgH="241195" progId="Equation.DSMT4">
                     <p:embed/>
                     <p:pic>
                       <p:nvPicPr>
-                        <p:cNvPr id="0" name="Object 62"/>
+                        <p:cNvPr id="19474" name="Object 62"/>
                         <p:cNvPicPr>
                           <a:picLocks noChangeAspect="1" noChangeArrowheads="1"/>
                         </p:cNvPicPr>
                         <p:nvPr/>
                       </p:nvPicPr>
                       <p:blipFill>
-                        <a:blip r:embed="rId22">
+                        <a:blip r:embed="rId21">
                           <a:extLst>
                             <a:ext uri="{28A0092B-C50C-407E-A947-70E740481C1C}">
                               <a14:useLocalDpi xmlns:a14="http://schemas.microsoft.com/office/drawing/2010/main" val="0"/>
@@ -39080,23 +39419,23 @@
               <a:graphicData uri="http://schemas.openxmlformats.org/presentationml/2006/ole">
                 <mc:AlternateContent xmlns:mc="http://schemas.openxmlformats.org/markup-compatibility/2006">
                   <mc:Choice xmlns:v="urn:schemas-microsoft-com:vml" Requires="v">
-                    <p:oleObj spid="_x0000_s19659" name="Equation" r:id="rId23" imgW="457002" imgH="203112" progId="Equation.DSMT4">
+                    <p:oleObj name="Equation" r:id="rId22" imgW="457002" imgH="203112" progId="Equation.DSMT4">
                       <p:embed/>
                     </p:oleObj>
                   </mc:Choice>
                   <mc:Fallback>
-                    <p:oleObj name="Equation" r:id="rId23" imgW="457002" imgH="203112" progId="Equation.DSMT4">
+                    <p:oleObj name="Equation" r:id="rId22" imgW="457002" imgH="203112" progId="Equation.DSMT4">
                       <p:embed/>
                       <p:pic>
                         <p:nvPicPr>
-                          <p:cNvPr id="0" name="Object 53"/>
+                          <p:cNvPr id="19480" name="Object 53"/>
                           <p:cNvPicPr>
                             <a:picLocks noChangeAspect="1" noChangeArrowheads="1"/>
                           </p:cNvPicPr>
                           <p:nvPr/>
                         </p:nvPicPr>
                         <p:blipFill>
-                          <a:blip r:embed="rId4">
+                          <a:blip r:embed="rId3">
                             <a:extLst>
                               <a:ext uri="{28A0092B-C50C-407E-A947-70E740481C1C}">
                                 <a14:useLocalDpi xmlns:a14="http://schemas.microsoft.com/office/drawing/2010/main" val="0"/>
@@ -39163,23 +39502,23 @@
               <a:graphicData uri="http://schemas.openxmlformats.org/presentationml/2006/ole">
                 <mc:AlternateContent xmlns:mc="http://schemas.openxmlformats.org/markup-compatibility/2006">
                   <mc:Choice xmlns:v="urn:schemas-microsoft-com:vml" Requires="v">
-                    <p:oleObj spid="_x0000_s19660" name="Equation" r:id="rId24" imgW="406224" imgH="241195" progId="Equation.DSMT4">
+                    <p:oleObj name="Equation" r:id="rId23" imgW="406224" imgH="241195" progId="Equation.DSMT4">
                       <p:embed/>
                     </p:oleObj>
                   </mc:Choice>
                   <mc:Fallback>
-                    <p:oleObj name="Equation" r:id="rId24" imgW="406224" imgH="241195" progId="Equation.DSMT4">
+                    <p:oleObj name="Equation" r:id="rId23" imgW="406224" imgH="241195" progId="Equation.DSMT4">
                       <p:embed/>
                       <p:pic>
                         <p:nvPicPr>
-                          <p:cNvPr id="0" name="Object 54"/>
+                          <p:cNvPr id="19481" name="Object 54"/>
                           <p:cNvPicPr>
                             <a:picLocks noChangeAspect="1" noChangeArrowheads="1"/>
                           </p:cNvPicPr>
                           <p:nvPr/>
                         </p:nvPicPr>
                         <p:blipFill>
-                          <a:blip r:embed="rId25">
+                          <a:blip r:embed="rId24">
                             <a:extLst>
                               <a:ext uri="{28A0092B-C50C-407E-A947-70E740481C1C}">
                                 <a14:useLocalDpi xmlns:a14="http://schemas.microsoft.com/office/drawing/2010/main" val="0"/>
@@ -39246,23 +39585,23 @@
               <a:graphicData uri="http://schemas.openxmlformats.org/presentationml/2006/ole">
                 <mc:AlternateContent xmlns:mc="http://schemas.openxmlformats.org/markup-compatibility/2006">
                   <mc:Choice xmlns:v="urn:schemas-microsoft-com:vml" Requires="v">
-                    <p:oleObj spid="_x0000_s19661" name="Equation" r:id="rId26" imgW="152334" imgH="241195" progId="Equation.DSMT4">
+                    <p:oleObj name="Equation" r:id="rId25" imgW="152334" imgH="241195" progId="Equation.DSMT4">
                       <p:embed/>
                     </p:oleObj>
                   </mc:Choice>
                   <mc:Fallback>
-                    <p:oleObj name="Equation" r:id="rId26" imgW="152334" imgH="241195" progId="Equation.DSMT4">
+                    <p:oleObj name="Equation" r:id="rId25" imgW="152334" imgH="241195" progId="Equation.DSMT4">
                       <p:embed/>
                       <p:pic>
                         <p:nvPicPr>
-                          <p:cNvPr id="0" name="Object 89"/>
+                          <p:cNvPr id="19482" name="Object 89"/>
                           <p:cNvPicPr>
                             <a:picLocks noChangeAspect="1" noChangeArrowheads="1"/>
                           </p:cNvPicPr>
                           <p:nvPr/>
                         </p:nvPicPr>
                         <p:blipFill>
-                          <a:blip r:embed="rId27">
+                          <a:blip r:embed="rId26">
                             <a:extLst>
                               <a:ext uri="{28A0092B-C50C-407E-A947-70E740481C1C}">
                                 <a14:useLocalDpi xmlns:a14="http://schemas.microsoft.com/office/drawing/2010/main" val="0"/>
@@ -39325,7 +39664,7 @@
           <p:spPr bwMode="auto">
             <a:xfrm>
               <a:off x="2253" y="2659"/>
-              <a:ext cx="2163" cy="212"/>
+              <a:ext cx="2185" cy="213"/>
             </a:xfrm>
             <a:prstGeom prst="rect">
               <a:avLst/>
@@ -39489,17 +39828,21 @@
                 <a:buNone/>
               </a:pPr>
               <a:r>
-                <a:rPr lang="pt-BR" altLang="pt-BR" sz="1600"/>
+                <a:rPr lang="pt-BR" altLang="pt-BR" sz="1600" dirty="0">
+                  <a:latin typeface="Tahoma" panose="020B0604030504040204" pitchFamily="34" charset="0"/>
+                </a:rPr>
                 <a:t>se </a:t>
               </a:r>
               <a:r>
-                <a:rPr lang="pt-BR" altLang="pt-BR" sz="1600" i="1">
+                <a:rPr lang="pt-BR" altLang="pt-BR" sz="1600" i="1" dirty="0">
+                  <a:latin typeface="Tahoma" panose="020B0604030504040204" pitchFamily="34" charset="0"/>
                   <a:sym typeface="Symbol" pitchFamily="18" charset="2"/>
                 </a:rPr>
                 <a:t>    </a:t>
               </a:r>
               <a:r>
-                <a:rPr lang="pt-BR" altLang="pt-BR" sz="1600">
+                <a:rPr lang="pt-BR" altLang="pt-BR" sz="1600" dirty="0">
+                  <a:latin typeface="Tahoma" panose="020B0604030504040204" pitchFamily="34" charset="0"/>
                   <a:sym typeface="Symbol" pitchFamily="18" charset="2"/>
                 </a:rPr>
                 <a:t> e      são desconhecidas, mas</a:t>
@@ -39523,23 +39866,23 @@
             <a:graphicData uri="http://schemas.openxmlformats.org/presentationml/2006/ole">
               <mc:AlternateContent xmlns:mc="http://schemas.openxmlformats.org/markup-compatibility/2006">
                 <mc:Choice xmlns:v="urn:schemas-microsoft-com:vml" Requires="v">
-                  <p:oleObj spid="_x0000_s19662" name="Equation" r:id="rId28" imgW="203112" imgH="241195" progId="Equation.DSMT4">
+                  <p:oleObj name="Equation" r:id="rId27" imgW="203112" imgH="241195" progId="Equation.DSMT4">
                     <p:embed/>
                   </p:oleObj>
                 </mc:Choice>
                 <mc:Fallback>
-                  <p:oleObj name="Equation" r:id="rId28" imgW="203112" imgH="241195" progId="Equation.DSMT4">
+                  <p:oleObj name="Equation" r:id="rId27" imgW="203112" imgH="241195" progId="Equation.DSMT4">
                     <p:embed/>
                     <p:pic>
                       <p:nvPicPr>
-                        <p:cNvPr id="0" name="Object 91"/>
+                        <p:cNvPr id="19477" name="Object 91"/>
                         <p:cNvPicPr>
                           <a:picLocks noChangeAspect="1" noChangeArrowheads="1"/>
                         </p:cNvPicPr>
                         <p:nvPr/>
                       </p:nvPicPr>
                       <p:blipFill>
-                        <a:blip r:embed="rId16">
+                        <a:blip r:embed="rId15">
                           <a:extLst>
                             <a:ext uri="{28A0092B-C50C-407E-A947-70E740481C1C}">
                               <a14:useLocalDpi xmlns:a14="http://schemas.microsoft.com/office/drawing/2010/main" val="0"/>
@@ -39606,23 +39949,23 @@
             <a:graphicData uri="http://schemas.openxmlformats.org/presentationml/2006/ole">
               <mc:AlternateContent xmlns:mc="http://schemas.openxmlformats.org/markup-compatibility/2006">
                 <mc:Choice xmlns:v="urn:schemas-microsoft-com:vml" Requires="v">
-                  <p:oleObj spid="_x0000_s19663" name="Equation" r:id="rId29" imgW="203112" imgH="241195" progId="Equation.DSMT4">
+                  <p:oleObj name="Equation" r:id="rId28" imgW="203112" imgH="241195" progId="Equation.DSMT4">
                     <p:embed/>
                   </p:oleObj>
                 </mc:Choice>
                 <mc:Fallback>
-                  <p:oleObj name="Equation" r:id="rId29" imgW="203112" imgH="241195" progId="Equation.DSMT4">
+                  <p:oleObj name="Equation" r:id="rId28" imgW="203112" imgH="241195" progId="Equation.DSMT4">
                     <p:embed/>
                     <p:pic>
                       <p:nvPicPr>
-                        <p:cNvPr id="0" name="Object 92"/>
+                        <p:cNvPr id="19478" name="Object 92"/>
                         <p:cNvPicPr>
                           <a:picLocks noChangeAspect="1" noChangeArrowheads="1"/>
                         </p:cNvPicPr>
                         <p:nvPr/>
                       </p:nvPicPr>
                       <p:blipFill>
-                        <a:blip r:embed="rId18">
+                        <a:blip r:embed="rId17">
                           <a:extLst>
                             <a:ext uri="{28A0092B-C50C-407E-A947-70E740481C1C}">
                               <a14:useLocalDpi xmlns:a14="http://schemas.microsoft.com/office/drawing/2010/main" val="0"/>
@@ -39689,23 +40032,23 @@
             <a:graphicData uri="http://schemas.openxmlformats.org/presentationml/2006/ole">
               <mc:AlternateContent xmlns:mc="http://schemas.openxmlformats.org/markup-compatibility/2006">
                 <mc:Choice xmlns:v="urn:schemas-microsoft-com:vml" Requires="v">
-                  <p:oleObj spid="_x0000_s19664" name="Equation" r:id="rId30" imgW="533169" imgH="241195" progId="Equation.DSMT4">
+                  <p:oleObj name="Equation" r:id="rId29" imgW="533169" imgH="241195" progId="Equation.DSMT4">
                     <p:embed/>
                   </p:oleObj>
                 </mc:Choice>
                 <mc:Fallback>
-                  <p:oleObj name="Equation" r:id="rId30" imgW="533169" imgH="241195" progId="Equation.DSMT4">
+                  <p:oleObj name="Equation" r:id="rId29" imgW="533169" imgH="241195" progId="Equation.DSMT4">
                     <p:embed/>
                     <p:pic>
                       <p:nvPicPr>
-                        <p:cNvPr id="0" name="Object 93"/>
+                        <p:cNvPr id="19479" name="Object 93"/>
                         <p:cNvPicPr>
                           <a:picLocks noChangeAspect="1" noChangeArrowheads="1"/>
                         </p:cNvPicPr>
                         <p:nvPr/>
                       </p:nvPicPr>
                       <p:blipFill>
-                        <a:blip r:embed="rId31">
+                        <a:blip r:embed="rId30">
                           <a:extLst>
                             <a:ext uri="{28A0092B-C50C-407E-A947-70E740481C1C}">
                               <a14:useLocalDpi xmlns:a14="http://schemas.microsoft.com/office/drawing/2010/main" val="0"/>

--- a/ppt/06InfEstat_IntConf_Extra.pptx
+++ b/ppt/06InfEstat_IntConf_Extra.pptx
@@ -164,59 +164,43 @@
 </p:presentation>
 </file>
 
+<file path=ppt/revisionInfo.xml><?xml version="1.0" encoding="utf-8"?>
+<p1510:revInfo xmlns:a="http://schemas.openxmlformats.org/drawingml/2006/main" xmlns:r="http://schemas.openxmlformats.org/officeDocument/2006/relationships" xmlns:p1510="http://schemas.microsoft.com/office/powerpoint/2015/10/main">
+  <p1510:revLst>
+    <p1510:client id="{75EE35EB-5CBF-4CAF-BD0F-5A56D160CB67}" v="1" dt="2026-05-18T17:16:51.809"/>
+  </p1510:revLst>
+</p1510:revInfo>
+</file>
+
 <file path=ppt/changesInfos/changesInfo1.xml><?xml version="1.0" encoding="utf-8"?>
 <pc:chgInfo xmlns:a="http://schemas.openxmlformats.org/drawingml/2006/main" xmlns:r="http://schemas.openxmlformats.org/officeDocument/2006/relationships" xmlns:ac="http://schemas.microsoft.com/office/drawing/2013/main/command" xmlns:pc="http://schemas.microsoft.com/office/powerpoint/2013/main/command">
   <pc:docChgLst>
-    <pc:chgData name="Camilo Daleles Rennó" userId="eac9aab033b2f962" providerId="LiveId" clId="{66F2CC40-D4C3-4CFA-ABD7-5BED1CC1AA32}"/>
+    <pc:chgData name="Camilo Daleles Rennó" userId="eac9aab033b2f962" providerId="LiveId" clId="{2F84B5F6-56BC-4922-A3EF-887C69771227}"/>
     <pc:docChg chg="custSel modSld">
-      <pc:chgData name="Camilo Daleles Rennó" userId="eac9aab033b2f962" providerId="LiveId" clId="{66F2CC40-D4C3-4CFA-ABD7-5BED1CC1AA32}" dt="2025-05-19T15:48:09.206" v="3"/>
+      <pc:chgData name="Camilo Daleles Rennó" userId="eac9aab033b2f962" providerId="LiveId" clId="{2F84B5F6-56BC-4922-A3EF-887C69771227}" dt="2026-05-18T17:16:51.809" v="1"/>
       <pc:docMkLst>
         <pc:docMk/>
       </pc:docMkLst>
       <pc:sldChg chg="addSp delSp modSp mod">
-        <pc:chgData name="Camilo Daleles Rennó" userId="eac9aab033b2f962" providerId="LiveId" clId="{66F2CC40-D4C3-4CFA-ABD7-5BED1CC1AA32}" dt="2025-05-19T15:48:09.206" v="3"/>
+        <pc:chgData name="Camilo Daleles Rennó" userId="eac9aab033b2f962" providerId="LiveId" clId="{2F84B5F6-56BC-4922-A3EF-887C69771227}" dt="2026-05-18T17:16:51.809" v="1"/>
         <pc:sldMkLst>
           <pc:docMk/>
           <pc:sldMk cId="0" sldId="380"/>
         </pc:sldMkLst>
-        <pc:spChg chg="add mod">
-          <ac:chgData name="Camilo Daleles Rennó" userId="eac9aab033b2f962" providerId="LiveId" clId="{66F2CC40-D4C3-4CFA-ABD7-5BED1CC1AA32}" dt="2025-05-19T15:48:09.206" v="3"/>
+        <pc:spChg chg="del">
+          <ac:chgData name="Camilo Daleles Rennó" userId="eac9aab033b2f962" providerId="LiveId" clId="{2F84B5F6-56BC-4922-A3EF-887C69771227}" dt="2026-05-18T17:16:11.050" v="0" actId="478"/>
           <ac:spMkLst>
             <pc:docMk/>
             <pc:sldMk cId="0" sldId="380"/>
             <ac:spMk id="2" creationId="{FD6F7D79-BD36-9214-30C1-166AAE5C5A52}"/>
           </ac:spMkLst>
         </pc:spChg>
-        <pc:spChg chg="mod">
-          <ac:chgData name="Camilo Daleles Rennó" userId="eac9aab033b2f962" providerId="LiveId" clId="{66F2CC40-D4C3-4CFA-ABD7-5BED1CC1AA32}" dt="2025-05-07T16:19:53.924" v="1" actId="20577"/>
+        <pc:spChg chg="add mod">
+          <ac:chgData name="Camilo Daleles Rennó" userId="eac9aab033b2f962" providerId="LiveId" clId="{2F84B5F6-56BC-4922-A3EF-887C69771227}" dt="2026-05-18T17:16:51.809" v="1"/>
           <ac:spMkLst>
             <pc:docMk/>
             <pc:sldMk cId="0" sldId="380"/>
-            <ac:spMk id="3074" creationId="{00000000-0000-0000-0000-000000000000}"/>
-          </ac:spMkLst>
-        </pc:spChg>
-      </pc:sldChg>
-    </pc:docChg>
-  </pc:docChgLst>
-  <pc:docChgLst>
-    <pc:chgData name="Camilo Daleles Rennó" userId="eac9aab033b2f962" providerId="LiveId" clId="{23BF80B5-7ECC-4E74-BDF7-B3ADE7D62386}"/>
-    <pc:docChg chg="modSld">
-      <pc:chgData name="Camilo Daleles Rennó" userId="eac9aab033b2f962" providerId="LiveId" clId="{23BF80B5-7ECC-4E74-BDF7-B3ADE7D62386}" dt="2025-06-09T13:11:27.122" v="11" actId="20577"/>
-      <pc:docMkLst>
-        <pc:docMk/>
-      </pc:docMkLst>
-      <pc:sldChg chg="modSp mod">
-        <pc:chgData name="Camilo Daleles Rennó" userId="eac9aab033b2f962" providerId="LiveId" clId="{23BF80B5-7ECC-4E74-BDF7-B3ADE7D62386}" dt="2025-06-09T13:11:27.122" v="11" actId="20577"/>
-        <pc:sldMkLst>
-          <pc:docMk/>
-          <pc:sldMk cId="0" sldId="380"/>
-        </pc:sldMkLst>
-        <pc:spChg chg="mod">
-          <ac:chgData name="Camilo Daleles Rennó" userId="eac9aab033b2f962" providerId="LiveId" clId="{23BF80B5-7ECC-4E74-BDF7-B3ADE7D62386}" dt="2025-06-09T13:11:27.122" v="11" actId="20577"/>
-          <ac:spMkLst>
-            <pc:docMk/>
-            <pc:sldMk cId="0" sldId="380"/>
-            <ac:spMk id="3074" creationId="{00000000-0000-0000-0000-000000000000}"/>
+            <ac:spMk id="3" creationId="{A80134CF-D599-6DE6-A599-6D65220D7D5C}"/>
           </ac:spMkLst>
         </pc:spChg>
       </pc:sldChg>
@@ -323,7 +307,7 @@
               <a:pPr>
                 <a:defRPr/>
               </a:pPr>
-              <a:t>09/06/2025</a:t>
+              <a:t>18/05/2026</a:t>
             </a:fld>
             <a:endParaRPr lang="pt-BR" dirty="0"/>
           </a:p>
@@ -4136,10 +4120,10 @@
       </p:sp>
       <p:sp>
         <p:nvSpPr>
-          <p:cNvPr id="2" name="Rectangle 3">
+          <p:cNvPr id="3" name="Rectangle 3">
             <a:extLst>
               <a:ext uri="{FF2B5EF4-FFF2-40B4-BE49-F238E27FC236}">
-                <a16:creationId xmlns:a16="http://schemas.microsoft.com/office/drawing/2014/main" id="{FD6F7D79-BD36-9214-30C1-166AAE5C5A52}"/>
+                <a16:creationId xmlns:a16="http://schemas.microsoft.com/office/drawing/2014/main" id="{A80134CF-D599-6DE6-A599-6D65220D7D5C}"/>
               </a:ext>
             </a:extLst>
           </p:cNvPr>
@@ -4150,8 +4134,8 @@
         </p:nvSpPr>
         <p:spPr bwMode="auto">
           <a:xfrm>
-            <a:off x="4427984" y="5903913"/>
-            <a:ext cx="4487416" cy="838200"/>
+            <a:off x="3851920" y="5903913"/>
+            <a:ext cx="5063480" cy="838200"/>
           </a:xfrm>
           <a:prstGeom prst="rect">
             <a:avLst/>
@@ -4244,65 +4228,14 @@
               <a:t>acesso do conteúdo do curso em </a:t>
             </a:r>
             <a:r>
-              <a:rPr lang="pt-BR" sz="1200" kern="0" dirty="0" err="1">
-                <a:solidFill>
-                  <a:schemeClr val="accent2"/>
-                </a:solidFill>
-                <a:latin typeface="Arial Unicode MS" pitchFamily="34" charset="-128"/>
-                <a:hlinkClick r:id="rId2">
-                  <a:extLst>
-                    <a:ext uri="{A12FA001-AC4F-418D-AE19-62706E023703}">
-                      <ahyp:hlinkClr xmlns:ahyp="http://schemas.microsoft.com/office/drawing/2018/hyperlinkcolor" val="tx"/>
-                    </a:ext>
-                  </a:extLst>
-                </a:hlinkClick>
-              </a:rPr>
-              <a:t>Bibdigital</a:t>
-            </a:r>
-            <a:r>
               <a:rPr lang="pt-BR" sz="1200" kern="0" dirty="0">
                 <a:solidFill>
                   <a:schemeClr val="accent2"/>
                 </a:solidFill>
                 <a:latin typeface="Arial Unicode MS" pitchFamily="34" charset="-128"/>
-                <a:hlinkClick r:id="rId2">
-                  <a:extLst>
-                    <a:ext uri="{A12FA001-AC4F-418D-AE19-62706E023703}">
-                      <ahyp:hlinkClr xmlns:ahyp="http://schemas.microsoft.com/office/drawing/2018/hyperlinkcolor" val="tx"/>
-                    </a:ext>
-                  </a:extLst>
-                </a:hlinkClick>
               </a:rPr>
-              <a:t> do INPE</a:t>
+              <a:t>https://cdrenno.github.io/Estatistica/</a:t>
             </a:r>
-            <a:r>
-              <a:rPr lang="pt-BR" sz="1200" kern="0" dirty="0">
-                <a:latin typeface="Arial Unicode MS" pitchFamily="34" charset="-128"/>
-              </a:rPr>
-              <a:t> ou </a:t>
-            </a:r>
-            <a:r>
-              <a:rPr lang="pt-BR" sz="1200" kern="0" dirty="0">
-                <a:solidFill>
-                  <a:schemeClr val="accent2"/>
-                </a:solidFill>
-                <a:latin typeface="Arial Unicode MS" pitchFamily="34" charset="-128"/>
-                <a:hlinkClick r:id="rId3">
-                  <a:extLst>
-                    <a:ext uri="{A12FA001-AC4F-418D-AE19-62706E023703}">
-                      <ahyp:hlinkClr xmlns:ahyp="http://schemas.microsoft.com/office/drawing/2018/hyperlinkcolor" val="tx"/>
-                    </a:ext>
-                  </a:extLst>
-                </a:hlinkClick>
-              </a:rPr>
-              <a:t>GitHub</a:t>
-            </a:r>
-            <a:endParaRPr lang="pt-BR" sz="1200" kern="0" dirty="0">
-              <a:solidFill>
-                <a:schemeClr val="accent2"/>
-              </a:solidFill>
-              <a:latin typeface="Arial Unicode MS" pitchFamily="34" charset="-128"/>
-            </a:endParaRPr>
           </a:p>
         </p:txBody>
       </p:sp>
